--- a/docs/public/course-assets/course-pptx/ag-004.pptx
+++ b/docs/public/course-assets/course-pptx/ag-004.pptx
@@ -2,24 +2,24 @@
 <file path=ppt/presentation.xml><?xml version="1.0" encoding="utf-8"?>
 <p:presentation xmlns:p="http://schemas.openxmlformats.org/presentationml/2006/main">
   <p:sldMasterIdLst>
-    <p:sldMasterId xmlns:r="http://schemas.openxmlformats.org/officeDocument/2006/relationships" id="2147483648" r:id="R581ddf4dda21456e"/>
+    <p:sldMasterId xmlns:r="http://schemas.openxmlformats.org/officeDocument/2006/relationships" id="2147483648" r:id="Ra349380c7b894f83"/>
   </p:sldMasterIdLst>
   <p:notesMasterIdLst>
-    <p:notesMasterId xmlns:r="http://schemas.openxmlformats.org/officeDocument/2006/relationships" r:id="R66f2797dd0a640ab"/>
+    <p:notesMasterId xmlns:r="http://schemas.openxmlformats.org/officeDocument/2006/relationships" r:id="Rb796fcb9765e4713"/>
   </p:notesMasterIdLst>
   <p:sldIdLst>
-    <p:sldId xmlns:r="http://schemas.openxmlformats.org/officeDocument/2006/relationships" id="256" r:id="R21dd755116544e6e"/>
-    <p:sldId xmlns:r="http://schemas.openxmlformats.org/officeDocument/2006/relationships" id="257" r:id="Rd6fb136620694c27"/>
-    <p:sldId xmlns:r="http://schemas.openxmlformats.org/officeDocument/2006/relationships" id="258" r:id="R5dc49a9a9f324004"/>
-    <p:sldId xmlns:r="http://schemas.openxmlformats.org/officeDocument/2006/relationships" id="259" r:id="R96ae8249fbe1458c"/>
-    <p:sldId xmlns:r="http://schemas.openxmlformats.org/officeDocument/2006/relationships" id="260" r:id="Rddfb43e9094747de"/>
-    <p:sldId xmlns:r="http://schemas.openxmlformats.org/officeDocument/2006/relationships" id="261" r:id="R72a469db03e64dd8"/>
-    <p:sldId xmlns:r="http://schemas.openxmlformats.org/officeDocument/2006/relationships" id="262" r:id="Rd9165831d2e84b38"/>
-    <p:sldId xmlns:r="http://schemas.openxmlformats.org/officeDocument/2006/relationships" id="263" r:id="R3902979eeed447a1"/>
-    <p:sldId xmlns:r="http://schemas.openxmlformats.org/officeDocument/2006/relationships" id="264" r:id="Rf37bd57964eb4fe2"/>
-    <p:sldId xmlns:r="http://schemas.openxmlformats.org/officeDocument/2006/relationships" id="265" r:id="Rb40a63d1919841aa"/>
-    <p:sldId xmlns:r="http://schemas.openxmlformats.org/officeDocument/2006/relationships" id="266" r:id="Ra97935a687af4e99"/>
-    <p:sldId xmlns:r="http://schemas.openxmlformats.org/officeDocument/2006/relationships" id="267" r:id="R2578c4c1b02f4d9a"/>
+    <p:sldId xmlns:r="http://schemas.openxmlformats.org/officeDocument/2006/relationships" id="256" r:id="Re84a636c0a4e4de7"/>
+    <p:sldId xmlns:r="http://schemas.openxmlformats.org/officeDocument/2006/relationships" id="257" r:id="R8cd71e1e92f74aff"/>
+    <p:sldId xmlns:r="http://schemas.openxmlformats.org/officeDocument/2006/relationships" id="258" r:id="Rdef291e8144b48fc"/>
+    <p:sldId xmlns:r="http://schemas.openxmlformats.org/officeDocument/2006/relationships" id="259" r:id="R74a5228026b34c80"/>
+    <p:sldId xmlns:r="http://schemas.openxmlformats.org/officeDocument/2006/relationships" id="260" r:id="R600c340546654cc1"/>
+    <p:sldId xmlns:r="http://schemas.openxmlformats.org/officeDocument/2006/relationships" id="261" r:id="Rea7e7f688859442f"/>
+    <p:sldId xmlns:r="http://schemas.openxmlformats.org/officeDocument/2006/relationships" id="262" r:id="Reba3b904af714b26"/>
+    <p:sldId xmlns:r="http://schemas.openxmlformats.org/officeDocument/2006/relationships" id="263" r:id="R0557628f877b4e70"/>
+    <p:sldId xmlns:r="http://schemas.openxmlformats.org/officeDocument/2006/relationships" id="264" r:id="R42cdfa0c6ca542a4"/>
+    <p:sldId xmlns:r="http://schemas.openxmlformats.org/officeDocument/2006/relationships" id="265" r:id="R4aa984512f7f4026"/>
+    <p:sldId xmlns:r="http://schemas.openxmlformats.org/officeDocument/2006/relationships" id="266" r:id="R065c3b8cc43a407f"/>
+    <p:sldId xmlns:r="http://schemas.openxmlformats.org/officeDocument/2006/relationships" id="267" r:id="R3a4be937cce24cda"/>
   </p:sldIdLst>
   <p:sldSz cx="12192000" cy="6858000"/>
   <p:notesSz cx="6858000" cy="9144000"/>
@@ -1338,7 +1338,7 @@
   </p:cSld>
   <p:clrMap bg1="lt1" tx1="dk1" bg2="lt2" tx2="dk2" accent1="accent1" accent2="accent2" accent3="accent3" accent4="accent4" accent5="accent5" accent6="accent6" hlink="hlink" folHlink="folHlink"/>
   <p:sldLayoutIdLst>
-    <p:sldLayoutId xmlns:r="http://schemas.openxmlformats.org/officeDocument/2006/relationships" id="2147483649" r:id="R54a2a4ee7a954eee"/>
+    <p:sldLayoutId xmlns:r="http://schemas.openxmlformats.org/officeDocument/2006/relationships" id="2147483649" r:id="Rcb7980d3854b4d17"/>
   </p:sldLayoutIdLst>
   <p:txStyles>
     <p:titleStyle>
@@ -1889,7 +1889,7 @@
           <p:cNvPr id="1" name="cover-rule">
             <a:extLst xmlns:a="http://schemas.openxmlformats.org/drawingml/2006/main">
               <a:ext uri="{FF2B5EF4-FFF2-40B4-BE49-F238E27FC236}">
-                <a16:creationId xmlns:a16="http://schemas.microsoft.com/office/drawing/2014/main" id="{AE03B19B-6DA4-45AC-AE4E-5DCA761C846F}"/>
+                <a16:creationId xmlns:a16="http://schemas.microsoft.com/office/drawing/2014/main" id="{7705BE3D-ECAD-4E65-947A-5F73800248B0}"/>
               </a:ext>
             </a:extLst>
           </p:cNvPr>
@@ -1922,7 +1922,7 @@
           <p:cNvPr id="2" name="cover-ring-1">
             <a:extLst xmlns:a="http://schemas.openxmlformats.org/drawingml/2006/main">
               <a:ext uri="{FF2B5EF4-FFF2-40B4-BE49-F238E27FC236}">
-                <a16:creationId xmlns:a16="http://schemas.microsoft.com/office/drawing/2014/main" id="{9360A073-C7E6-4578-96A1-92ED490E2C82}"/>
+                <a16:creationId xmlns:a16="http://schemas.microsoft.com/office/drawing/2014/main" id="{18B8E706-2C08-4AC1-B599-D709BEAB98A0}"/>
               </a:ext>
             </a:extLst>
           </p:cNvPr>
@@ -1953,7 +1953,7 @@
           <p:cNvPr id="3" name="cover-ring-2">
             <a:extLst xmlns:a="http://schemas.openxmlformats.org/drawingml/2006/main">
               <a:ext uri="{FF2B5EF4-FFF2-40B4-BE49-F238E27FC236}">
-                <a16:creationId xmlns:a16="http://schemas.microsoft.com/office/drawing/2014/main" id="{B3F9F724-01C0-4A37-9912-1B9D73D78B84}"/>
+                <a16:creationId xmlns:a16="http://schemas.microsoft.com/office/drawing/2014/main" id="{9AD63F0B-F1C0-4102-9093-DDBD9A70128E}"/>
               </a:ext>
             </a:extLst>
           </p:cNvPr>
@@ -1984,7 +1984,7 @@
           <p:cNvPr id="4" name="cover-core">
             <a:extLst xmlns:a="http://schemas.openxmlformats.org/drawingml/2006/main">
               <a:ext uri="{FF2B5EF4-FFF2-40B4-BE49-F238E27FC236}">
-                <a16:creationId xmlns:a16="http://schemas.microsoft.com/office/drawing/2014/main" id="{FCD74FC2-C16C-477C-9D44-8B50C624D13A}"/>
+                <a16:creationId xmlns:a16="http://schemas.microsoft.com/office/drawing/2014/main" id="{A3B74930-743A-4755-8DE6-C0FF58DB9BAA}"/>
               </a:ext>
             </a:extLst>
           </p:cNvPr>
@@ -2017,7 +2017,7 @@
           <p:cNvPr id="5" name="cover-line-1">
             <a:extLst xmlns:a="http://schemas.openxmlformats.org/drawingml/2006/main">
               <a:ext uri="{FF2B5EF4-FFF2-40B4-BE49-F238E27FC236}">
-                <a16:creationId xmlns:a16="http://schemas.microsoft.com/office/drawing/2014/main" id="{99377526-C025-46D1-9792-8FC5A65AD065}"/>
+                <a16:creationId xmlns:a16="http://schemas.microsoft.com/office/drawing/2014/main" id="{AF13744A-09D0-4749-A5D5-BD37D35200C2}"/>
               </a:ext>
             </a:extLst>
           </p:cNvPr>
@@ -2048,7 +2048,7 @@
           <p:cNvPr id="6" name="cover-line-2">
             <a:extLst xmlns:a="http://schemas.openxmlformats.org/drawingml/2006/main">
               <a:ext uri="{FF2B5EF4-FFF2-40B4-BE49-F238E27FC236}">
-                <a16:creationId xmlns:a16="http://schemas.microsoft.com/office/drawing/2014/main" id="{3AE2B8E7-09B2-4805-BBDB-59F54337E861}"/>
+                <a16:creationId xmlns:a16="http://schemas.microsoft.com/office/drawing/2014/main" id="{C3992FB7-22FA-4744-A78F-EB50AB44A5F3}"/>
               </a:ext>
             </a:extLst>
           </p:cNvPr>
@@ -2079,7 +2079,7 @@
           <p:cNvPr id="7" name="cover-eyebrow">
             <a:extLst xmlns:a="http://schemas.openxmlformats.org/drawingml/2006/main">
               <a:ext uri="{FF2B5EF4-FFF2-40B4-BE49-F238E27FC236}">
-                <a16:creationId xmlns:a16="http://schemas.microsoft.com/office/drawing/2014/main" id="{192C1850-05DE-4BEF-A57B-3D22B0707AD5}"/>
+                <a16:creationId xmlns:a16="http://schemas.microsoft.com/office/drawing/2014/main" id="{E944F409-EED2-4AFB-BC91-3F2F72125236}"/>
               </a:ext>
             </a:extLst>
           </p:cNvPr>
@@ -2137,7 +2137,7 @@
           <p:cNvPr id="8" name="cover-title">
             <a:extLst xmlns:a="http://schemas.openxmlformats.org/drawingml/2006/main">
               <a:ext uri="{FF2B5EF4-FFF2-40B4-BE49-F238E27FC236}">
-                <a16:creationId xmlns:a16="http://schemas.microsoft.com/office/drawing/2014/main" id="{3D17FB61-40E8-4A80-8E77-CB8334782878}"/>
+                <a16:creationId xmlns:a16="http://schemas.microsoft.com/office/drawing/2014/main" id="{D3DF4401-368F-42E0-8DBD-86FFD4004331}"/>
               </a:ext>
             </a:extLst>
           </p:cNvPr>
@@ -2195,7 +2195,7 @@
           <p:cNvPr id="9" name="cover-subtitle">
             <a:extLst xmlns:a="http://schemas.openxmlformats.org/drawingml/2006/main">
               <a:ext uri="{FF2B5EF4-FFF2-40B4-BE49-F238E27FC236}">
-                <a16:creationId xmlns:a16="http://schemas.microsoft.com/office/drawing/2014/main" id="{2346E54D-62C1-4F82-910C-EA907A3D17D0}"/>
+                <a16:creationId xmlns:a16="http://schemas.microsoft.com/office/drawing/2014/main" id="{1824344E-3CB4-4433-A2A7-C7619D4A01EB}"/>
               </a:ext>
             </a:extLst>
           </p:cNvPr>
@@ -2257,7 +2257,7 @@
           <p:cNvPr id="10" name="cover-lead">
             <a:extLst xmlns:a="http://schemas.openxmlformats.org/drawingml/2006/main">
               <a:ext uri="{FF2B5EF4-FFF2-40B4-BE49-F238E27FC236}">
-                <a16:creationId xmlns:a16="http://schemas.microsoft.com/office/drawing/2014/main" id="{234730C3-9162-4C48-9423-ABEC4A19873E}"/>
+                <a16:creationId xmlns:a16="http://schemas.microsoft.com/office/drawing/2014/main" id="{EE8814D3-A793-4BA4-A8D9-1F74C2B507DF}"/>
               </a:ext>
             </a:extLst>
           </p:cNvPr>
@@ -2305,7 +2305,7 @@
                 <a:ea typeface="PingFang SC"/>
                 <a:cs typeface="PingFang SC"/>
               </a:rPr>
-              <a:t>AI Coding 是利用模型理解代码、生成修改、解释错误和辅助测试。Vibe Coding 更强调用自然语言快速表达意图，在运行结果与直觉反馈之间连续迭代…</a:t>
+              <a:t>AI Coding 是利用模型理解代码、生成修改、解释错误和辅助测试；Vibe Coding 更强调用自然语言快速表达意图；在运行结果与直觉反馈之间连续迭代</a:t>
             </a:r>
           </a:p>
         </p:txBody>
@@ -2315,7 +2315,7 @@
           <p:cNvPr id="11" name="cover-course">
             <a:extLst xmlns:a="http://schemas.openxmlformats.org/drawingml/2006/main">
               <a:ext uri="{FF2B5EF4-FFF2-40B4-BE49-F238E27FC236}">
-                <a16:creationId xmlns:a16="http://schemas.microsoft.com/office/drawing/2014/main" id="{135D7052-1257-4666-9AA6-DA7A834BBEE9}"/>
+                <a16:creationId xmlns:a16="http://schemas.microsoft.com/office/drawing/2014/main" id="{4CD61543-DBC3-4951-BD4A-B61B1AE032A0}"/>
               </a:ext>
             </a:extLst>
           </p:cNvPr>
@@ -2373,7 +2373,7 @@
           <p:cNvPr id="12" name="cover-id">
             <a:extLst xmlns:a="http://schemas.openxmlformats.org/drawingml/2006/main">
               <a:ext uri="{FF2B5EF4-FFF2-40B4-BE49-F238E27FC236}">
-                <a16:creationId xmlns:a16="http://schemas.microsoft.com/office/drawing/2014/main" id="{342478DC-C1E4-4B2C-97CD-0C3E3B46FC5B}"/>
+                <a16:creationId xmlns:a16="http://schemas.microsoft.com/office/drawing/2014/main" id="{1CE51050-8CB6-4A88-AB2B-632C6FC979D6}"/>
               </a:ext>
             </a:extLst>
           </p:cNvPr>
@@ -2429,7 +2429,7 @@
     </p:spTree>
     <p:extLst>
       <p:ext uri="{BB962C8B-B14F-4D97-AF65-F5344CB8AC3E}">
-        <p14:creationId xmlns:p14="http://schemas.microsoft.com/office/powerpoint/2010/main" val="370679229"/>
+        <p14:creationId xmlns:p14="http://schemas.microsoft.com/office/powerpoint/2010/main" val="524696870"/>
       </p:ext>
     </p:extLst>
   </p:cSld>
@@ -2460,7 +2460,7 @@
           <p:cNvPr id="1" name="s10-rule">
             <a:extLst xmlns:a="http://schemas.openxmlformats.org/drawingml/2006/main">
               <a:ext uri="{FF2B5EF4-FFF2-40B4-BE49-F238E27FC236}">
-                <a16:creationId xmlns:a16="http://schemas.microsoft.com/office/drawing/2014/main" id="{FE352D3E-1E27-45EE-B1C8-A57E90980093}"/>
+                <a16:creationId xmlns:a16="http://schemas.microsoft.com/office/drawing/2014/main" id="{568E5325-87BA-45FB-AB54-0E111BDA5391}"/>
               </a:ext>
             </a:extLst>
           </p:cNvPr>
@@ -2493,7 +2493,7 @@
           <p:cNvPr id="2" name="s10-eyebrow">
             <a:extLst xmlns:a="http://schemas.openxmlformats.org/drawingml/2006/main">
               <a:ext uri="{FF2B5EF4-FFF2-40B4-BE49-F238E27FC236}">
-                <a16:creationId xmlns:a16="http://schemas.microsoft.com/office/drawing/2014/main" id="{F8B0FA71-DF21-424F-8E1A-C86477ABD861}"/>
+                <a16:creationId xmlns:a16="http://schemas.microsoft.com/office/drawing/2014/main" id="{4B86E79A-F31B-41FF-A39A-BD9E450BD954}"/>
               </a:ext>
             </a:extLst>
           </p:cNvPr>
@@ -2551,7 +2551,7 @@
           <p:cNvPr id="3" name="s10-title">
             <a:extLst xmlns:a="http://schemas.openxmlformats.org/drawingml/2006/main">
               <a:ext uri="{FF2B5EF4-FFF2-40B4-BE49-F238E27FC236}">
-                <a16:creationId xmlns:a16="http://schemas.microsoft.com/office/drawing/2014/main" id="{B210E487-D0D3-4A1A-99FD-ED8FED37B2A3}"/>
+                <a16:creationId xmlns:a16="http://schemas.microsoft.com/office/drawing/2014/main" id="{FC981293-9D59-48A7-93D6-DCF439AE8FF7}"/>
               </a:ext>
             </a:extLst>
           </p:cNvPr>
@@ -2599,7 +2599,7 @@
                 <a:ea typeface="PingFang SC"/>
                 <a:cs typeface="PingFang SC"/>
               </a:rPr>
-              <a:t>把方法落实为可验证的行动</a:t>
+              <a:t>AI Coding：一次可验收练习</a:t>
             </a:r>
           </a:p>
         </p:txBody>
@@ -2609,7 +2609,7 @@
           <p:cNvPr id="4" name="s10-footer">
             <a:extLst xmlns:a="http://schemas.openxmlformats.org/drawingml/2006/main">
               <a:ext uri="{FF2B5EF4-FFF2-40B4-BE49-F238E27FC236}">
-                <a16:creationId xmlns:a16="http://schemas.microsoft.com/office/drawing/2014/main" id="{20025B98-69A6-45D4-AE0F-C635B7D155A8}"/>
+                <a16:creationId xmlns:a16="http://schemas.microsoft.com/office/drawing/2014/main" id="{29E00783-803F-41C8-B2A6-734DE67A3BB3}"/>
               </a:ext>
             </a:extLst>
           </p:cNvPr>
@@ -2640,7 +2640,7 @@
           <p:cNvPr id="5" name="s10-identity">
             <a:extLst xmlns:a="http://schemas.openxmlformats.org/drawingml/2006/main">
               <a:ext uri="{FF2B5EF4-FFF2-40B4-BE49-F238E27FC236}">
-                <a16:creationId xmlns:a16="http://schemas.microsoft.com/office/drawing/2014/main" id="{52C833C5-F6CE-49D5-8C4B-CAC4691B3EB7}"/>
+                <a16:creationId xmlns:a16="http://schemas.microsoft.com/office/drawing/2014/main" id="{4853A1A2-8C20-4B5E-A91E-A8992B0A5DEE}"/>
               </a:ext>
             </a:extLst>
           </p:cNvPr>
@@ -2698,7 +2698,7 @@
           <p:cNvPr id="6" name="practice-circle-0">
             <a:extLst xmlns:a="http://schemas.openxmlformats.org/drawingml/2006/main">
               <a:ext uri="{FF2B5EF4-FFF2-40B4-BE49-F238E27FC236}">
-                <a16:creationId xmlns:a16="http://schemas.microsoft.com/office/drawing/2014/main" id="{5F75480E-8420-45E6-8691-26F703D7C757}"/>
+                <a16:creationId xmlns:a16="http://schemas.microsoft.com/office/drawing/2014/main" id="{B4CDBD26-0F8A-42AF-8663-ADD9C5F1A898}"/>
               </a:ext>
             </a:extLst>
           </p:cNvPr>
@@ -2731,7 +2731,7 @@
           <p:cNvPr id="7" name="practice-number-0">
             <a:extLst xmlns:a="http://schemas.openxmlformats.org/drawingml/2006/main">
               <a:ext uri="{FF2B5EF4-FFF2-40B4-BE49-F238E27FC236}">
-                <a16:creationId xmlns:a16="http://schemas.microsoft.com/office/drawing/2014/main" id="{FD827C49-C7BE-4C2F-981B-7BA3E9555F3D}"/>
+                <a16:creationId xmlns:a16="http://schemas.microsoft.com/office/drawing/2014/main" id="{BCB9E520-022A-4EA7-806F-9236BFEB9473}"/>
               </a:ext>
             </a:extLst>
           </p:cNvPr>
@@ -2789,7 +2789,7 @@
           <p:cNvPr id="8" name="practice-item-0">
             <a:extLst xmlns:a="http://schemas.openxmlformats.org/drawingml/2006/main">
               <a:ext uri="{FF2B5EF4-FFF2-40B4-BE49-F238E27FC236}">
-                <a16:creationId xmlns:a16="http://schemas.microsoft.com/office/drawing/2014/main" id="{E0A625A4-BEED-4116-A9C1-5A91CE2A8B08}"/>
+                <a16:creationId xmlns:a16="http://schemas.microsoft.com/office/drawing/2014/main" id="{60386AA2-C0A9-43BD-B987-632B9A150935}"/>
               </a:ext>
             </a:extLst>
           </p:cNvPr>
@@ -2843,7 +2843,7 @@
                 <a:ea typeface="PingFang SC"/>
                 <a:cs typeface="PingFang SC"/>
               </a:rPr>
-              <a:t>完成上述待办清单，或选择功能规模相同的“学习计时器”。全过程保留一份简短开发记录：；写出用户故事、范围外事项和至少七条验收标准。；启动基线并记录现状，创建第一个可回退版本</a:t>
+              <a:t>完成上述待办清单，或选择功能规模相同的“学习计时器”。全过程保留一份简短开发记录；写出用户故事、范围外事项和至少七条验收标准；启动基线并记录现状，创建第一个可回退版本</a:t>
             </a:r>
           </a:p>
         </p:txBody>
@@ -2853,7 +2853,7 @@
           <p:cNvPr id="9" name="practice-connector-0">
             <a:extLst xmlns:a="http://schemas.openxmlformats.org/drawingml/2006/main">
               <a:ext uri="{FF2B5EF4-FFF2-40B4-BE49-F238E27FC236}">
-                <a16:creationId xmlns:a16="http://schemas.microsoft.com/office/drawing/2014/main" id="{25413D49-FC59-45A8-8289-7498E8A881A0}"/>
+                <a16:creationId xmlns:a16="http://schemas.microsoft.com/office/drawing/2014/main" id="{59AE2A77-5791-45D8-AEE2-48520825DA9D}"/>
               </a:ext>
             </a:extLst>
           </p:cNvPr>
@@ -2873,7 +2873,7 @@
           <a:noFill xmlns:a="http://schemas.openxmlformats.org/drawingml/2006/main"/>
           <a:ln xmlns:a="http://schemas.openxmlformats.org/drawingml/2006/main" w="28575">
             <a:solidFill>
-              <a:srgbClr val="17A6C8"/>
+              <a:srgbClr val="006B80"/>
             </a:solidFill>
             <a:prstDash val="solid"/>
           </a:ln>
@@ -2884,7 +2884,7 @@
           <p:cNvPr id="10" name="practice-circle-1">
             <a:extLst xmlns:a="http://schemas.openxmlformats.org/drawingml/2006/main">
               <a:ext uri="{FF2B5EF4-FFF2-40B4-BE49-F238E27FC236}">
-                <a16:creationId xmlns:a16="http://schemas.microsoft.com/office/drawing/2014/main" id="{38E95226-524E-4B41-9316-AD712648CEE8}"/>
+                <a16:creationId xmlns:a16="http://schemas.microsoft.com/office/drawing/2014/main" id="{7098685E-BFD2-41B2-A27F-8732CFB2701D}"/>
               </a:ext>
             </a:extLst>
           </p:cNvPr>
@@ -2917,7 +2917,7 @@
           <p:cNvPr id="11" name="practice-number-1">
             <a:extLst xmlns:a="http://schemas.openxmlformats.org/drawingml/2006/main">
               <a:ext uri="{FF2B5EF4-FFF2-40B4-BE49-F238E27FC236}">
-                <a16:creationId xmlns:a16="http://schemas.microsoft.com/office/drawing/2014/main" id="{8FECCF60-D9D7-46C2-A5EB-9E010E94D3A3}"/>
+                <a16:creationId xmlns:a16="http://schemas.microsoft.com/office/drawing/2014/main" id="{DD4DA328-B7DE-4477-BBC4-D0E6FDD972C2}"/>
               </a:ext>
             </a:extLst>
           </p:cNvPr>
@@ -2975,7 +2975,7 @@
           <p:cNvPr id="12" name="practice-item-1">
             <a:extLst xmlns:a="http://schemas.openxmlformats.org/drawingml/2006/main">
               <a:ext uri="{FF2B5EF4-FFF2-40B4-BE49-F238E27FC236}">
-                <a16:creationId xmlns:a16="http://schemas.microsoft.com/office/drawing/2014/main" id="{570DD697-A62B-4096-88BC-9B0B926D0F67}"/>
+                <a16:creationId xmlns:a16="http://schemas.microsoft.com/office/drawing/2014/main" id="{DFD04E8E-548C-4B6A-908B-233D6EC934D9}"/>
               </a:ext>
             </a:extLst>
           </p:cNvPr>
@@ -3006,7 +3006,7 @@
         </p:spPr>
         <p:txBody>
           <a:bodyPr xmlns:a="http://schemas.openxmlformats.org/drawingml/2006/main" lIns="152400" tIns="133350" rIns="152400" bIns="133350" anchor="ctr">
-            <a:normAutofit fontScale="85750"/>
+            <a:normAutofit fontScale="92359"/>
           </a:bodyPr>
           <a:lstStyle xmlns:a="http://schemas.openxmlformats.org/drawingml/2006/main"/>
           <a:p xmlns:a="http://schemas.openxmlformats.org/drawingml/2006/main">
@@ -3029,7 +3029,7 @@
                 <a:ea typeface="PingFang SC"/>
                 <a:cs typeface="PingFang SC"/>
               </a:rPr>
-              <a:t>分三轮实现核心路径、边界处理和视觉适配，每轮都运行验证。；人为制造一次错误，记录复现步骤、原始错误、原因、最小修复和回归结果。；审阅所有改动，确认没有秘密信息、未经说明的依赖和范围外修改</a:t>
+              <a:t>分三轮实现核心路径、边界处理和视觉适配，每轮都运行验证；人为制造一次错误，记录复现步骤、原始错误、原因、最小修复和回归结果；审阅所有改动，确认没有秘密信息、未经说明的依赖和范围外修改</a:t>
             </a:r>
           </a:p>
         </p:txBody>
@@ -3039,7 +3039,7 @@
           <p:cNvPr id="13" name="practice-connector-1">
             <a:extLst xmlns:a="http://schemas.openxmlformats.org/drawingml/2006/main">
               <a:ext uri="{FF2B5EF4-FFF2-40B4-BE49-F238E27FC236}">
-                <a16:creationId xmlns:a16="http://schemas.microsoft.com/office/drawing/2014/main" id="{05C02BD2-7B1D-45C0-A653-B65771819B92}"/>
+                <a16:creationId xmlns:a16="http://schemas.microsoft.com/office/drawing/2014/main" id="{A1C7D56B-37AA-4E99-9714-737476E9DB03}"/>
               </a:ext>
             </a:extLst>
           </p:cNvPr>
@@ -3059,7 +3059,7 @@
           <a:noFill xmlns:a="http://schemas.openxmlformats.org/drawingml/2006/main"/>
           <a:ln xmlns:a="http://schemas.openxmlformats.org/drawingml/2006/main" w="28575">
             <a:solidFill>
-              <a:srgbClr val="17A6C8"/>
+              <a:srgbClr val="006B80"/>
             </a:solidFill>
             <a:prstDash val="solid"/>
           </a:ln>
@@ -3070,7 +3070,7 @@
           <p:cNvPr id="14" name="practice-circle-2">
             <a:extLst xmlns:a="http://schemas.openxmlformats.org/drawingml/2006/main">
               <a:ext uri="{FF2B5EF4-FFF2-40B4-BE49-F238E27FC236}">
-                <a16:creationId xmlns:a16="http://schemas.microsoft.com/office/drawing/2014/main" id="{0F8481A1-3268-44D0-ADF4-302CFE3703F7}"/>
+                <a16:creationId xmlns:a16="http://schemas.microsoft.com/office/drawing/2014/main" id="{C00B8864-1CF8-4187-9D6B-63ADE79A4E47}"/>
               </a:ext>
             </a:extLst>
           </p:cNvPr>
@@ -3088,7 +3088,7 @@
             <a:avLst/>
           </a:prstGeom>
           <a:solidFill xmlns:a="http://schemas.openxmlformats.org/drawingml/2006/main">
-            <a:srgbClr val="17A6C8"/>
+            <a:srgbClr val="006B80"/>
           </a:solidFill>
           <a:ln xmlns:a="http://schemas.openxmlformats.org/drawingml/2006/main" w="28575">
             <a:solidFill>
@@ -3103,7 +3103,7 @@
           <p:cNvPr id="15" name="practice-number-2">
             <a:extLst xmlns:a="http://schemas.openxmlformats.org/drawingml/2006/main">
               <a:ext uri="{FF2B5EF4-FFF2-40B4-BE49-F238E27FC236}">
-                <a16:creationId xmlns:a16="http://schemas.microsoft.com/office/drawing/2014/main" id="{4AEE3D7A-CCA4-4D54-98F4-62553B845C53}"/>
+                <a16:creationId xmlns:a16="http://schemas.microsoft.com/office/drawing/2014/main" id="{2890DB7A-E02C-486E-9BAA-9C0A2889D655}"/>
               </a:ext>
             </a:extLst>
           </p:cNvPr>
@@ -3161,7 +3161,7 @@
           <p:cNvPr id="16" name="practice-item-2">
             <a:extLst xmlns:a="http://schemas.openxmlformats.org/drawingml/2006/main">
               <a:ext uri="{FF2B5EF4-FFF2-40B4-BE49-F238E27FC236}">
-                <a16:creationId xmlns:a16="http://schemas.microsoft.com/office/drawing/2014/main" id="{297BA6CA-0BAC-4916-BAD0-007D60E4C772}"/>
+                <a16:creationId xmlns:a16="http://schemas.microsoft.com/office/drawing/2014/main" id="{17C3D642-C096-4055-A79A-2CFFD1F99881}"/>
               </a:ext>
             </a:extLst>
           </p:cNvPr>
@@ -3185,7 +3185,7 @@
           </a:solidFill>
           <a:ln xmlns:a="http://schemas.openxmlformats.org/drawingml/2006/main" w="19050">
             <a:solidFill>
-              <a:srgbClr val="17A6C8"/>
+              <a:srgbClr val="006B80"/>
             </a:solidFill>
             <a:prstDash val="solid"/>
           </a:ln>
@@ -3215,7 +3215,7 @@
                 <a:ea typeface="PingFang SC"/>
                 <a:cs typeface="PingFang SC"/>
               </a:rPr>
-              <a:t>让另一位学习者只依据你的运行说明打开项目并完成验收。；最终交付不是聊天记录，而是可运行项目、验收结果、已知限制和可追溯版本</a:t>
+              <a:t>让另一位学习者只依据你的运行说明打开项目并完成验收；最终交付不是聊天记录，而是可运行项目、验收结果、已知限制和可追溯版本</a:t>
             </a:r>
           </a:p>
         </p:txBody>
@@ -3223,7 +3223,7 @@
     </p:spTree>
     <p:extLst>
       <p:ext uri="{BB962C8B-B14F-4D97-AF65-F5344CB8AC3E}">
-        <p14:creationId xmlns:p14="http://schemas.microsoft.com/office/powerpoint/2010/main" val="188045641"/>
+        <p14:creationId xmlns:p14="http://schemas.microsoft.com/office/powerpoint/2010/main" val="849666053"/>
       </p:ext>
     </p:extLst>
   </p:cSld>
@@ -3254,7 +3254,7 @@
           <p:cNvPr id="1" name="s11-rule">
             <a:extLst xmlns:a="http://schemas.openxmlformats.org/drawingml/2006/main">
               <a:ext uri="{FF2B5EF4-FFF2-40B4-BE49-F238E27FC236}">
-                <a16:creationId xmlns:a16="http://schemas.microsoft.com/office/drawing/2014/main" id="{4BB3AF17-AE66-4A0D-AFB8-6C55F0C51476}"/>
+                <a16:creationId xmlns:a16="http://schemas.microsoft.com/office/drawing/2014/main" id="{141E4C98-90D6-4885-B3C5-994FF24DEB4A}"/>
               </a:ext>
             </a:extLst>
           </p:cNvPr>
@@ -3287,7 +3287,7 @@
           <p:cNvPr id="2" name="s11-eyebrow">
             <a:extLst xmlns:a="http://schemas.openxmlformats.org/drawingml/2006/main">
               <a:ext uri="{FF2B5EF4-FFF2-40B4-BE49-F238E27FC236}">
-                <a16:creationId xmlns:a16="http://schemas.microsoft.com/office/drawing/2014/main" id="{8D681A03-81F0-40BE-B496-E28A31DD1E22}"/>
+                <a16:creationId xmlns:a16="http://schemas.microsoft.com/office/drawing/2014/main" id="{CC0F26C4-7017-40EC-A7EE-EE26A6D9B32B}"/>
               </a:ext>
             </a:extLst>
           </p:cNvPr>
@@ -3345,7 +3345,7 @@
           <p:cNvPr id="3" name="s11-title">
             <a:extLst xmlns:a="http://schemas.openxmlformats.org/drawingml/2006/main">
               <a:ext uri="{FF2B5EF4-FFF2-40B4-BE49-F238E27FC236}">
-                <a16:creationId xmlns:a16="http://schemas.microsoft.com/office/drawing/2014/main" id="{43B50B06-EFD3-469D-985B-BA0B545F3661}"/>
+                <a16:creationId xmlns:a16="http://schemas.microsoft.com/office/drawing/2014/main" id="{5CCBEB42-7131-494B-94B2-1CD3B927A427}"/>
               </a:ext>
             </a:extLst>
           </p:cNvPr>
@@ -3393,7 +3393,7 @@
                 <a:ea typeface="PingFang SC"/>
                 <a:cs typeface="PingFang SC"/>
               </a:rPr>
-              <a:t>带走三条可复用的判断原则</a:t>
+              <a:t>AI Coding：判断时先抓住三点</a:t>
             </a:r>
           </a:p>
         </p:txBody>
@@ -3403,7 +3403,7 @@
           <p:cNvPr id="4" name="s11-footer">
             <a:extLst xmlns:a="http://schemas.openxmlformats.org/drawingml/2006/main">
               <a:ext uri="{FF2B5EF4-FFF2-40B4-BE49-F238E27FC236}">
-                <a16:creationId xmlns:a16="http://schemas.microsoft.com/office/drawing/2014/main" id="{3C1E7340-C935-4DD6-A8EA-56D27DDDBBCC}"/>
+                <a16:creationId xmlns:a16="http://schemas.microsoft.com/office/drawing/2014/main" id="{9AF4E53C-0532-4DE6-9BF0-391E6113D919}"/>
               </a:ext>
             </a:extLst>
           </p:cNvPr>
@@ -3434,7 +3434,7 @@
           <p:cNvPr id="5" name="s11-identity">
             <a:extLst xmlns:a="http://schemas.openxmlformats.org/drawingml/2006/main">
               <a:ext uri="{FF2B5EF4-FFF2-40B4-BE49-F238E27FC236}">
-                <a16:creationId xmlns:a16="http://schemas.microsoft.com/office/drawing/2014/main" id="{F0A1059A-3082-45E3-8380-1BFBD7789401}"/>
+                <a16:creationId xmlns:a16="http://schemas.microsoft.com/office/drawing/2014/main" id="{46A9CCFD-1C5A-4EB0-AF48-4D4A71F3D0A6}"/>
               </a:ext>
             </a:extLst>
           </p:cNvPr>
@@ -3492,7 +3492,7 @@
           <p:cNvPr id="6" name="recap-circle-0">
             <a:extLst xmlns:a="http://schemas.openxmlformats.org/drawingml/2006/main">
               <a:ext uri="{FF2B5EF4-FFF2-40B4-BE49-F238E27FC236}">
-                <a16:creationId xmlns:a16="http://schemas.microsoft.com/office/drawing/2014/main" id="{1A4D9164-25F2-46DF-8A2A-65995A32F774}"/>
+                <a16:creationId xmlns:a16="http://schemas.microsoft.com/office/drawing/2014/main" id="{D4B5EA0B-B542-4191-92AF-E4983B8867AB}"/>
               </a:ext>
             </a:extLst>
           </p:cNvPr>
@@ -3525,7 +3525,7 @@
           <p:cNvPr id="7" name="recap-number-0">
             <a:extLst xmlns:a="http://schemas.openxmlformats.org/drawingml/2006/main">
               <a:ext uri="{FF2B5EF4-FFF2-40B4-BE49-F238E27FC236}">
-                <a16:creationId xmlns:a16="http://schemas.microsoft.com/office/drawing/2014/main" id="{C7AE7704-21AF-4D8B-A70D-41F332680FC3}"/>
+                <a16:creationId xmlns:a16="http://schemas.microsoft.com/office/drawing/2014/main" id="{BEE4CBD5-9371-4A04-898B-32EC4C6CAD1B}"/>
               </a:ext>
             </a:extLst>
           </p:cNvPr>
@@ -3583,7 +3583,7 @@
           <p:cNvPr id="8" name="recap-item-0">
             <a:extLst xmlns:a="http://schemas.openxmlformats.org/drawingml/2006/main">
               <a:ext uri="{FF2B5EF4-FFF2-40B4-BE49-F238E27FC236}">
-                <a16:creationId xmlns:a16="http://schemas.microsoft.com/office/drawing/2014/main" id="{1B989BF0-AF91-4A25-B734-3F93D36E59CB}"/>
+                <a16:creationId xmlns:a16="http://schemas.microsoft.com/office/drawing/2014/main" id="{B4AC4BB1-7501-4EB6-B26B-FC42CC6622C5}"/>
               </a:ext>
             </a:extLst>
           </p:cNvPr>
@@ -3637,7 +3637,7 @@
                 <a:ea typeface="PingFang SC"/>
                 <a:cs typeface="PingFang SC"/>
               </a:rPr>
-              <a:t>把“想做什么”变成可验收需求</a:t>
+              <a:t>先锁定需求与基线，再让 AI 改动代码</a:t>
             </a:r>
           </a:p>
         </p:txBody>
@@ -3647,7 +3647,7 @@
           <p:cNvPr id="9" name="recap-connector-0">
             <a:extLst xmlns:a="http://schemas.openxmlformats.org/drawingml/2006/main">
               <a:ext uri="{FF2B5EF4-FFF2-40B4-BE49-F238E27FC236}">
-                <a16:creationId xmlns:a16="http://schemas.microsoft.com/office/drawing/2014/main" id="{6AEC9734-DA1C-4840-8276-AD71EABFE05E}"/>
+                <a16:creationId xmlns:a16="http://schemas.microsoft.com/office/drawing/2014/main" id="{E8E272C5-D5C0-42BF-ABC2-1CE01430F416}"/>
               </a:ext>
             </a:extLst>
           </p:cNvPr>
@@ -3667,7 +3667,7 @@
           <a:noFill xmlns:a="http://schemas.openxmlformats.org/drawingml/2006/main"/>
           <a:ln xmlns:a="http://schemas.openxmlformats.org/drawingml/2006/main" w="28575">
             <a:solidFill>
-              <a:srgbClr val="17A6C8"/>
+              <a:srgbClr val="006B80"/>
             </a:solidFill>
             <a:prstDash val="solid"/>
           </a:ln>
@@ -3678,7 +3678,7 @@
           <p:cNvPr id="10" name="recap-circle-1">
             <a:extLst xmlns:a="http://schemas.openxmlformats.org/drawingml/2006/main">
               <a:ext uri="{FF2B5EF4-FFF2-40B4-BE49-F238E27FC236}">
-                <a16:creationId xmlns:a16="http://schemas.microsoft.com/office/drawing/2014/main" id="{D8A3977B-CCFE-4AEA-BBC0-6FFDB7732C64}"/>
+                <a16:creationId xmlns:a16="http://schemas.microsoft.com/office/drawing/2014/main" id="{7DACF29C-5FCE-4F20-A8D2-33588D6249D6}"/>
               </a:ext>
             </a:extLst>
           </p:cNvPr>
@@ -3711,7 +3711,7 @@
           <p:cNvPr id="11" name="recap-number-1">
             <a:extLst xmlns:a="http://schemas.openxmlformats.org/drawingml/2006/main">
               <a:ext uri="{FF2B5EF4-FFF2-40B4-BE49-F238E27FC236}">
-                <a16:creationId xmlns:a16="http://schemas.microsoft.com/office/drawing/2014/main" id="{41D3A9FB-3285-47EE-BF75-6E747DAF4ADB}"/>
+                <a16:creationId xmlns:a16="http://schemas.microsoft.com/office/drawing/2014/main" id="{B5F4F76B-0783-4D19-8192-7D029B48648E}"/>
               </a:ext>
             </a:extLst>
           </p:cNvPr>
@@ -3769,7 +3769,7 @@
           <p:cNvPr id="12" name="recap-item-1">
             <a:extLst xmlns:a="http://schemas.openxmlformats.org/drawingml/2006/main">
               <a:ext uri="{FF2B5EF4-FFF2-40B4-BE49-F238E27FC236}">
-                <a16:creationId xmlns:a16="http://schemas.microsoft.com/office/drawing/2014/main" id="{45FD7421-C9A9-4F52-A491-9F9E9227CF42}"/>
+                <a16:creationId xmlns:a16="http://schemas.microsoft.com/office/drawing/2014/main" id="{91EDDD70-B15A-4C36-825C-243B8DF136D2}"/>
               </a:ext>
             </a:extLst>
           </p:cNvPr>
@@ -3833,7 +3833,7 @@
           <p:cNvPr id="13" name="recap-connector-1">
             <a:extLst xmlns:a="http://schemas.openxmlformats.org/drawingml/2006/main">
               <a:ext uri="{FF2B5EF4-FFF2-40B4-BE49-F238E27FC236}">
-                <a16:creationId xmlns:a16="http://schemas.microsoft.com/office/drawing/2014/main" id="{996005E9-6CCC-4D78-91FC-BE0154EEA408}"/>
+                <a16:creationId xmlns:a16="http://schemas.microsoft.com/office/drawing/2014/main" id="{1E84FD0B-03FB-4FAC-8BB4-2F6BBA74C68A}"/>
               </a:ext>
             </a:extLst>
           </p:cNvPr>
@@ -3853,7 +3853,7 @@
           <a:noFill xmlns:a="http://schemas.openxmlformats.org/drawingml/2006/main"/>
           <a:ln xmlns:a="http://schemas.openxmlformats.org/drawingml/2006/main" w="28575">
             <a:solidFill>
-              <a:srgbClr val="17A6C8"/>
+              <a:srgbClr val="006B80"/>
             </a:solidFill>
             <a:prstDash val="solid"/>
           </a:ln>
@@ -3864,7 +3864,7 @@
           <p:cNvPr id="14" name="recap-circle-2">
             <a:extLst xmlns:a="http://schemas.openxmlformats.org/drawingml/2006/main">
               <a:ext uri="{FF2B5EF4-FFF2-40B4-BE49-F238E27FC236}">
-                <a16:creationId xmlns:a16="http://schemas.microsoft.com/office/drawing/2014/main" id="{895FC6A7-682E-459D-B194-8BC9577EC8C3}"/>
+                <a16:creationId xmlns:a16="http://schemas.microsoft.com/office/drawing/2014/main" id="{56F1B571-D46A-49AF-8650-3F60705C4F58}"/>
               </a:ext>
             </a:extLst>
           </p:cNvPr>
@@ -3882,7 +3882,7 @@
             <a:avLst/>
           </a:prstGeom>
           <a:solidFill xmlns:a="http://schemas.openxmlformats.org/drawingml/2006/main">
-            <a:srgbClr val="17A6C8"/>
+            <a:srgbClr val="006B80"/>
           </a:solidFill>
           <a:ln xmlns:a="http://schemas.openxmlformats.org/drawingml/2006/main" w="28575">
             <a:solidFill>
@@ -3897,7 +3897,7 @@
           <p:cNvPr id="15" name="recap-number-2">
             <a:extLst xmlns:a="http://schemas.openxmlformats.org/drawingml/2006/main">
               <a:ext uri="{FF2B5EF4-FFF2-40B4-BE49-F238E27FC236}">
-                <a16:creationId xmlns:a16="http://schemas.microsoft.com/office/drawing/2014/main" id="{0072270E-EE5D-4EEF-8C1C-8777664A782D}"/>
+                <a16:creationId xmlns:a16="http://schemas.microsoft.com/office/drawing/2014/main" id="{BF0DE1BA-4885-4454-9F9C-A5FF60796F93}"/>
               </a:ext>
             </a:extLst>
           </p:cNvPr>
@@ -3955,7 +3955,7 @@
           <p:cNvPr id="16" name="recap-item-2">
             <a:extLst xmlns:a="http://schemas.openxmlformats.org/drawingml/2006/main">
               <a:ext uri="{FF2B5EF4-FFF2-40B4-BE49-F238E27FC236}">
-                <a16:creationId xmlns:a16="http://schemas.microsoft.com/office/drawing/2014/main" id="{C9DCF2E2-8744-4714-9B5C-B63875D6A522}"/>
+                <a16:creationId xmlns:a16="http://schemas.microsoft.com/office/drawing/2014/main" id="{F816D740-ECA5-4E9D-8C71-B6A87FA405BE}"/>
               </a:ext>
             </a:extLst>
           </p:cNvPr>
@@ -3979,7 +3979,7 @@
           </a:solidFill>
           <a:ln xmlns:a="http://schemas.openxmlformats.org/drawingml/2006/main" w="19050">
             <a:solidFill>
-              <a:srgbClr val="17A6C8"/>
+              <a:srgbClr val="006B80"/>
             </a:solidFill>
             <a:prstDash val="solid"/>
           </a:ln>
@@ -4009,7 +4009,7 @@
                 <a:ea typeface="PingFang SC"/>
                 <a:cs typeface="PingFang SC"/>
               </a:rPr>
-              <a:t>一次完整交付应包含</a:t>
+              <a:t>完整交付要包含运行证据、限制与回退方法</a:t>
             </a:r>
           </a:p>
         </p:txBody>
@@ -4017,7 +4017,7 @@
     </p:spTree>
     <p:extLst>
       <p:ext uri="{BB962C8B-B14F-4D97-AF65-F5344CB8AC3E}">
-        <p14:creationId xmlns:p14="http://schemas.microsoft.com/office/powerpoint/2010/main" val="899712982"/>
+        <p14:creationId xmlns:p14="http://schemas.microsoft.com/office/powerpoint/2010/main" val="464384185"/>
       </p:ext>
     </p:extLst>
   </p:cSld>
@@ -4048,7 +4048,7 @@
           <p:cNvPr id="1" name="s12-rule">
             <a:extLst xmlns:a="http://schemas.openxmlformats.org/drawingml/2006/main">
               <a:ext uri="{FF2B5EF4-FFF2-40B4-BE49-F238E27FC236}">
-                <a16:creationId xmlns:a16="http://schemas.microsoft.com/office/drawing/2014/main" id="{09D35CDC-D1A2-4DE2-A9F1-028A7E95F96D}"/>
+                <a16:creationId xmlns:a16="http://schemas.microsoft.com/office/drawing/2014/main" id="{98E25897-0B60-457F-92BB-51E296316DE8}"/>
               </a:ext>
             </a:extLst>
           </p:cNvPr>
@@ -4081,7 +4081,7 @@
           <p:cNvPr id="2" name="s12-eyebrow">
             <a:extLst xmlns:a="http://schemas.openxmlformats.org/drawingml/2006/main">
               <a:ext uri="{FF2B5EF4-FFF2-40B4-BE49-F238E27FC236}">
-                <a16:creationId xmlns:a16="http://schemas.microsoft.com/office/drawing/2014/main" id="{BE3614CD-F9BD-4AE0-9F07-1888976BD12C}"/>
+                <a16:creationId xmlns:a16="http://schemas.microsoft.com/office/drawing/2014/main" id="{BAD312A0-88CC-4E33-B5CD-32EE92B9FBDC}"/>
               </a:ext>
             </a:extLst>
           </p:cNvPr>
@@ -4139,7 +4139,7 @@
           <p:cNvPr id="3" name="s12-title">
             <a:extLst xmlns:a="http://schemas.openxmlformats.org/drawingml/2006/main">
               <a:ext uri="{FF2B5EF4-FFF2-40B4-BE49-F238E27FC236}">
-                <a16:creationId xmlns:a16="http://schemas.microsoft.com/office/drawing/2014/main" id="{4C2457BE-B1F9-4955-8A35-8C42322BBF0F}"/>
+                <a16:creationId xmlns:a16="http://schemas.microsoft.com/office/drawing/2014/main" id="{B984C188-921F-47F4-AE8C-7E332531B742}"/>
               </a:ext>
             </a:extLst>
           </p:cNvPr>
@@ -4187,7 +4187,7 @@
                 <a:ea typeface="PingFang SC"/>
                 <a:cs typeface="PingFang SC"/>
               </a:rPr>
-              <a:t>从公开重制课件回到可核对的学习资料</a:t>
+              <a:t>AI Coding：依据、边界与延伸</a:t>
             </a:r>
           </a:p>
         </p:txBody>
@@ -4197,7 +4197,7 @@
           <p:cNvPr id="4" name="s12-footer">
             <a:extLst xmlns:a="http://schemas.openxmlformats.org/drawingml/2006/main">
               <a:ext uri="{FF2B5EF4-FFF2-40B4-BE49-F238E27FC236}">
-                <a16:creationId xmlns:a16="http://schemas.microsoft.com/office/drawing/2014/main" id="{FDBF156B-9A86-4D98-8C49-40D800641467}"/>
+                <a16:creationId xmlns:a16="http://schemas.microsoft.com/office/drawing/2014/main" id="{915CD8B9-5A49-4A11-A586-715882AAAF51}"/>
               </a:ext>
             </a:extLst>
           </p:cNvPr>
@@ -4228,7 +4228,7 @@
           <p:cNvPr id="5" name="s12-identity">
             <a:extLst xmlns:a="http://schemas.openxmlformats.org/drawingml/2006/main">
               <a:ext uri="{FF2B5EF4-FFF2-40B4-BE49-F238E27FC236}">
-                <a16:creationId xmlns:a16="http://schemas.microsoft.com/office/drawing/2014/main" id="{8623FEF0-67BC-4564-BBDE-655C76988473}"/>
+                <a16:creationId xmlns:a16="http://schemas.microsoft.com/office/drawing/2014/main" id="{F56E1561-F133-4E72-A163-CCF374003D95}"/>
               </a:ext>
             </a:extLst>
           </p:cNvPr>
@@ -4286,7 +4286,7 @@
           <p:cNvPr id="6" name="source-0">
             <a:extLst xmlns:a="http://schemas.openxmlformats.org/drawingml/2006/main">
               <a:ext uri="{FF2B5EF4-FFF2-40B4-BE49-F238E27FC236}">
-                <a16:creationId xmlns:a16="http://schemas.microsoft.com/office/drawing/2014/main" id="{BCEBB28C-28AE-4366-B670-A41EA93049F5}"/>
+                <a16:creationId xmlns:a16="http://schemas.microsoft.com/office/drawing/2014/main" id="{C8B23F59-2316-4EEB-9C60-EA7B73A9E776}"/>
               </a:ext>
             </a:extLst>
           </p:cNvPr>
@@ -4310,7 +4310,7 @@
           </a:solidFill>
           <a:ln xmlns:a="http://schemas.openxmlformats.org/drawingml/2006/main" w="9525">
             <a:solidFill>
-              <a:srgbClr val="17A6C8"/>
+              <a:srgbClr val="006B80"/>
             </a:solidFill>
             <a:prstDash val="solid"/>
           </a:ln>
@@ -4350,7 +4350,7 @@
           <p:cNvPr id="7" name="source-1">
             <a:extLst xmlns:a="http://schemas.openxmlformats.org/drawingml/2006/main">
               <a:ext uri="{FF2B5EF4-FFF2-40B4-BE49-F238E27FC236}">
-                <a16:creationId xmlns:a16="http://schemas.microsoft.com/office/drawing/2014/main" id="{9F12B67F-6A10-4F39-B0E3-92D99D5D4C0A}"/>
+                <a16:creationId xmlns:a16="http://schemas.microsoft.com/office/drawing/2014/main" id="{821CFE57-BF6C-418C-B5BA-A67CA9E997EA}"/>
               </a:ext>
             </a:extLst>
           </p:cNvPr>
@@ -4414,7 +4414,7 @@
           <p:cNvPr id="8" name="s12-takeaway-rule">
             <a:extLst xmlns:a="http://schemas.openxmlformats.org/drawingml/2006/main">
               <a:ext uri="{FF2B5EF4-FFF2-40B4-BE49-F238E27FC236}">
-                <a16:creationId xmlns:a16="http://schemas.microsoft.com/office/drawing/2014/main" id="{7BB4294D-8EEF-4D74-A5BE-6B0903D7C86F}"/>
+                <a16:creationId xmlns:a16="http://schemas.microsoft.com/office/drawing/2014/main" id="{95530A12-7546-423E-A1C8-AA918A3C7B7D}"/>
               </a:ext>
             </a:extLst>
           </p:cNvPr>
@@ -4447,7 +4447,7 @@
           <p:cNvPr id="9" name="s12-takeaway">
             <a:extLst xmlns:a="http://schemas.openxmlformats.org/drawingml/2006/main">
               <a:ext uri="{FF2B5EF4-FFF2-40B4-BE49-F238E27FC236}">
-                <a16:creationId xmlns:a16="http://schemas.microsoft.com/office/drawing/2014/main" id="{0EFF817A-4266-404C-804E-BF94DDBE0C80}"/>
+                <a16:creationId xmlns:a16="http://schemas.microsoft.com/office/drawing/2014/main" id="{63DF72B3-C9C1-4040-923D-64BE4414C311}"/>
               </a:ext>
             </a:extLst>
           </p:cNvPr>
@@ -4503,7 +4503,7 @@
     </p:spTree>
     <p:extLst>
       <p:ext uri="{BB962C8B-B14F-4D97-AF65-F5344CB8AC3E}">
-        <p14:creationId xmlns:p14="http://schemas.microsoft.com/office/powerpoint/2010/main" val="94528045"/>
+        <p14:creationId xmlns:p14="http://schemas.microsoft.com/office/powerpoint/2010/main" val="1057435235"/>
       </p:ext>
     </p:extLst>
   </p:cSld>
@@ -4534,7 +4534,7 @@
           <p:cNvPr id="1" name="s2-rule">
             <a:extLst xmlns:a="http://schemas.openxmlformats.org/drawingml/2006/main">
               <a:ext uri="{FF2B5EF4-FFF2-40B4-BE49-F238E27FC236}">
-                <a16:creationId xmlns:a16="http://schemas.microsoft.com/office/drawing/2014/main" id="{03551C3C-459F-4DBA-BF3B-0A6CFD7E571F}"/>
+                <a16:creationId xmlns:a16="http://schemas.microsoft.com/office/drawing/2014/main" id="{99AAB406-6FC9-4409-A06C-86194C181A33}"/>
               </a:ext>
             </a:extLst>
           </p:cNvPr>
@@ -4567,7 +4567,7 @@
           <p:cNvPr id="2" name="s2-eyebrow">
             <a:extLst xmlns:a="http://schemas.openxmlformats.org/drawingml/2006/main">
               <a:ext uri="{FF2B5EF4-FFF2-40B4-BE49-F238E27FC236}">
-                <a16:creationId xmlns:a16="http://schemas.microsoft.com/office/drawing/2014/main" id="{722D47B0-648B-479C-AE25-94B40BB87B5C}"/>
+                <a16:creationId xmlns:a16="http://schemas.microsoft.com/office/drawing/2014/main" id="{67A338B8-B26B-4A54-A492-7C1029557070}"/>
               </a:ext>
             </a:extLst>
           </p:cNvPr>
@@ -4625,7 +4625,7 @@
           <p:cNvPr id="3" name="s2-title">
             <a:extLst xmlns:a="http://schemas.openxmlformats.org/drawingml/2006/main">
               <a:ext uri="{FF2B5EF4-FFF2-40B4-BE49-F238E27FC236}">
-                <a16:creationId xmlns:a16="http://schemas.microsoft.com/office/drawing/2014/main" id="{7D016CA3-5196-4C23-B81A-97BAE176398F}"/>
+                <a16:creationId xmlns:a16="http://schemas.microsoft.com/office/drawing/2014/main" id="{EA14A013-DCA9-4926-8F76-C0EE28C3B160}"/>
               </a:ext>
             </a:extLst>
           </p:cNvPr>
@@ -4673,7 +4673,7 @@
                 <a:ea typeface="PingFang SC"/>
                 <a:cs typeface="PingFang SC"/>
               </a:rPr>
-              <a:t>学完这一节，你能完成这些判断与行动</a:t>
+              <a:t>AI Coding：4项学习结果</a:t>
             </a:r>
           </a:p>
         </p:txBody>
@@ -4683,7 +4683,7 @@
           <p:cNvPr id="4" name="s2-footer">
             <a:extLst xmlns:a="http://schemas.openxmlformats.org/drawingml/2006/main">
               <a:ext uri="{FF2B5EF4-FFF2-40B4-BE49-F238E27FC236}">
-                <a16:creationId xmlns:a16="http://schemas.microsoft.com/office/drawing/2014/main" id="{2BCB436F-E6B1-401A-AB1D-A3E08F9BC133}"/>
+                <a16:creationId xmlns:a16="http://schemas.microsoft.com/office/drawing/2014/main" id="{451BE452-AB4D-47CF-912F-E7815E5414BD}"/>
               </a:ext>
             </a:extLst>
           </p:cNvPr>
@@ -4714,7 +4714,7 @@
           <p:cNvPr id="5" name="s2-identity">
             <a:extLst xmlns:a="http://schemas.openxmlformats.org/drawingml/2006/main">
               <a:ext uri="{FF2B5EF4-FFF2-40B4-BE49-F238E27FC236}">
-                <a16:creationId xmlns:a16="http://schemas.microsoft.com/office/drawing/2014/main" id="{DE12F093-2C04-4576-9520-1C1D37B0D735}"/>
+                <a16:creationId xmlns:a16="http://schemas.microsoft.com/office/drawing/2014/main" id="{607C0E30-1D53-4AB9-86E7-2D7EF2F9B17A}"/>
               </a:ext>
             </a:extLst>
           </p:cNvPr>
@@ -4772,7 +4772,7 @@
           <p:cNvPr id="6" name="objective-1">
             <a:extLst xmlns:a="http://schemas.openxmlformats.org/drawingml/2006/main">
               <a:ext uri="{FF2B5EF4-FFF2-40B4-BE49-F238E27FC236}">
-                <a16:creationId xmlns:a16="http://schemas.microsoft.com/office/drawing/2014/main" id="{E45B9966-1130-49B9-80D5-75B37549738A}"/>
+                <a16:creationId xmlns:a16="http://schemas.microsoft.com/office/drawing/2014/main" id="{8E24151E-FFC4-467E-BE82-BE31E223103F}"/>
               </a:ext>
             </a:extLst>
           </p:cNvPr>
@@ -4859,7 +4859,7 @@
           <p:cNvPr id="7" name="objective-2">
             <a:extLst xmlns:a="http://schemas.openxmlformats.org/drawingml/2006/main">
               <a:ext uri="{FF2B5EF4-FFF2-40B4-BE49-F238E27FC236}">
-                <a16:creationId xmlns:a16="http://schemas.microsoft.com/office/drawing/2014/main" id="{D830798C-17E3-4192-88FE-E8C4906186E6}"/>
+                <a16:creationId xmlns:a16="http://schemas.microsoft.com/office/drawing/2014/main" id="{EA0DE816-FE0D-4630-AEE3-4214F9E8F4C4}"/>
               </a:ext>
             </a:extLst>
           </p:cNvPr>
@@ -4946,7 +4946,7 @@
           <p:cNvPr id="8" name="objective-3">
             <a:extLst xmlns:a="http://schemas.openxmlformats.org/drawingml/2006/main">
               <a:ext uri="{FF2B5EF4-FFF2-40B4-BE49-F238E27FC236}">
-                <a16:creationId xmlns:a16="http://schemas.microsoft.com/office/drawing/2014/main" id="{D90D0BCA-78C8-4AB5-8689-3BC086DED2EE}"/>
+                <a16:creationId xmlns:a16="http://schemas.microsoft.com/office/drawing/2014/main" id="{252C561A-8B47-40AF-8415-609F23EBE3CC}"/>
               </a:ext>
             </a:extLst>
           </p:cNvPr>
@@ -5033,7 +5033,7 @@
           <p:cNvPr id="9" name="objective-4">
             <a:extLst xmlns:a="http://schemas.openxmlformats.org/drawingml/2006/main">
               <a:ext uri="{FF2B5EF4-FFF2-40B4-BE49-F238E27FC236}">
-                <a16:creationId xmlns:a16="http://schemas.microsoft.com/office/drawing/2014/main" id="{2060F20D-74F5-477F-B62E-7F02B627AB01}"/>
+                <a16:creationId xmlns:a16="http://schemas.microsoft.com/office/drawing/2014/main" id="{48597D96-F201-457E-92C9-9CF4F9FAAA47}"/>
               </a:ext>
             </a:extLst>
           </p:cNvPr>
@@ -5057,7 +5057,7 @@
           </a:solidFill>
           <a:ln xmlns:a="http://schemas.openxmlformats.org/drawingml/2006/main" w="19050">
             <a:solidFill>
-              <a:srgbClr val="17A6C8"/>
+              <a:srgbClr val="006B80"/>
             </a:solidFill>
             <a:prstDash val="solid"/>
           </a:ln>
@@ -5118,7 +5118,7 @@
     </p:spTree>
     <p:extLst>
       <p:ext uri="{BB962C8B-B14F-4D97-AF65-F5344CB8AC3E}">
-        <p14:creationId xmlns:p14="http://schemas.microsoft.com/office/powerpoint/2010/main" val="714684754"/>
+        <p14:creationId xmlns:p14="http://schemas.microsoft.com/office/powerpoint/2010/main" val="1519531231"/>
       </p:ext>
     </p:extLst>
   </p:cSld>
@@ -5149,7 +5149,7 @@
           <p:cNvPr id="1" name="s3-rule">
             <a:extLst xmlns:a="http://schemas.openxmlformats.org/drawingml/2006/main">
               <a:ext uri="{FF2B5EF4-FFF2-40B4-BE49-F238E27FC236}">
-                <a16:creationId xmlns:a16="http://schemas.microsoft.com/office/drawing/2014/main" id="{42ACEFA4-3B62-4A97-BBF8-E54C3AF9940D}"/>
+                <a16:creationId xmlns:a16="http://schemas.microsoft.com/office/drawing/2014/main" id="{A503BA20-8230-4A05-BB3A-7370E04E927B}"/>
               </a:ext>
             </a:extLst>
           </p:cNvPr>
@@ -5182,7 +5182,7 @@
           <p:cNvPr id="2" name="s3-eyebrow">
             <a:extLst xmlns:a="http://schemas.openxmlformats.org/drawingml/2006/main">
               <a:ext uri="{FF2B5EF4-FFF2-40B4-BE49-F238E27FC236}">
-                <a16:creationId xmlns:a16="http://schemas.microsoft.com/office/drawing/2014/main" id="{6FD4AD0B-2FB7-426E-87FF-5F7C3EAADD6A}"/>
+                <a16:creationId xmlns:a16="http://schemas.microsoft.com/office/drawing/2014/main" id="{534E9E8D-2CB6-4D5D-AD83-3B43BF431056}"/>
               </a:ext>
             </a:extLst>
           </p:cNvPr>
@@ -5240,7 +5240,7 @@
           <p:cNvPr id="3" name="s3-title">
             <a:extLst xmlns:a="http://schemas.openxmlformats.org/drawingml/2006/main">
               <a:ext uri="{FF2B5EF4-FFF2-40B4-BE49-F238E27FC236}">
-                <a16:creationId xmlns:a16="http://schemas.microsoft.com/office/drawing/2014/main" id="{E9F8AF7F-0801-4842-905E-885FB5BFEFBE}"/>
+                <a16:creationId xmlns:a16="http://schemas.microsoft.com/office/drawing/2014/main" id="{DAA988DF-2908-41F3-B7B0-C78377496145}"/>
               </a:ext>
             </a:extLst>
           </p:cNvPr>
@@ -5288,7 +5288,7 @@
                 <a:ea typeface="PingFang SC"/>
                 <a:cs typeface="PingFang SC"/>
               </a:rPr>
-              <a:t>把“想做什么”变成可验收需求</a:t>
+              <a:t>先锁定需求与基线，再让 AI 改动代码</a:t>
             </a:r>
           </a:p>
         </p:txBody>
@@ -5298,7 +5298,7 @@
           <p:cNvPr id="4" name="s3-footer">
             <a:extLst xmlns:a="http://schemas.openxmlformats.org/drawingml/2006/main">
               <a:ext uri="{FF2B5EF4-FFF2-40B4-BE49-F238E27FC236}">
-                <a16:creationId xmlns:a16="http://schemas.microsoft.com/office/drawing/2014/main" id="{3B87EB33-F650-4BA9-AB33-CB5DA76B46DC}"/>
+                <a16:creationId xmlns:a16="http://schemas.microsoft.com/office/drawing/2014/main" id="{D4E2FA7E-DA7C-469C-AA42-80C5513F5932}"/>
               </a:ext>
             </a:extLst>
           </p:cNvPr>
@@ -5329,7 +5329,7 @@
           <p:cNvPr id="5" name="s3-identity">
             <a:extLst xmlns:a="http://schemas.openxmlformats.org/drawingml/2006/main">
               <a:ext uri="{FF2B5EF4-FFF2-40B4-BE49-F238E27FC236}">
-                <a16:creationId xmlns:a16="http://schemas.microsoft.com/office/drawing/2014/main" id="{489E9921-96E0-4499-B661-D8DEA07C7F8C}"/>
+                <a16:creationId xmlns:a16="http://schemas.microsoft.com/office/drawing/2014/main" id="{DE67C2D8-089B-4589-B6BB-EDEA646B10AC}"/>
               </a:ext>
             </a:extLst>
           </p:cNvPr>
@@ -5387,7 +5387,7 @@
           <p:cNvPr id="6" name="core-no-0">
             <a:extLst xmlns:a="http://schemas.openxmlformats.org/drawingml/2006/main">
               <a:ext uri="{FF2B5EF4-FFF2-40B4-BE49-F238E27FC236}">
-                <a16:creationId xmlns:a16="http://schemas.microsoft.com/office/drawing/2014/main" id="{4A48EDAA-06DA-4C91-AA52-C83416F8DCE0}"/>
+                <a16:creationId xmlns:a16="http://schemas.microsoft.com/office/drawing/2014/main" id="{F0022C7B-8325-4F27-8932-D349042DAA2F}"/>
               </a:ext>
             </a:extLst>
           </p:cNvPr>
@@ -5419,7 +5419,7 @@
             <a:pPr algn="l">
               <a:defRPr sz="2250" b="1">
                 <a:solidFill>
-                  <a:srgbClr val="17A6C8"/>
+                  <a:srgbClr val="006B80"/>
                 </a:solidFill>
                 <a:latin typeface="PingFang SC"/>
                 <a:ea typeface="PingFang SC"/>
@@ -5429,7 +5429,7 @@
             <a:r>
               <a:rPr sz="2250" b="1">
                 <a:solidFill>
-                  <a:srgbClr val="17A6C8"/>
+                  <a:srgbClr val="006B80"/>
                 </a:solidFill>
                 <a:latin typeface="PingFang SC"/>
                 <a:ea typeface="PingFang SC"/>
@@ -5445,7 +5445,7 @@
           <p:cNvPr id="7" name="core-label-0">
             <a:extLst xmlns:a="http://schemas.openxmlformats.org/drawingml/2006/main">
               <a:ext uri="{FF2B5EF4-FFF2-40B4-BE49-F238E27FC236}">
-                <a16:creationId xmlns:a16="http://schemas.microsoft.com/office/drawing/2014/main" id="{4DA50967-C4E3-46B2-8021-EB78A28EABD0}"/>
+                <a16:creationId xmlns:a16="http://schemas.microsoft.com/office/drawing/2014/main" id="{04CC274E-C0F6-4F3F-A7C8-70574F6893B1}"/>
               </a:ext>
             </a:extLst>
           </p:cNvPr>
@@ -5503,7 +5503,7 @@
           <p:cNvPr id="8" name="core-body-0">
             <a:extLst xmlns:a="http://schemas.openxmlformats.org/drawingml/2006/main">
               <a:ext uri="{FF2B5EF4-FFF2-40B4-BE49-F238E27FC236}">
-                <a16:creationId xmlns:a16="http://schemas.microsoft.com/office/drawing/2014/main" id="{8D94E3AF-27C2-480D-8876-9D5D02A8E1F5}"/>
+                <a16:creationId xmlns:a16="http://schemas.microsoft.com/office/drawing/2014/main" id="{86A48823-F2BF-49B8-B27E-91DA61A836C5}"/>
               </a:ext>
             </a:extLst>
           </p:cNvPr>
@@ -5527,7 +5527,7 @@
           </a:solidFill>
           <a:ln xmlns:a="http://schemas.openxmlformats.org/drawingml/2006/main" w="19050">
             <a:solidFill>
-              <a:srgbClr val="17A6C8"/>
+              <a:srgbClr val="006B80"/>
             </a:solidFill>
             <a:prstDash val="solid"/>
           </a:ln>
@@ -5567,7 +5567,7 @@
           <p:cNvPr id="9" name="core-no-1">
             <a:extLst xmlns:a="http://schemas.openxmlformats.org/drawingml/2006/main">
               <a:ext uri="{FF2B5EF4-FFF2-40B4-BE49-F238E27FC236}">
-                <a16:creationId xmlns:a16="http://schemas.microsoft.com/office/drawing/2014/main" id="{95D39741-4956-4C60-853A-A171EABA296E}"/>
+                <a16:creationId xmlns:a16="http://schemas.microsoft.com/office/drawing/2014/main" id="{FCF07C5A-CA93-4CA4-8E47-78C9B225B67E}"/>
               </a:ext>
             </a:extLst>
           </p:cNvPr>
@@ -5599,7 +5599,7 @@
             <a:pPr algn="l">
               <a:defRPr sz="2250" b="1">
                 <a:solidFill>
-                  <a:srgbClr val="17A6C8"/>
+                  <a:srgbClr val="006B80"/>
                 </a:solidFill>
                 <a:latin typeface="PingFang SC"/>
                 <a:ea typeface="PingFang SC"/>
@@ -5609,7 +5609,7 @@
             <a:r>
               <a:rPr sz="2250" b="1">
                 <a:solidFill>
-                  <a:srgbClr val="17A6C8"/>
+                  <a:srgbClr val="006B80"/>
                 </a:solidFill>
                 <a:latin typeface="PingFang SC"/>
                 <a:ea typeface="PingFang SC"/>
@@ -5625,7 +5625,7 @@
           <p:cNvPr id="10" name="core-label-1">
             <a:extLst xmlns:a="http://schemas.openxmlformats.org/drawingml/2006/main">
               <a:ext uri="{FF2B5EF4-FFF2-40B4-BE49-F238E27FC236}">
-                <a16:creationId xmlns:a16="http://schemas.microsoft.com/office/drawing/2014/main" id="{E716BC2C-2B78-416F-B43A-82EAD900AA31}"/>
+                <a16:creationId xmlns:a16="http://schemas.microsoft.com/office/drawing/2014/main" id="{87846B58-F6DB-4FC2-AF60-005BF25F7718}"/>
               </a:ext>
             </a:extLst>
           </p:cNvPr>
@@ -5683,7 +5683,7 @@
           <p:cNvPr id="11" name="core-body-1">
             <a:extLst xmlns:a="http://schemas.openxmlformats.org/drawingml/2006/main">
               <a:ext uri="{FF2B5EF4-FFF2-40B4-BE49-F238E27FC236}">
-                <a16:creationId xmlns:a16="http://schemas.microsoft.com/office/drawing/2014/main" id="{74AC19D2-53EA-4BB7-A0BA-7D39C264D779}"/>
+                <a16:creationId xmlns:a16="http://schemas.microsoft.com/office/drawing/2014/main" id="{88833533-EB26-4654-A3C9-29FE61662BE5}"/>
               </a:ext>
             </a:extLst>
           </p:cNvPr>
@@ -5737,7 +5737,7 @@
                 <a:ea typeface="PingFang SC"/>
                 <a:cs typeface="PingFang SC"/>
               </a:rPr>
-              <a:t>开始修改前，应确认项目目录、启动方式、当前页面和已有错误。如果是已有项目，先运行一次并记录基线：哪些功能已经工作，哪些测试通过，工作区是否有未保存修改…</a:t>
+              <a:t>开始修改前，应确认项目目录、启动方式、当前页面和已有错误；如果是已有项目，先运行一次并记录基线；哪些功能已经工作，哪些测试通过；工作区是否有未保存修改</a:t>
             </a:r>
           </a:p>
         </p:txBody>
@@ -5747,7 +5747,7 @@
           <p:cNvPr id="12" name="s3-takeaway-rule">
             <a:extLst xmlns:a="http://schemas.openxmlformats.org/drawingml/2006/main">
               <a:ext uri="{FF2B5EF4-FFF2-40B4-BE49-F238E27FC236}">
-                <a16:creationId xmlns:a16="http://schemas.microsoft.com/office/drawing/2014/main" id="{1F930B40-2D1D-4403-8F77-B5A2BF2FAD6C}"/>
+                <a16:creationId xmlns:a16="http://schemas.microsoft.com/office/drawing/2014/main" id="{7E7E798C-4D9B-432D-8845-7F550E349469}"/>
               </a:ext>
             </a:extLst>
           </p:cNvPr>
@@ -5780,7 +5780,7 @@
           <p:cNvPr id="13" name="s3-takeaway">
             <a:extLst xmlns:a="http://schemas.openxmlformats.org/drawingml/2006/main">
               <a:ext uri="{FF2B5EF4-FFF2-40B4-BE49-F238E27FC236}">
-                <a16:creationId xmlns:a16="http://schemas.microsoft.com/office/drawing/2014/main" id="{362A5DA9-C494-4584-83CC-5EF0992A8308}"/>
+                <a16:creationId xmlns:a16="http://schemas.microsoft.com/office/drawing/2014/main" id="{336AEA5E-7F5F-44FA-9138-976532C53B48}"/>
               </a:ext>
             </a:extLst>
           </p:cNvPr>
@@ -5828,7 +5828,7 @@
                 <a:ea typeface="PingFang SC"/>
                 <a:cs typeface="PingFang SC"/>
               </a:rPr>
-              <a:t>把“想做什么”变成可验收需求</a:t>
+              <a:t>先锁定需求与基线，再让 AI 改动代码</a:t>
             </a:r>
           </a:p>
         </p:txBody>
@@ -5836,7 +5836,7 @@
     </p:spTree>
     <p:extLst>
       <p:ext uri="{BB962C8B-B14F-4D97-AF65-F5344CB8AC3E}">
-        <p14:creationId xmlns:p14="http://schemas.microsoft.com/office/powerpoint/2010/main" val="1736676521"/>
+        <p14:creationId xmlns:p14="http://schemas.microsoft.com/office/powerpoint/2010/main" val="18773100"/>
       </p:ext>
     </p:extLst>
   </p:cSld>
@@ -5867,7 +5867,7 @@
           <p:cNvPr id="1" name="s4-rule">
             <a:extLst xmlns:a="http://schemas.openxmlformats.org/drawingml/2006/main">
               <a:ext uri="{FF2B5EF4-FFF2-40B4-BE49-F238E27FC236}">
-                <a16:creationId xmlns:a16="http://schemas.microsoft.com/office/drawing/2014/main" id="{E7078ACF-76B7-45BD-8630-124426ED6A2A}"/>
+                <a16:creationId xmlns:a16="http://schemas.microsoft.com/office/drawing/2014/main" id="{EAF9B832-2F96-4E24-A312-0F2290BCE6D9}"/>
               </a:ext>
             </a:extLst>
           </p:cNvPr>
@@ -5900,7 +5900,7 @@
           <p:cNvPr id="2" name="s4-eyebrow">
             <a:extLst xmlns:a="http://schemas.openxmlformats.org/drawingml/2006/main">
               <a:ext uri="{FF2B5EF4-FFF2-40B4-BE49-F238E27FC236}">
-                <a16:creationId xmlns:a16="http://schemas.microsoft.com/office/drawing/2014/main" id="{C234C54C-DA73-45D0-8477-E03CF39EFC67}"/>
+                <a16:creationId xmlns:a16="http://schemas.microsoft.com/office/drawing/2014/main" id="{4DE94003-8D85-4AE7-A785-7E6B6E097C9A}"/>
               </a:ext>
             </a:extLst>
           </p:cNvPr>
@@ -5958,7 +5958,7 @@
           <p:cNvPr id="3" name="s4-title">
             <a:extLst xmlns:a="http://schemas.openxmlformats.org/drawingml/2006/main">
               <a:ext uri="{FF2B5EF4-FFF2-40B4-BE49-F238E27FC236}">
-                <a16:creationId xmlns:a16="http://schemas.microsoft.com/office/drawing/2014/main" id="{39E8DD07-9554-4C27-B738-5D779BD2423F}"/>
+                <a16:creationId xmlns:a16="http://schemas.microsoft.com/office/drawing/2014/main" id="{4E0795C4-B7BD-4130-846C-999DAFAE3DEE}"/>
               </a:ext>
             </a:extLst>
           </p:cNvPr>
@@ -6006,7 +6006,7 @@
                 <a:ea typeface="PingFang SC"/>
                 <a:cs typeface="PingFang SC"/>
               </a:rPr>
-              <a:t>一次有效任务卡通常包含</a:t>
+              <a:t>清晰任务卡与小步运行共同压缩错误空间</a:t>
             </a:r>
           </a:p>
         </p:txBody>
@@ -6016,7 +6016,7 @@
           <p:cNvPr id="4" name="s4-footer">
             <a:extLst xmlns:a="http://schemas.openxmlformats.org/drawingml/2006/main">
               <a:ext uri="{FF2B5EF4-FFF2-40B4-BE49-F238E27FC236}">
-                <a16:creationId xmlns:a16="http://schemas.microsoft.com/office/drawing/2014/main" id="{8A9AF618-23D4-4CE3-832B-226E735519A3}"/>
+                <a16:creationId xmlns:a16="http://schemas.microsoft.com/office/drawing/2014/main" id="{7C63F040-8573-4622-AD4B-CF30DD3D173B}"/>
               </a:ext>
             </a:extLst>
           </p:cNvPr>
@@ -6047,7 +6047,7 @@
           <p:cNvPr id="5" name="s4-identity">
             <a:extLst xmlns:a="http://schemas.openxmlformats.org/drawingml/2006/main">
               <a:ext uri="{FF2B5EF4-FFF2-40B4-BE49-F238E27FC236}">
-                <a16:creationId xmlns:a16="http://schemas.microsoft.com/office/drawing/2014/main" id="{92BC4458-8B66-482E-992D-5B2492FF6759}"/>
+                <a16:creationId xmlns:a16="http://schemas.microsoft.com/office/drawing/2014/main" id="{86D50794-DDEF-421A-A324-D816550B1600}"/>
               </a:ext>
             </a:extLst>
           </p:cNvPr>
@@ -6105,7 +6105,7 @@
           <p:cNvPr id="6" name="core-no-0">
             <a:extLst xmlns:a="http://schemas.openxmlformats.org/drawingml/2006/main">
               <a:ext uri="{FF2B5EF4-FFF2-40B4-BE49-F238E27FC236}">
-                <a16:creationId xmlns:a16="http://schemas.microsoft.com/office/drawing/2014/main" id="{28DF704A-95D1-4EF8-9A83-8C07BEB747B1}"/>
+                <a16:creationId xmlns:a16="http://schemas.microsoft.com/office/drawing/2014/main" id="{3FDD1419-5B5D-402C-9BB8-0500022AA857}"/>
               </a:ext>
             </a:extLst>
           </p:cNvPr>
@@ -6137,7 +6137,7 @@
             <a:pPr algn="l">
               <a:defRPr sz="2250" b="1">
                 <a:solidFill>
-                  <a:srgbClr val="17A6C8"/>
+                  <a:srgbClr val="006B80"/>
                 </a:solidFill>
                 <a:latin typeface="PingFang SC"/>
                 <a:ea typeface="PingFang SC"/>
@@ -6147,7 +6147,7 @@
             <a:r>
               <a:rPr sz="2250" b="1">
                 <a:solidFill>
-                  <a:srgbClr val="17A6C8"/>
+                  <a:srgbClr val="006B80"/>
                 </a:solidFill>
                 <a:latin typeface="PingFang SC"/>
                 <a:ea typeface="PingFang SC"/>
@@ -6163,7 +6163,7 @@
           <p:cNvPr id="7" name="core-label-0">
             <a:extLst xmlns:a="http://schemas.openxmlformats.org/drawingml/2006/main">
               <a:ext uri="{FF2B5EF4-FFF2-40B4-BE49-F238E27FC236}">
-                <a16:creationId xmlns:a16="http://schemas.microsoft.com/office/drawing/2014/main" id="{92B86785-76E2-40B8-9DCA-D1B78634ED38}"/>
+                <a16:creationId xmlns:a16="http://schemas.microsoft.com/office/drawing/2014/main" id="{93C3B96F-B3D8-4AC9-BC18-A4922021C7B4}"/>
               </a:ext>
             </a:extLst>
           </p:cNvPr>
@@ -6221,7 +6221,7 @@
           <p:cNvPr id="8" name="core-body-0">
             <a:extLst xmlns:a="http://schemas.openxmlformats.org/drawingml/2006/main">
               <a:ext uri="{FF2B5EF4-FFF2-40B4-BE49-F238E27FC236}">
-                <a16:creationId xmlns:a16="http://schemas.microsoft.com/office/drawing/2014/main" id="{DBA5CC96-C9F8-4C67-9BC9-3D1EEF53DB07}"/>
+                <a16:creationId xmlns:a16="http://schemas.microsoft.com/office/drawing/2014/main" id="{C6A7D3C9-1A48-4A62-8B8B-985AAB86984E}"/>
               </a:ext>
             </a:extLst>
           </p:cNvPr>
@@ -6245,7 +6245,7 @@
           </a:solidFill>
           <a:ln xmlns:a="http://schemas.openxmlformats.org/drawingml/2006/main" w="19050">
             <a:solidFill>
-              <a:srgbClr val="17A6C8"/>
+              <a:srgbClr val="006B80"/>
             </a:solidFill>
             <a:prstDash val="solid"/>
           </a:ln>
@@ -6275,7 +6275,7 @@
                 <a:ea typeface="PingFang SC"/>
                 <a:cs typeface="PingFang SC"/>
               </a:rPr>
-              <a:t>一次有效任务卡通常包含：目标、现状、允许修改的范围、必须保留的行为、技术约束、验收步骤和期望输出。例如</a:t>
+              <a:t>一次有效任务卡通常包含：目标、现状、允许修改的范围、必须保留的行为、技术约束、验收步骤和期望输出</a:t>
             </a:r>
           </a:p>
         </p:txBody>
@@ -6285,7 +6285,7 @@
           <p:cNvPr id="9" name="core-no-1">
             <a:extLst xmlns:a="http://schemas.openxmlformats.org/drawingml/2006/main">
               <a:ext uri="{FF2B5EF4-FFF2-40B4-BE49-F238E27FC236}">
-                <a16:creationId xmlns:a16="http://schemas.microsoft.com/office/drawing/2014/main" id="{B05E56B9-9E7E-40D5-A83D-07750D30D79B}"/>
+                <a16:creationId xmlns:a16="http://schemas.microsoft.com/office/drawing/2014/main" id="{07CEF786-ED6D-425A-A765-141709397C4A}"/>
               </a:ext>
             </a:extLst>
           </p:cNvPr>
@@ -6317,7 +6317,7 @@
             <a:pPr algn="l">
               <a:defRPr sz="2250" b="1">
                 <a:solidFill>
-                  <a:srgbClr val="17A6C8"/>
+                  <a:srgbClr val="006B80"/>
                 </a:solidFill>
                 <a:latin typeface="PingFang SC"/>
                 <a:ea typeface="PingFang SC"/>
@@ -6327,7 +6327,7 @@
             <a:r>
               <a:rPr sz="2250" b="1">
                 <a:solidFill>
-                  <a:srgbClr val="17A6C8"/>
+                  <a:srgbClr val="006B80"/>
                 </a:solidFill>
                 <a:latin typeface="PingFang SC"/>
                 <a:ea typeface="PingFang SC"/>
@@ -6343,7 +6343,7 @@
           <p:cNvPr id="10" name="core-label-1">
             <a:extLst xmlns:a="http://schemas.openxmlformats.org/drawingml/2006/main">
               <a:ext uri="{FF2B5EF4-FFF2-40B4-BE49-F238E27FC236}">
-                <a16:creationId xmlns:a16="http://schemas.microsoft.com/office/drawing/2014/main" id="{D41C79E0-E228-4170-86CA-BEFAFCA998F7}"/>
+                <a16:creationId xmlns:a16="http://schemas.microsoft.com/office/drawing/2014/main" id="{45938182-B375-4B57-8F25-79800DD4A95C}"/>
               </a:ext>
             </a:extLst>
           </p:cNvPr>
@@ -6401,7 +6401,7 @@
           <p:cNvPr id="11" name="core-body-1">
             <a:extLst xmlns:a="http://schemas.openxmlformats.org/drawingml/2006/main">
               <a:ext uri="{FF2B5EF4-FFF2-40B4-BE49-F238E27FC236}">
-                <a16:creationId xmlns:a16="http://schemas.microsoft.com/office/drawing/2014/main" id="{9CB6F190-DDE0-4543-AD7E-926C2E2EF505}"/>
+                <a16:creationId xmlns:a16="http://schemas.microsoft.com/office/drawing/2014/main" id="{58DE8A22-827A-4818-A5EF-2C3A94A9C132}"/>
               </a:ext>
             </a:extLst>
           </p:cNvPr>
@@ -6465,7 +6465,7 @@
           <p:cNvPr id="12" name="s4-takeaway-rule">
             <a:extLst xmlns:a="http://schemas.openxmlformats.org/drawingml/2006/main">
               <a:ext uri="{FF2B5EF4-FFF2-40B4-BE49-F238E27FC236}">
-                <a16:creationId xmlns:a16="http://schemas.microsoft.com/office/drawing/2014/main" id="{8FD4F806-8ABB-48F9-8D84-95D408C04AAA}"/>
+                <a16:creationId xmlns:a16="http://schemas.microsoft.com/office/drawing/2014/main" id="{C7DF97E4-7B2D-498D-BB35-2A0BFFDD41CF}"/>
               </a:ext>
             </a:extLst>
           </p:cNvPr>
@@ -6498,7 +6498,7 @@
           <p:cNvPr id="13" name="s4-takeaway">
             <a:extLst xmlns:a="http://schemas.openxmlformats.org/drawingml/2006/main">
               <a:ext uri="{FF2B5EF4-FFF2-40B4-BE49-F238E27FC236}">
-                <a16:creationId xmlns:a16="http://schemas.microsoft.com/office/drawing/2014/main" id="{C917EB60-1F72-42AA-A385-A6413E3422EF}"/>
+                <a16:creationId xmlns:a16="http://schemas.microsoft.com/office/drawing/2014/main" id="{CFB820D7-C630-40A6-8713-B10C2FB6D023}"/>
               </a:ext>
             </a:extLst>
           </p:cNvPr>
@@ -6546,7 +6546,7 @@
                 <a:ea typeface="PingFang SC"/>
                 <a:cs typeface="PingFang SC"/>
               </a:rPr>
-              <a:t>一次有效任务卡通常包含</a:t>
+              <a:t>清晰任务卡与小步运行共同压缩错误空间</a:t>
             </a:r>
           </a:p>
         </p:txBody>
@@ -6554,7 +6554,7 @@
     </p:spTree>
     <p:extLst>
       <p:ext uri="{BB962C8B-B14F-4D97-AF65-F5344CB8AC3E}">
-        <p14:creationId xmlns:p14="http://schemas.microsoft.com/office/powerpoint/2010/main" val="1857246843"/>
+        <p14:creationId xmlns:p14="http://schemas.microsoft.com/office/powerpoint/2010/main" val="1304421773"/>
       </p:ext>
     </p:extLst>
   </p:cSld>
@@ -6585,7 +6585,7 @@
           <p:cNvPr id="1" name="s5-rule">
             <a:extLst xmlns:a="http://schemas.openxmlformats.org/drawingml/2006/main">
               <a:ext uri="{FF2B5EF4-FFF2-40B4-BE49-F238E27FC236}">
-                <a16:creationId xmlns:a16="http://schemas.microsoft.com/office/drawing/2014/main" id="{02164375-47FB-482F-9AAB-2AD074695106}"/>
+                <a16:creationId xmlns:a16="http://schemas.microsoft.com/office/drawing/2014/main" id="{0F2CBBA1-90F1-4C51-9676-1AB44E098FDA}"/>
               </a:ext>
             </a:extLst>
           </p:cNvPr>
@@ -6618,7 +6618,7 @@
           <p:cNvPr id="2" name="s5-eyebrow">
             <a:extLst xmlns:a="http://schemas.openxmlformats.org/drawingml/2006/main">
               <a:ext uri="{FF2B5EF4-FFF2-40B4-BE49-F238E27FC236}">
-                <a16:creationId xmlns:a16="http://schemas.microsoft.com/office/drawing/2014/main" id="{6EB960A2-0B05-460B-BF44-60F0922466E8}"/>
+                <a16:creationId xmlns:a16="http://schemas.microsoft.com/office/drawing/2014/main" id="{F6B615FF-EE4D-4BF9-9969-DBFCB575379D}"/>
               </a:ext>
             </a:extLst>
           </p:cNvPr>
@@ -6676,7 +6676,7 @@
           <p:cNvPr id="3" name="s5-title">
             <a:extLst xmlns:a="http://schemas.openxmlformats.org/drawingml/2006/main">
               <a:ext uri="{FF2B5EF4-FFF2-40B4-BE49-F238E27FC236}">
-                <a16:creationId xmlns:a16="http://schemas.microsoft.com/office/drawing/2014/main" id="{67E85A65-584E-46F5-BBFE-C34E417B969B}"/>
+                <a16:creationId xmlns:a16="http://schemas.microsoft.com/office/drawing/2014/main" id="{08AA5202-E6AF-4CAE-9B70-726DBC216322}"/>
               </a:ext>
             </a:extLst>
           </p:cNvPr>
@@ -6734,7 +6734,7 @@
           <p:cNvPr id="4" name="s5-footer">
             <a:extLst xmlns:a="http://schemas.openxmlformats.org/drawingml/2006/main">
               <a:ext uri="{FF2B5EF4-FFF2-40B4-BE49-F238E27FC236}">
-                <a16:creationId xmlns:a16="http://schemas.microsoft.com/office/drawing/2014/main" id="{C93EB18D-D077-4BC2-A328-99E7DC3A53BE}"/>
+                <a16:creationId xmlns:a16="http://schemas.microsoft.com/office/drawing/2014/main" id="{412CD4D9-538B-45D0-BC6D-E2CD1267D43F}"/>
               </a:ext>
             </a:extLst>
           </p:cNvPr>
@@ -6765,7 +6765,7 @@
           <p:cNvPr id="5" name="s5-identity">
             <a:extLst xmlns:a="http://schemas.openxmlformats.org/drawingml/2006/main">
               <a:ext uri="{FF2B5EF4-FFF2-40B4-BE49-F238E27FC236}">
-                <a16:creationId xmlns:a16="http://schemas.microsoft.com/office/drawing/2014/main" id="{1361A67E-2CB7-479A-830A-2DBCFDA19942}"/>
+                <a16:creationId xmlns:a16="http://schemas.microsoft.com/office/drawing/2014/main" id="{9F694A78-736D-4063-8831-34D9F9350ED8}"/>
               </a:ext>
             </a:extLst>
           </p:cNvPr>
@@ -6823,7 +6823,7 @@
           <p:cNvPr id="6" name="core-no-0">
             <a:extLst xmlns:a="http://schemas.openxmlformats.org/drawingml/2006/main">
               <a:ext uri="{FF2B5EF4-FFF2-40B4-BE49-F238E27FC236}">
-                <a16:creationId xmlns:a16="http://schemas.microsoft.com/office/drawing/2014/main" id="{566B185B-D24F-4245-B23A-4D8F25F3EA29}"/>
+                <a16:creationId xmlns:a16="http://schemas.microsoft.com/office/drawing/2014/main" id="{3A0CC34A-A788-45B6-9AAA-D480E7FD8A75}"/>
               </a:ext>
             </a:extLst>
           </p:cNvPr>
@@ -6855,7 +6855,7 @@
             <a:pPr algn="l">
               <a:defRPr sz="2250" b="1">
                 <a:solidFill>
-                  <a:srgbClr val="17A6C8"/>
+                  <a:srgbClr val="006B80"/>
                 </a:solidFill>
                 <a:latin typeface="PingFang SC"/>
                 <a:ea typeface="PingFang SC"/>
@@ -6865,7 +6865,7 @@
             <a:r>
               <a:rPr sz="2250" b="1">
                 <a:solidFill>
-                  <a:srgbClr val="17A6C8"/>
+                  <a:srgbClr val="006B80"/>
                 </a:solidFill>
                 <a:latin typeface="PingFang SC"/>
                 <a:ea typeface="PingFang SC"/>
@@ -6881,7 +6881,7 @@
           <p:cNvPr id="7" name="core-label-0">
             <a:extLst xmlns:a="http://schemas.openxmlformats.org/drawingml/2006/main">
               <a:ext uri="{FF2B5EF4-FFF2-40B4-BE49-F238E27FC236}">
-                <a16:creationId xmlns:a16="http://schemas.microsoft.com/office/drawing/2014/main" id="{F03A85EC-D4B0-44F0-87E5-AA3EA228127A}"/>
+                <a16:creationId xmlns:a16="http://schemas.microsoft.com/office/drawing/2014/main" id="{8C906C4D-3EC7-4045-B70A-9176B0ED3436}"/>
               </a:ext>
             </a:extLst>
           </p:cNvPr>
@@ -6939,7 +6939,7 @@
           <p:cNvPr id="8" name="core-body-0">
             <a:extLst xmlns:a="http://schemas.openxmlformats.org/drawingml/2006/main">
               <a:ext uri="{FF2B5EF4-FFF2-40B4-BE49-F238E27FC236}">
-                <a16:creationId xmlns:a16="http://schemas.microsoft.com/office/drawing/2014/main" id="{DBE78F82-C7A8-4E49-A86A-91DE92AB291F}"/>
+                <a16:creationId xmlns:a16="http://schemas.microsoft.com/office/drawing/2014/main" id="{4793F151-2C7B-4E58-A8E4-A31D059E4B45}"/>
               </a:ext>
             </a:extLst>
           </p:cNvPr>
@@ -6963,7 +6963,7 @@
           </a:solidFill>
           <a:ln xmlns:a="http://schemas.openxmlformats.org/drawingml/2006/main" w="19050">
             <a:solidFill>
-              <a:srgbClr val="17A6C8"/>
+              <a:srgbClr val="006B80"/>
             </a:solidFill>
             <a:prstDash val="solid"/>
           </a:ln>
@@ -6993,7 +6993,7 @@
                 <a:ea typeface="PingFang SC"/>
                 <a:cs typeface="PingFang SC"/>
               </a:rPr>
-              <a:t>遇到“点击没有反应”，先稳定复现，再收集证据：操作步骤是什么，控制台是否报错，事件是否触发，数据是否变化，页面元素是否存在。把原始错误、相关代码和预期行为交给 AI…</a:t>
+              <a:t>遇到“点击没有反应”；先稳定复现，再收集证据；操作步骤是什么，控制台是否报错；事件是否触发，数据是否变化；页面元素是否存在，把原始错误、相关代码和预期行为交给 AI</a:t>
             </a:r>
           </a:p>
         </p:txBody>
@@ -7003,7 +7003,7 @@
           <p:cNvPr id="9" name="core-no-1">
             <a:extLst xmlns:a="http://schemas.openxmlformats.org/drawingml/2006/main">
               <a:ext uri="{FF2B5EF4-FFF2-40B4-BE49-F238E27FC236}">
-                <a16:creationId xmlns:a16="http://schemas.microsoft.com/office/drawing/2014/main" id="{C5140E1C-38E4-40C4-A1BF-458BC7A7717B}"/>
+                <a16:creationId xmlns:a16="http://schemas.microsoft.com/office/drawing/2014/main" id="{B58F0341-C6CF-4050-BD35-4AAEA73EBC21}"/>
               </a:ext>
             </a:extLst>
           </p:cNvPr>
@@ -7035,7 +7035,7 @@
             <a:pPr algn="l">
               <a:defRPr sz="2250" b="1">
                 <a:solidFill>
-                  <a:srgbClr val="17A6C8"/>
+                  <a:srgbClr val="006B80"/>
                 </a:solidFill>
                 <a:latin typeface="PingFang SC"/>
                 <a:ea typeface="PingFang SC"/>
@@ -7045,7 +7045,7 @@
             <a:r>
               <a:rPr sz="2250" b="1">
                 <a:solidFill>
-                  <a:srgbClr val="17A6C8"/>
+                  <a:srgbClr val="006B80"/>
                 </a:solidFill>
                 <a:latin typeface="PingFang SC"/>
                 <a:ea typeface="PingFang SC"/>
@@ -7061,7 +7061,7 @@
           <p:cNvPr id="10" name="core-body-1">
             <a:extLst xmlns:a="http://schemas.openxmlformats.org/drawingml/2006/main">
               <a:ext uri="{FF2B5EF4-FFF2-40B4-BE49-F238E27FC236}">
-                <a16:creationId xmlns:a16="http://schemas.microsoft.com/office/drawing/2014/main" id="{0B0C6761-7C5A-4949-9F8C-55BED3B75E76}"/>
+                <a16:creationId xmlns:a16="http://schemas.microsoft.com/office/drawing/2014/main" id="{33672F8F-C642-4EF4-B5B1-15FBDD50487E}"/>
               </a:ext>
             </a:extLst>
           </p:cNvPr>
@@ -7125,7 +7125,7 @@
           <p:cNvPr id="11" name="s5-takeaway-rule">
             <a:extLst xmlns:a="http://schemas.openxmlformats.org/drawingml/2006/main">
               <a:ext uri="{FF2B5EF4-FFF2-40B4-BE49-F238E27FC236}">
-                <a16:creationId xmlns:a16="http://schemas.microsoft.com/office/drawing/2014/main" id="{B9A5692A-9F16-438D-A35B-0963A56782F9}"/>
+                <a16:creationId xmlns:a16="http://schemas.microsoft.com/office/drawing/2014/main" id="{EF4DDA30-D862-46C1-91D3-0C8FBE03CC00}"/>
               </a:ext>
             </a:extLst>
           </p:cNvPr>
@@ -7158,7 +7158,7 @@
           <p:cNvPr id="12" name="s5-takeaway">
             <a:extLst xmlns:a="http://schemas.openxmlformats.org/drawingml/2006/main">
               <a:ext uri="{FF2B5EF4-FFF2-40B4-BE49-F238E27FC236}">
-                <a16:creationId xmlns:a16="http://schemas.microsoft.com/office/drawing/2014/main" id="{CED895AE-6834-41DD-B27D-254C2C9116FC}"/>
+                <a16:creationId xmlns:a16="http://schemas.microsoft.com/office/drawing/2014/main" id="{14A7D312-A944-46CA-BD4B-A756F9FC6E0F}"/>
               </a:ext>
             </a:extLst>
           </p:cNvPr>
@@ -7214,7 +7214,7 @@
     </p:spTree>
     <p:extLst>
       <p:ext uri="{BB962C8B-B14F-4D97-AF65-F5344CB8AC3E}">
-        <p14:creationId xmlns:p14="http://schemas.microsoft.com/office/powerpoint/2010/main" val="893241187"/>
+        <p14:creationId xmlns:p14="http://schemas.microsoft.com/office/powerpoint/2010/main" val="25690446"/>
       </p:ext>
     </p:extLst>
   </p:cSld>
@@ -7245,7 +7245,7 @@
           <p:cNvPr id="1" name="s6-rule">
             <a:extLst xmlns:a="http://schemas.openxmlformats.org/drawingml/2006/main">
               <a:ext uri="{FF2B5EF4-FFF2-40B4-BE49-F238E27FC236}">
-                <a16:creationId xmlns:a16="http://schemas.microsoft.com/office/drawing/2014/main" id="{90018C00-E849-45E3-A4C5-B473D97B7057}"/>
+                <a16:creationId xmlns:a16="http://schemas.microsoft.com/office/drawing/2014/main" id="{03261ADA-9B70-474E-BBD4-0836AC4DB791}"/>
               </a:ext>
             </a:extLst>
           </p:cNvPr>
@@ -7278,7 +7278,7 @@
           <p:cNvPr id="2" name="s6-eyebrow">
             <a:extLst xmlns:a="http://schemas.openxmlformats.org/drawingml/2006/main">
               <a:ext uri="{FF2B5EF4-FFF2-40B4-BE49-F238E27FC236}">
-                <a16:creationId xmlns:a16="http://schemas.microsoft.com/office/drawing/2014/main" id="{344C30B5-D16E-4901-8AF0-74CE4B423995}"/>
+                <a16:creationId xmlns:a16="http://schemas.microsoft.com/office/drawing/2014/main" id="{B321BB0A-8B57-4FFD-879A-FF87CDF18B09}"/>
               </a:ext>
             </a:extLst>
           </p:cNvPr>
@@ -7336,7 +7336,7 @@
           <p:cNvPr id="3" name="s6-title">
             <a:extLst xmlns:a="http://schemas.openxmlformats.org/drawingml/2006/main">
               <a:ext uri="{FF2B5EF4-FFF2-40B4-BE49-F238E27FC236}">
-                <a16:creationId xmlns:a16="http://schemas.microsoft.com/office/drawing/2014/main" id="{6DD238B4-47BF-40BD-8017-6C204DA0D459}"/>
+                <a16:creationId xmlns:a16="http://schemas.microsoft.com/office/drawing/2014/main" id="{B5E5E752-83F0-4E81-81C9-4F6439CD699D}"/>
               </a:ext>
             </a:extLst>
           </p:cNvPr>
@@ -7394,7 +7394,7 @@
           <p:cNvPr id="4" name="s6-footer">
             <a:extLst xmlns:a="http://schemas.openxmlformats.org/drawingml/2006/main">
               <a:ext uri="{FF2B5EF4-FFF2-40B4-BE49-F238E27FC236}">
-                <a16:creationId xmlns:a16="http://schemas.microsoft.com/office/drawing/2014/main" id="{B30858D0-8831-44BB-81FF-CABB2670C7FE}"/>
+                <a16:creationId xmlns:a16="http://schemas.microsoft.com/office/drawing/2014/main" id="{31E3930B-99AF-4ED9-8A97-751BA53B0D4C}"/>
               </a:ext>
             </a:extLst>
           </p:cNvPr>
@@ -7425,7 +7425,7 @@
           <p:cNvPr id="5" name="s6-identity">
             <a:extLst xmlns:a="http://schemas.openxmlformats.org/drawingml/2006/main">
               <a:ext uri="{FF2B5EF4-FFF2-40B4-BE49-F238E27FC236}">
-                <a16:creationId xmlns:a16="http://schemas.microsoft.com/office/drawing/2014/main" id="{F899DE42-C308-4900-BB77-320C1F202286}"/>
+                <a16:creationId xmlns:a16="http://schemas.microsoft.com/office/drawing/2014/main" id="{1C5F1746-7FD9-4E42-9B5B-09C7C92D8D4C}"/>
               </a:ext>
             </a:extLst>
           </p:cNvPr>
@@ -7483,7 +7483,7 @@
           <p:cNvPr id="6" name="core-no-0">
             <a:extLst xmlns:a="http://schemas.openxmlformats.org/drawingml/2006/main">
               <a:ext uri="{FF2B5EF4-FFF2-40B4-BE49-F238E27FC236}">
-                <a16:creationId xmlns:a16="http://schemas.microsoft.com/office/drawing/2014/main" id="{A5B1A212-5595-4699-B618-D2FDE2DFF2D5}"/>
+                <a16:creationId xmlns:a16="http://schemas.microsoft.com/office/drawing/2014/main" id="{4C49EC99-4A68-4DF1-A05A-3F8FF0CDD8CB}"/>
               </a:ext>
             </a:extLst>
           </p:cNvPr>
@@ -7515,7 +7515,7 @@
             <a:pPr algn="l">
               <a:defRPr sz="2250" b="1">
                 <a:solidFill>
-                  <a:srgbClr val="17A6C8"/>
+                  <a:srgbClr val="006B80"/>
                 </a:solidFill>
                 <a:latin typeface="PingFang SC"/>
                 <a:ea typeface="PingFang SC"/>
@@ -7525,7 +7525,7 @@
             <a:r>
               <a:rPr sz="2250" b="1">
                 <a:solidFill>
-                  <a:srgbClr val="17A6C8"/>
+                  <a:srgbClr val="006B80"/>
                 </a:solidFill>
                 <a:latin typeface="PingFang SC"/>
                 <a:ea typeface="PingFang SC"/>
@@ -7541,7 +7541,7 @@
           <p:cNvPr id="7" name="core-label-0">
             <a:extLst xmlns:a="http://schemas.openxmlformats.org/drawingml/2006/main">
               <a:ext uri="{FF2B5EF4-FFF2-40B4-BE49-F238E27FC236}">
-                <a16:creationId xmlns:a16="http://schemas.microsoft.com/office/drawing/2014/main" id="{7FEF9C8E-113E-4CFB-B92D-57592F284EFF}"/>
+                <a16:creationId xmlns:a16="http://schemas.microsoft.com/office/drawing/2014/main" id="{DBF8A0E5-4C64-47F3-BE38-1DCE73A9A857}"/>
               </a:ext>
             </a:extLst>
           </p:cNvPr>
@@ -7599,7 +7599,7 @@
           <p:cNvPr id="8" name="core-body-0">
             <a:extLst xmlns:a="http://schemas.openxmlformats.org/drawingml/2006/main">
               <a:ext uri="{FF2B5EF4-FFF2-40B4-BE49-F238E27FC236}">
-                <a16:creationId xmlns:a16="http://schemas.microsoft.com/office/drawing/2014/main" id="{999E3E52-BAEC-4E91-B663-A57F319958A5}"/>
+                <a16:creationId xmlns:a16="http://schemas.microsoft.com/office/drawing/2014/main" id="{FE3D5FA3-64B9-469F-A184-CC0A1EF4FAEF}"/>
               </a:ext>
             </a:extLst>
           </p:cNvPr>
@@ -7623,7 +7623,7 @@
           </a:solidFill>
           <a:ln xmlns:a="http://schemas.openxmlformats.org/drawingml/2006/main" w="19050">
             <a:solidFill>
-              <a:srgbClr val="17A6C8"/>
+              <a:srgbClr val="006B80"/>
             </a:solidFill>
             <a:prstDash val="solid"/>
           </a:ln>
@@ -7663,7 +7663,7 @@
           <p:cNvPr id="9" name="core-no-1">
             <a:extLst xmlns:a="http://schemas.openxmlformats.org/drawingml/2006/main">
               <a:ext uri="{FF2B5EF4-FFF2-40B4-BE49-F238E27FC236}">
-                <a16:creationId xmlns:a16="http://schemas.microsoft.com/office/drawing/2014/main" id="{2E74703A-8D12-4B35-B54C-4C54DDABBD6F}"/>
+                <a16:creationId xmlns:a16="http://schemas.microsoft.com/office/drawing/2014/main" id="{F08CE625-681E-40DC-A6EE-84DB9EBB4640}"/>
               </a:ext>
             </a:extLst>
           </p:cNvPr>
@@ -7695,7 +7695,7 @@
             <a:pPr algn="l">
               <a:defRPr sz="2250" b="1">
                 <a:solidFill>
-                  <a:srgbClr val="17A6C8"/>
+                  <a:srgbClr val="006B80"/>
                 </a:solidFill>
                 <a:latin typeface="PingFang SC"/>
                 <a:ea typeface="PingFang SC"/>
@@ -7705,7 +7705,7 @@
             <a:r>
               <a:rPr sz="2250" b="1">
                 <a:solidFill>
-                  <a:srgbClr val="17A6C8"/>
+                  <a:srgbClr val="006B80"/>
                 </a:solidFill>
                 <a:latin typeface="PingFang SC"/>
                 <a:ea typeface="PingFang SC"/>
@@ -7721,7 +7721,7 @@
           <p:cNvPr id="10" name="core-body-1">
             <a:extLst xmlns:a="http://schemas.openxmlformats.org/drawingml/2006/main">
               <a:ext uri="{FF2B5EF4-FFF2-40B4-BE49-F238E27FC236}">
-                <a16:creationId xmlns:a16="http://schemas.microsoft.com/office/drawing/2014/main" id="{C43B065F-83A0-4678-BF1F-0DEB3E16BA9A}"/>
+                <a16:creationId xmlns:a16="http://schemas.microsoft.com/office/drawing/2014/main" id="{ACC6C925-0311-4770-A5A3-D8B66D5F2FF0}"/>
               </a:ext>
             </a:extLst>
           </p:cNvPr>
@@ -7785,7 +7785,7 @@
           <p:cNvPr id="11" name="core-no-2">
             <a:extLst xmlns:a="http://schemas.openxmlformats.org/drawingml/2006/main">
               <a:ext uri="{FF2B5EF4-FFF2-40B4-BE49-F238E27FC236}">
-                <a16:creationId xmlns:a16="http://schemas.microsoft.com/office/drawing/2014/main" id="{ABE2FAA3-050E-4D11-965F-0B87BA3F8C67}"/>
+                <a16:creationId xmlns:a16="http://schemas.microsoft.com/office/drawing/2014/main" id="{6DDB18A4-2BF1-4A0E-BA09-B6E0ED3541AF}"/>
               </a:ext>
             </a:extLst>
           </p:cNvPr>
@@ -7817,7 +7817,7 @@
             <a:pPr algn="l">
               <a:defRPr sz="2250" b="1">
                 <a:solidFill>
-                  <a:srgbClr val="17A6C8"/>
+                  <a:srgbClr val="006B80"/>
                 </a:solidFill>
                 <a:latin typeface="PingFang SC"/>
                 <a:ea typeface="PingFang SC"/>
@@ -7827,7 +7827,7 @@
             <a:r>
               <a:rPr sz="2250" b="1">
                 <a:solidFill>
-                  <a:srgbClr val="17A6C8"/>
+                  <a:srgbClr val="006B80"/>
                 </a:solidFill>
                 <a:latin typeface="PingFang SC"/>
                 <a:ea typeface="PingFang SC"/>
@@ -7843,7 +7843,7 @@
           <p:cNvPr id="12" name="core-body-2">
             <a:extLst xmlns:a="http://schemas.openxmlformats.org/drawingml/2006/main">
               <a:ext uri="{FF2B5EF4-FFF2-40B4-BE49-F238E27FC236}">
-                <a16:creationId xmlns:a16="http://schemas.microsoft.com/office/drawing/2014/main" id="{9147FAB6-05CA-470E-BB26-EFF96E635AE6}"/>
+                <a16:creationId xmlns:a16="http://schemas.microsoft.com/office/drawing/2014/main" id="{9CF236FD-5081-4751-AD3D-EE39E2D4C0E2}"/>
               </a:ext>
             </a:extLst>
           </p:cNvPr>
@@ -7907,7 +7907,7 @@
           <p:cNvPr id="13" name="s6-takeaway-rule">
             <a:extLst xmlns:a="http://schemas.openxmlformats.org/drawingml/2006/main">
               <a:ext uri="{FF2B5EF4-FFF2-40B4-BE49-F238E27FC236}">
-                <a16:creationId xmlns:a16="http://schemas.microsoft.com/office/drawing/2014/main" id="{637CFE68-2E10-478F-B898-E08729947203}"/>
+                <a16:creationId xmlns:a16="http://schemas.microsoft.com/office/drawing/2014/main" id="{DCB5F672-77A6-4313-BBE0-58EE31CD8DAD}"/>
               </a:ext>
             </a:extLst>
           </p:cNvPr>
@@ -7940,7 +7940,7 @@
           <p:cNvPr id="14" name="s6-takeaway">
             <a:extLst xmlns:a="http://schemas.openxmlformats.org/drawingml/2006/main">
               <a:ext uri="{FF2B5EF4-FFF2-40B4-BE49-F238E27FC236}">
-                <a16:creationId xmlns:a16="http://schemas.microsoft.com/office/drawing/2014/main" id="{43F4F1C1-BDAC-4F5C-8354-513A5D940088}"/>
+                <a16:creationId xmlns:a16="http://schemas.microsoft.com/office/drawing/2014/main" id="{B05B7731-4942-4240-91A4-D240B279B964}"/>
               </a:ext>
             </a:extLst>
           </p:cNvPr>
@@ -7996,7 +7996,7 @@
     </p:spTree>
     <p:extLst>
       <p:ext uri="{BB962C8B-B14F-4D97-AF65-F5344CB8AC3E}">
-        <p14:creationId xmlns:p14="http://schemas.microsoft.com/office/powerpoint/2010/main" val="1910269769"/>
+        <p14:creationId xmlns:p14="http://schemas.microsoft.com/office/powerpoint/2010/main" val="806253564"/>
       </p:ext>
     </p:extLst>
   </p:cSld>
@@ -8027,7 +8027,7 @@
           <p:cNvPr id="1" name="s7-rule">
             <a:extLst xmlns:a="http://schemas.openxmlformats.org/drawingml/2006/main">
               <a:ext uri="{FF2B5EF4-FFF2-40B4-BE49-F238E27FC236}">
-                <a16:creationId xmlns:a16="http://schemas.microsoft.com/office/drawing/2014/main" id="{2AB4F4CF-7EDB-4B15-A8EA-A4E14792FF36}"/>
+                <a16:creationId xmlns:a16="http://schemas.microsoft.com/office/drawing/2014/main" id="{2720C2B0-36D9-44F2-A109-81C928F60FDC}"/>
               </a:ext>
             </a:extLst>
           </p:cNvPr>
@@ -8060,7 +8060,7 @@
           <p:cNvPr id="2" name="s7-eyebrow">
             <a:extLst xmlns:a="http://schemas.openxmlformats.org/drawingml/2006/main">
               <a:ext uri="{FF2B5EF4-FFF2-40B4-BE49-F238E27FC236}">
-                <a16:creationId xmlns:a16="http://schemas.microsoft.com/office/drawing/2014/main" id="{98978C62-0693-4722-8F8E-940FE25CDF3A}"/>
+                <a16:creationId xmlns:a16="http://schemas.microsoft.com/office/drawing/2014/main" id="{1317BEFD-097A-49C7-BD18-82015EEBEDD4}"/>
               </a:ext>
             </a:extLst>
           </p:cNvPr>
@@ -8118,7 +8118,7 @@
           <p:cNvPr id="3" name="s7-title">
             <a:extLst xmlns:a="http://schemas.openxmlformats.org/drawingml/2006/main">
               <a:ext uri="{FF2B5EF4-FFF2-40B4-BE49-F238E27FC236}">
-                <a16:creationId xmlns:a16="http://schemas.microsoft.com/office/drawing/2014/main" id="{8FDD8C9B-C247-4B7E-A52B-5578E1BA3360}"/>
+                <a16:creationId xmlns:a16="http://schemas.microsoft.com/office/drawing/2014/main" id="{FCE7F841-A406-4DD6-ADE8-90B50B9BC167}"/>
               </a:ext>
             </a:extLst>
           </p:cNvPr>
@@ -8176,7 +8176,7 @@
           <p:cNvPr id="4" name="s7-footer">
             <a:extLst xmlns:a="http://schemas.openxmlformats.org/drawingml/2006/main">
               <a:ext uri="{FF2B5EF4-FFF2-40B4-BE49-F238E27FC236}">
-                <a16:creationId xmlns:a16="http://schemas.microsoft.com/office/drawing/2014/main" id="{28DC4F8A-C551-45A4-AA5A-D968FE2CA279}"/>
+                <a16:creationId xmlns:a16="http://schemas.microsoft.com/office/drawing/2014/main" id="{E129AD2B-81DB-40B8-A411-FC7AB686617B}"/>
               </a:ext>
             </a:extLst>
           </p:cNvPr>
@@ -8207,7 +8207,7 @@
           <p:cNvPr id="5" name="s7-identity">
             <a:extLst xmlns:a="http://schemas.openxmlformats.org/drawingml/2006/main">
               <a:ext uri="{FF2B5EF4-FFF2-40B4-BE49-F238E27FC236}">
-                <a16:creationId xmlns:a16="http://schemas.microsoft.com/office/drawing/2014/main" id="{91B6DB0C-BA5A-4A82-B310-14CFE3C4992F}"/>
+                <a16:creationId xmlns:a16="http://schemas.microsoft.com/office/drawing/2014/main" id="{9BFE9D71-CEE5-4A47-9654-DDA28DB1537D}"/>
               </a:ext>
             </a:extLst>
           </p:cNvPr>
@@ -8265,7 +8265,7 @@
           <p:cNvPr id="6" name="core-no-0">
             <a:extLst xmlns:a="http://schemas.openxmlformats.org/drawingml/2006/main">
               <a:ext uri="{FF2B5EF4-FFF2-40B4-BE49-F238E27FC236}">
-                <a16:creationId xmlns:a16="http://schemas.microsoft.com/office/drawing/2014/main" id="{B66ED61B-C0C0-49D3-AF44-3CB212B94DCF}"/>
+                <a16:creationId xmlns:a16="http://schemas.microsoft.com/office/drawing/2014/main" id="{15FD8E0A-BD0B-4B6C-B557-DE59147B0515}"/>
               </a:ext>
             </a:extLst>
           </p:cNvPr>
@@ -8297,7 +8297,7 @@
             <a:pPr algn="l">
               <a:defRPr sz="2250" b="1">
                 <a:solidFill>
-                  <a:srgbClr val="17A6C8"/>
+                  <a:srgbClr val="006B80"/>
                 </a:solidFill>
                 <a:latin typeface="PingFang SC"/>
                 <a:ea typeface="PingFang SC"/>
@@ -8307,7 +8307,7 @@
             <a:r>
               <a:rPr sz="2250" b="1">
                 <a:solidFill>
-                  <a:srgbClr val="17A6C8"/>
+                  <a:srgbClr val="006B80"/>
                 </a:solidFill>
                 <a:latin typeface="PingFang SC"/>
                 <a:ea typeface="PingFang SC"/>
@@ -8323,7 +8323,7 @@
           <p:cNvPr id="7" name="core-label-0">
             <a:extLst xmlns:a="http://schemas.openxmlformats.org/drawingml/2006/main">
               <a:ext uri="{FF2B5EF4-FFF2-40B4-BE49-F238E27FC236}">
-                <a16:creationId xmlns:a16="http://schemas.microsoft.com/office/drawing/2014/main" id="{95825F56-E668-43CD-9DE5-FE29C43FDD2E}"/>
+                <a16:creationId xmlns:a16="http://schemas.microsoft.com/office/drawing/2014/main" id="{DC5B4E3C-6B82-4000-BD00-807627415A1E}"/>
               </a:ext>
             </a:extLst>
           </p:cNvPr>
@@ -8381,7 +8381,7 @@
           <p:cNvPr id="8" name="core-body-0">
             <a:extLst xmlns:a="http://schemas.openxmlformats.org/drawingml/2006/main">
               <a:ext uri="{FF2B5EF4-FFF2-40B4-BE49-F238E27FC236}">
-                <a16:creationId xmlns:a16="http://schemas.microsoft.com/office/drawing/2014/main" id="{9E8A46B7-CBB7-4778-AC68-35C02A52E2B1}"/>
+                <a16:creationId xmlns:a16="http://schemas.microsoft.com/office/drawing/2014/main" id="{800F7ADC-FC92-4F66-B43D-17985954A165}"/>
               </a:ext>
             </a:extLst>
           </p:cNvPr>
@@ -8405,7 +8405,7 @@
           </a:solidFill>
           <a:ln xmlns:a="http://schemas.openxmlformats.org/drawingml/2006/main" w="19050">
             <a:solidFill>
-              <a:srgbClr val="17A6C8"/>
+              <a:srgbClr val="006B80"/>
             </a:solidFill>
             <a:prstDash val="solid"/>
           </a:ln>
@@ -8445,7 +8445,7 @@
           <p:cNvPr id="9" name="core-no-1">
             <a:extLst xmlns:a="http://schemas.openxmlformats.org/drawingml/2006/main">
               <a:ext uri="{FF2B5EF4-FFF2-40B4-BE49-F238E27FC236}">
-                <a16:creationId xmlns:a16="http://schemas.microsoft.com/office/drawing/2014/main" id="{B7322D0F-B90E-4257-B8E2-27D093B672F9}"/>
+                <a16:creationId xmlns:a16="http://schemas.microsoft.com/office/drawing/2014/main" id="{DD75DB41-21F0-4810-B7B4-505CFB67983C}"/>
               </a:ext>
             </a:extLst>
           </p:cNvPr>
@@ -8477,7 +8477,7 @@
             <a:pPr algn="l">
               <a:defRPr sz="2250" b="1">
                 <a:solidFill>
-                  <a:srgbClr val="17A6C8"/>
+                  <a:srgbClr val="006B80"/>
                 </a:solidFill>
                 <a:latin typeface="PingFang SC"/>
                 <a:ea typeface="PingFang SC"/>
@@ -8487,7 +8487,7 @@
             <a:r>
               <a:rPr sz="2250" b="1">
                 <a:solidFill>
-                  <a:srgbClr val="17A6C8"/>
+                  <a:srgbClr val="006B80"/>
                 </a:solidFill>
                 <a:latin typeface="PingFang SC"/>
                 <a:ea typeface="PingFang SC"/>
@@ -8503,7 +8503,7 @@
           <p:cNvPr id="10" name="core-body-1">
             <a:extLst xmlns:a="http://schemas.openxmlformats.org/drawingml/2006/main">
               <a:ext uri="{FF2B5EF4-FFF2-40B4-BE49-F238E27FC236}">
-                <a16:creationId xmlns:a16="http://schemas.microsoft.com/office/drawing/2014/main" id="{58187B19-0789-4B4F-905A-6B816985833C}"/>
+                <a16:creationId xmlns:a16="http://schemas.microsoft.com/office/drawing/2014/main" id="{95ECE830-8808-4CCE-A0AF-92A37EEF5250}"/>
               </a:ext>
             </a:extLst>
           </p:cNvPr>
@@ -8567,7 +8567,7 @@
           <p:cNvPr id="11" name="s7-takeaway-rule">
             <a:extLst xmlns:a="http://schemas.openxmlformats.org/drawingml/2006/main">
               <a:ext uri="{FF2B5EF4-FFF2-40B4-BE49-F238E27FC236}">
-                <a16:creationId xmlns:a16="http://schemas.microsoft.com/office/drawing/2014/main" id="{496C96C6-A737-4291-961D-061A6E62F574}"/>
+                <a16:creationId xmlns:a16="http://schemas.microsoft.com/office/drawing/2014/main" id="{DB0AAD0C-CBD2-4F45-A48A-8A44DA213D08}"/>
               </a:ext>
             </a:extLst>
           </p:cNvPr>
@@ -8600,7 +8600,7 @@
           <p:cNvPr id="12" name="s7-takeaway">
             <a:extLst xmlns:a="http://schemas.openxmlformats.org/drawingml/2006/main">
               <a:ext uri="{FF2B5EF4-FFF2-40B4-BE49-F238E27FC236}">
-                <a16:creationId xmlns:a16="http://schemas.microsoft.com/office/drawing/2014/main" id="{E3E7EC27-29BB-43E7-8779-6C7C4B9A1B76}"/>
+                <a16:creationId xmlns:a16="http://schemas.microsoft.com/office/drawing/2014/main" id="{C38D0D5A-4B7C-4DC7-B448-8221FC956C78}"/>
               </a:ext>
             </a:extLst>
           </p:cNvPr>
@@ -8656,7 +8656,7 @@
     </p:spTree>
     <p:extLst>
       <p:ext uri="{BB962C8B-B14F-4D97-AF65-F5344CB8AC3E}">
-        <p14:creationId xmlns:p14="http://schemas.microsoft.com/office/powerpoint/2010/main" val="1616586278"/>
+        <p14:creationId xmlns:p14="http://schemas.microsoft.com/office/powerpoint/2010/main" val="289981765"/>
       </p:ext>
     </p:extLst>
   </p:cSld>
@@ -8687,7 +8687,7 @@
           <p:cNvPr id="1" name="s8-rule">
             <a:extLst xmlns:a="http://schemas.openxmlformats.org/drawingml/2006/main">
               <a:ext uri="{FF2B5EF4-FFF2-40B4-BE49-F238E27FC236}">
-                <a16:creationId xmlns:a16="http://schemas.microsoft.com/office/drawing/2014/main" id="{F4F6326E-ABC6-4C2F-ACA7-E3049240D281}"/>
+                <a16:creationId xmlns:a16="http://schemas.microsoft.com/office/drawing/2014/main" id="{0CEB829B-FB77-43F6-B339-55ECAE0C071F}"/>
               </a:ext>
             </a:extLst>
           </p:cNvPr>
@@ -8720,7 +8720,7 @@
           <p:cNvPr id="2" name="s8-eyebrow">
             <a:extLst xmlns:a="http://schemas.openxmlformats.org/drawingml/2006/main">
               <a:ext uri="{FF2B5EF4-FFF2-40B4-BE49-F238E27FC236}">
-                <a16:creationId xmlns:a16="http://schemas.microsoft.com/office/drawing/2014/main" id="{7EAF7B66-AE35-4F4F-AA71-35794EA30142}"/>
+                <a16:creationId xmlns:a16="http://schemas.microsoft.com/office/drawing/2014/main" id="{92C23213-CAC5-41F8-A516-F542AEA41ACB}"/>
               </a:ext>
             </a:extLst>
           </p:cNvPr>
@@ -8778,7 +8778,7 @@
           <p:cNvPr id="3" name="s8-title">
             <a:extLst xmlns:a="http://schemas.openxmlformats.org/drawingml/2006/main">
               <a:ext uri="{FF2B5EF4-FFF2-40B4-BE49-F238E27FC236}">
-                <a16:creationId xmlns:a16="http://schemas.microsoft.com/office/drawing/2014/main" id="{17E883CD-1915-487C-95B2-779E25AF3B40}"/>
+                <a16:creationId xmlns:a16="http://schemas.microsoft.com/office/drawing/2014/main" id="{DD98955E-D617-4458-8AF0-BA1E7A9785F4}"/>
               </a:ext>
             </a:extLst>
           </p:cNvPr>
@@ -8826,7 +8826,7 @@
                 <a:ea typeface="PingFang SC"/>
                 <a:cs typeface="PingFang SC"/>
               </a:rPr>
-              <a:t>一次完整交付应包含</a:t>
+              <a:t>完整交付要包含运行证据、限制与回退方法</a:t>
             </a:r>
           </a:p>
         </p:txBody>
@@ -8836,7 +8836,7 @@
           <p:cNvPr id="4" name="s8-footer">
             <a:extLst xmlns:a="http://schemas.openxmlformats.org/drawingml/2006/main">
               <a:ext uri="{FF2B5EF4-FFF2-40B4-BE49-F238E27FC236}">
-                <a16:creationId xmlns:a16="http://schemas.microsoft.com/office/drawing/2014/main" id="{2BA12BE1-912F-4BAF-9DEB-8C566AB1FDB3}"/>
+                <a16:creationId xmlns:a16="http://schemas.microsoft.com/office/drawing/2014/main" id="{F8A5E655-B2EC-46D2-87D8-CD527FDEAB2E}"/>
               </a:ext>
             </a:extLst>
           </p:cNvPr>
@@ -8867,7 +8867,7 @@
           <p:cNvPr id="5" name="s8-identity">
             <a:extLst xmlns:a="http://schemas.openxmlformats.org/drawingml/2006/main">
               <a:ext uri="{FF2B5EF4-FFF2-40B4-BE49-F238E27FC236}">
-                <a16:creationId xmlns:a16="http://schemas.microsoft.com/office/drawing/2014/main" id="{F2CB5656-9027-4721-A748-D099948FC37D}"/>
+                <a16:creationId xmlns:a16="http://schemas.microsoft.com/office/drawing/2014/main" id="{6948AF33-8922-473D-BAEE-0EF6FF6D5F70}"/>
               </a:ext>
             </a:extLst>
           </p:cNvPr>
@@ -8925,7 +8925,7 @@
           <p:cNvPr id="6" name="core-no-0">
             <a:extLst xmlns:a="http://schemas.openxmlformats.org/drawingml/2006/main">
               <a:ext uri="{FF2B5EF4-FFF2-40B4-BE49-F238E27FC236}">
-                <a16:creationId xmlns:a16="http://schemas.microsoft.com/office/drawing/2014/main" id="{0FDD331A-5C76-455F-823F-DB8F2DD6D7B7}"/>
+                <a16:creationId xmlns:a16="http://schemas.microsoft.com/office/drawing/2014/main" id="{892588F1-4D7D-4AFF-A922-E7D116F73457}"/>
               </a:ext>
             </a:extLst>
           </p:cNvPr>
@@ -8957,7 +8957,7 @@
             <a:pPr algn="l">
               <a:defRPr sz="2250" b="1">
                 <a:solidFill>
-                  <a:srgbClr val="17A6C8"/>
+                  <a:srgbClr val="006B80"/>
                 </a:solidFill>
                 <a:latin typeface="PingFang SC"/>
                 <a:ea typeface="PingFang SC"/>
@@ -8967,7 +8967,7 @@
             <a:r>
               <a:rPr sz="2250" b="1">
                 <a:solidFill>
-                  <a:srgbClr val="17A6C8"/>
+                  <a:srgbClr val="006B80"/>
                 </a:solidFill>
                 <a:latin typeface="PingFang SC"/>
                 <a:ea typeface="PingFang SC"/>
@@ -8983,7 +8983,7 @@
           <p:cNvPr id="7" name="core-label-0">
             <a:extLst xmlns:a="http://schemas.openxmlformats.org/drawingml/2006/main">
               <a:ext uri="{FF2B5EF4-FFF2-40B4-BE49-F238E27FC236}">
-                <a16:creationId xmlns:a16="http://schemas.microsoft.com/office/drawing/2014/main" id="{D47D129D-421D-4F8D-B26B-CFA8FF1444F9}"/>
+                <a16:creationId xmlns:a16="http://schemas.microsoft.com/office/drawing/2014/main" id="{E1D26125-CA56-4C9F-B5D2-7A7FA6A43EF3}"/>
               </a:ext>
             </a:extLst>
           </p:cNvPr>
@@ -9041,7 +9041,7 @@
           <p:cNvPr id="8" name="core-body-0">
             <a:extLst xmlns:a="http://schemas.openxmlformats.org/drawingml/2006/main">
               <a:ext uri="{FF2B5EF4-FFF2-40B4-BE49-F238E27FC236}">
-                <a16:creationId xmlns:a16="http://schemas.microsoft.com/office/drawing/2014/main" id="{C9AE7E05-EED4-49AC-910D-75C8DF64C231}"/>
+                <a16:creationId xmlns:a16="http://schemas.microsoft.com/office/drawing/2014/main" id="{3644D231-0FD6-4883-B0DC-EBADD6195CB6}"/>
               </a:ext>
             </a:extLst>
           </p:cNvPr>
@@ -9065,7 +9065,7 @@
           </a:solidFill>
           <a:ln xmlns:a="http://schemas.openxmlformats.org/drawingml/2006/main" w="19050">
             <a:solidFill>
-              <a:srgbClr val="17A6C8"/>
+              <a:srgbClr val="006B80"/>
             </a:solidFill>
             <a:prstDash val="solid"/>
           </a:ln>
@@ -9095,7 +9095,7 @@
                 <a:ea typeface="PingFang SC"/>
                 <a:cs typeface="PingFang SC"/>
               </a:rPr>
-              <a:t>一次完整交付应包含：实现结果、变更摘要、验证命令或操作、已知限制和版本记录。提交信息描述一个完整意图，例如“实现待办新增与本地保存”，不要把多个无关修改混在一起。若后续发现问题…</a:t>
+              <a:t>一次完整交付应包含；实现结果、变更摘要、验证命令或操作、已知限制和版本记录；提交信息描述一个完整意图；例如“实现待办新增与本地保存”；不要把多个无关修改混在一起</a:t>
             </a:r>
           </a:p>
         </p:txBody>
@@ -9105,7 +9105,7 @@
           <p:cNvPr id="9" name="s8-takeaway-rule">
             <a:extLst xmlns:a="http://schemas.openxmlformats.org/drawingml/2006/main">
               <a:ext uri="{FF2B5EF4-FFF2-40B4-BE49-F238E27FC236}">
-                <a16:creationId xmlns:a16="http://schemas.microsoft.com/office/drawing/2014/main" id="{4FC5987E-460C-46B4-8B25-B53D956819F5}"/>
+                <a16:creationId xmlns:a16="http://schemas.microsoft.com/office/drawing/2014/main" id="{5A120209-E06F-4BA0-B98B-D5B87C9A8023}"/>
               </a:ext>
             </a:extLst>
           </p:cNvPr>
@@ -9138,7 +9138,7 @@
           <p:cNvPr id="10" name="s8-takeaway">
             <a:extLst xmlns:a="http://schemas.openxmlformats.org/drawingml/2006/main">
               <a:ext uri="{FF2B5EF4-FFF2-40B4-BE49-F238E27FC236}">
-                <a16:creationId xmlns:a16="http://schemas.microsoft.com/office/drawing/2014/main" id="{92F99AE4-9B3F-453B-A040-8AE39F66C2CF}"/>
+                <a16:creationId xmlns:a16="http://schemas.microsoft.com/office/drawing/2014/main" id="{704E2ADC-586A-4097-873B-C66D97C14BDE}"/>
               </a:ext>
             </a:extLst>
           </p:cNvPr>
@@ -9186,7 +9186,7 @@
                 <a:ea typeface="PingFang SC"/>
                 <a:cs typeface="PingFang SC"/>
               </a:rPr>
-              <a:t>一次完整交付应包含</a:t>
+              <a:t>完整交付要包含运行证据、限制与回退方法</a:t>
             </a:r>
           </a:p>
         </p:txBody>
@@ -9194,7 +9194,7 @@
     </p:spTree>
     <p:extLst>
       <p:ext uri="{BB962C8B-B14F-4D97-AF65-F5344CB8AC3E}">
-        <p14:creationId xmlns:p14="http://schemas.microsoft.com/office/powerpoint/2010/main" val="239451967"/>
+        <p14:creationId xmlns:p14="http://schemas.microsoft.com/office/powerpoint/2010/main" val="1171326893"/>
       </p:ext>
     </p:extLst>
   </p:cSld>
@@ -9225,7 +9225,7 @@
           <p:cNvPr id="1" name="s9-rule">
             <a:extLst xmlns:a="http://schemas.openxmlformats.org/drawingml/2006/main">
               <a:ext uri="{FF2B5EF4-FFF2-40B4-BE49-F238E27FC236}">
-                <a16:creationId xmlns:a16="http://schemas.microsoft.com/office/drawing/2014/main" id="{C73CD07E-7361-4D31-A84A-AF8311B75644}"/>
+                <a16:creationId xmlns:a16="http://schemas.microsoft.com/office/drawing/2014/main" id="{BE5E7A8F-ABA7-454B-BA70-4F2AD4BD02CC}"/>
               </a:ext>
             </a:extLst>
           </p:cNvPr>
@@ -9258,7 +9258,7 @@
           <p:cNvPr id="2" name="s9-eyebrow">
             <a:extLst xmlns:a="http://schemas.openxmlformats.org/drawingml/2006/main">
               <a:ext uri="{FF2B5EF4-FFF2-40B4-BE49-F238E27FC236}">
-                <a16:creationId xmlns:a16="http://schemas.microsoft.com/office/drawing/2014/main" id="{1CAF00C3-E1EA-4369-9517-133569686F87}"/>
+                <a16:creationId xmlns:a16="http://schemas.microsoft.com/office/drawing/2014/main" id="{09E596E8-D423-425B-9565-514F47574D77}"/>
               </a:ext>
             </a:extLst>
           </p:cNvPr>
@@ -9316,7 +9316,7 @@
           <p:cNvPr id="3" name="s9-title">
             <a:extLst xmlns:a="http://schemas.openxmlformats.org/drawingml/2006/main">
               <a:ext uri="{FF2B5EF4-FFF2-40B4-BE49-F238E27FC236}">
-                <a16:creationId xmlns:a16="http://schemas.microsoft.com/office/drawing/2014/main" id="{4F140353-47D6-4D1E-93E8-F9DBC0633241}"/>
+                <a16:creationId xmlns:a16="http://schemas.microsoft.com/office/drawing/2014/main" id="{FD15589B-0CEE-41AF-8454-096C41A2154A}"/>
               </a:ext>
             </a:extLst>
           </p:cNvPr>
@@ -9374,7 +9374,7 @@
           <p:cNvPr id="4" name="s9-footer">
             <a:extLst xmlns:a="http://schemas.openxmlformats.org/drawingml/2006/main">
               <a:ext uri="{FF2B5EF4-FFF2-40B4-BE49-F238E27FC236}">
-                <a16:creationId xmlns:a16="http://schemas.microsoft.com/office/drawing/2014/main" id="{B34B8881-8A5D-44C2-9960-CBAA874A6E7C}"/>
+                <a16:creationId xmlns:a16="http://schemas.microsoft.com/office/drawing/2014/main" id="{CF4F854D-413C-42D9-BF5A-9DC2B5C97C58}"/>
               </a:ext>
             </a:extLst>
           </p:cNvPr>
@@ -9405,7 +9405,7 @@
           <p:cNvPr id="5" name="s9-identity">
             <a:extLst xmlns:a="http://schemas.openxmlformats.org/drawingml/2006/main">
               <a:ext uri="{FF2B5EF4-FFF2-40B4-BE49-F238E27FC236}">
-                <a16:creationId xmlns:a16="http://schemas.microsoft.com/office/drawing/2014/main" id="{5F5AFE2E-732E-4F6D-B302-D48167D9AA82}"/>
+                <a16:creationId xmlns:a16="http://schemas.microsoft.com/office/drawing/2014/main" id="{C32D5B54-E38A-40A4-A447-FB1BBFB4618E}"/>
               </a:ext>
             </a:extLst>
           </p:cNvPr>
@@ -9463,7 +9463,7 @@
           <p:cNvPr id="6" name="case-title">
             <a:extLst xmlns:a="http://schemas.openxmlformats.org/drawingml/2006/main">
               <a:ext uri="{FF2B5EF4-FFF2-40B4-BE49-F238E27FC236}">
-                <a16:creationId xmlns:a16="http://schemas.microsoft.com/office/drawing/2014/main" id="{7C70941B-3306-4290-B5A7-701F864E091B}"/>
+                <a16:creationId xmlns:a16="http://schemas.microsoft.com/office/drawing/2014/main" id="{392206DF-D719-44E2-802B-4C153C378B98}"/>
               </a:ext>
             </a:extLst>
           </p:cNvPr>
@@ -9527,7 +9527,7 @@
           <p:cNvPr id="7" name="case-row-0">
             <a:extLst xmlns:a="http://schemas.openxmlformats.org/drawingml/2006/main">
               <a:ext uri="{FF2B5EF4-FFF2-40B4-BE49-F238E27FC236}">
-                <a16:creationId xmlns:a16="http://schemas.microsoft.com/office/drawing/2014/main" id="{B8B5043B-302C-49D1-9C3D-1FEBE6FAC148}"/>
+                <a16:creationId xmlns:a16="http://schemas.microsoft.com/office/drawing/2014/main" id="{A2D83C58-0915-4663-BE16-68A33C32AB31}"/>
               </a:ext>
             </a:extLst>
           </p:cNvPr>
@@ -9581,7 +9581,7 @@
                 <a:ea typeface="PingFang SC"/>
                 <a:cs typeface="PingFang SC"/>
               </a:rPr>
-              <a:t>场景｜如果某一步失败，就回到最近一个已验证状态，而不是让 AI 重新生成整个项目。Vibe Coding 的速度来自快速反馈，不来自跳过证据</a:t>
+              <a:t>场景｜如果某一步失败，就回到最近一个已验证状态，而不是让 AI 重新生成整个项目</a:t>
             </a:r>
           </a:p>
         </p:txBody>
@@ -9591,7 +9591,7 @@
           <p:cNvPr id="8" name="case-row-1">
             <a:extLst xmlns:a="http://schemas.openxmlformats.org/drawingml/2006/main">
               <a:ext uri="{FF2B5EF4-FFF2-40B4-BE49-F238E27FC236}">
-                <a16:creationId xmlns:a16="http://schemas.microsoft.com/office/drawing/2014/main" id="{7E456649-09D7-4E93-9DAF-4C484FE4FC1B}"/>
+                <a16:creationId xmlns:a16="http://schemas.microsoft.com/office/drawing/2014/main" id="{DCC81C78-E07F-4B24-88BB-4D9E3F1969FB}"/>
               </a:ext>
             </a:extLst>
           </p:cNvPr>
@@ -9615,7 +9615,7 @@
           </a:solidFill>
           <a:ln xmlns:a="http://schemas.openxmlformats.org/drawingml/2006/main" w="9525">
             <a:solidFill>
-              <a:srgbClr val="17A6C8"/>
+              <a:srgbClr val="006B80"/>
             </a:solidFill>
             <a:prstDash val="solid"/>
           </a:ln>
@@ -9645,7 +9645,7 @@
                 <a:ea typeface="PingFang SC"/>
                 <a:cs typeface="PingFang SC"/>
               </a:rPr>
-              <a:t>验证｜验收“待办清单的最小闭环”时，要同时记录适用场景、证据来源、失败条件与人工责任</a:t>
+              <a:t>启示｜Vibe Coding 的速度来自快速反馈，不来自跳过证据</a:t>
             </a:r>
           </a:p>
         </p:txBody>
@@ -9655,7 +9655,7 @@
           <p:cNvPr id="9" name="s9-takeaway-rule">
             <a:extLst xmlns:a="http://schemas.openxmlformats.org/drawingml/2006/main">
               <a:ext uri="{FF2B5EF4-FFF2-40B4-BE49-F238E27FC236}">
-                <a16:creationId xmlns:a16="http://schemas.microsoft.com/office/drawing/2014/main" id="{1D1B656D-EE1A-4536-982C-BA91D9A0F26E}"/>
+                <a16:creationId xmlns:a16="http://schemas.microsoft.com/office/drawing/2014/main" id="{34050A27-010A-4F8B-9B8A-0E24E89FF9CC}"/>
               </a:ext>
             </a:extLst>
           </p:cNvPr>
@@ -9688,7 +9688,7 @@
           <p:cNvPr id="10" name="s9-takeaway">
             <a:extLst xmlns:a="http://schemas.openxmlformats.org/drawingml/2006/main">
               <a:ext uri="{FF2B5EF4-FFF2-40B4-BE49-F238E27FC236}">
-                <a16:creationId xmlns:a16="http://schemas.microsoft.com/office/drawing/2014/main" id="{957DE654-545C-40B1-B2CF-1BCE18C41B52}"/>
+                <a16:creationId xmlns:a16="http://schemas.microsoft.com/office/drawing/2014/main" id="{F49364D3-A5F0-482B-9ED3-DD062034D9FB}"/>
               </a:ext>
             </a:extLst>
           </p:cNvPr>
@@ -9744,7 +9744,7 @@
     </p:spTree>
     <p:extLst>
       <p:ext uri="{BB962C8B-B14F-4D97-AF65-F5344CB8AC3E}">
-        <p14:creationId xmlns:p14="http://schemas.microsoft.com/office/powerpoint/2010/main" val="970988599"/>
+        <p14:creationId xmlns:p14="http://schemas.microsoft.com/office/powerpoint/2010/main" val="1939815296"/>
       </p:ext>
     </p:extLst>
   </p:cSld>

--- a/docs/public/course-assets/course-pptx/ag-004.pptx
+++ b/docs/public/course-assets/course-pptx/ag-004.pptx
@@ -2,24 +2,24 @@
 <file path=ppt/presentation.xml><?xml version="1.0" encoding="utf-8"?>
 <p:presentation xmlns:p="http://schemas.openxmlformats.org/presentationml/2006/main">
   <p:sldMasterIdLst>
-    <p:sldMasterId xmlns:r="http://schemas.openxmlformats.org/officeDocument/2006/relationships" id="2147483648" r:id="Ra349380c7b894f83"/>
+    <p:sldMasterId xmlns:r="http://schemas.openxmlformats.org/officeDocument/2006/relationships" id="2147483648" r:id="R2a5845c7a3dd496c"/>
   </p:sldMasterIdLst>
   <p:notesMasterIdLst>
-    <p:notesMasterId xmlns:r="http://schemas.openxmlformats.org/officeDocument/2006/relationships" r:id="Rb796fcb9765e4713"/>
+    <p:notesMasterId xmlns:r="http://schemas.openxmlformats.org/officeDocument/2006/relationships" r:id="R2abf903aca7c4fd6"/>
   </p:notesMasterIdLst>
   <p:sldIdLst>
-    <p:sldId xmlns:r="http://schemas.openxmlformats.org/officeDocument/2006/relationships" id="256" r:id="Re84a636c0a4e4de7"/>
-    <p:sldId xmlns:r="http://schemas.openxmlformats.org/officeDocument/2006/relationships" id="257" r:id="R8cd71e1e92f74aff"/>
-    <p:sldId xmlns:r="http://schemas.openxmlformats.org/officeDocument/2006/relationships" id="258" r:id="Rdef291e8144b48fc"/>
-    <p:sldId xmlns:r="http://schemas.openxmlformats.org/officeDocument/2006/relationships" id="259" r:id="R74a5228026b34c80"/>
-    <p:sldId xmlns:r="http://schemas.openxmlformats.org/officeDocument/2006/relationships" id="260" r:id="R600c340546654cc1"/>
-    <p:sldId xmlns:r="http://schemas.openxmlformats.org/officeDocument/2006/relationships" id="261" r:id="Rea7e7f688859442f"/>
-    <p:sldId xmlns:r="http://schemas.openxmlformats.org/officeDocument/2006/relationships" id="262" r:id="Reba3b904af714b26"/>
-    <p:sldId xmlns:r="http://schemas.openxmlformats.org/officeDocument/2006/relationships" id="263" r:id="R0557628f877b4e70"/>
-    <p:sldId xmlns:r="http://schemas.openxmlformats.org/officeDocument/2006/relationships" id="264" r:id="R42cdfa0c6ca542a4"/>
-    <p:sldId xmlns:r="http://schemas.openxmlformats.org/officeDocument/2006/relationships" id="265" r:id="R4aa984512f7f4026"/>
-    <p:sldId xmlns:r="http://schemas.openxmlformats.org/officeDocument/2006/relationships" id="266" r:id="R065c3b8cc43a407f"/>
-    <p:sldId xmlns:r="http://schemas.openxmlformats.org/officeDocument/2006/relationships" id="267" r:id="R3a4be937cce24cda"/>
+    <p:sldId xmlns:r="http://schemas.openxmlformats.org/officeDocument/2006/relationships" id="256" r:id="R62b4e0c047be468e"/>
+    <p:sldId xmlns:r="http://schemas.openxmlformats.org/officeDocument/2006/relationships" id="257" r:id="Rf9d1bfcbed474e42"/>
+    <p:sldId xmlns:r="http://schemas.openxmlformats.org/officeDocument/2006/relationships" id="258" r:id="Re7ae9388293b4f48"/>
+    <p:sldId xmlns:r="http://schemas.openxmlformats.org/officeDocument/2006/relationships" id="259" r:id="R21f44a3ba8a846d9"/>
+    <p:sldId xmlns:r="http://schemas.openxmlformats.org/officeDocument/2006/relationships" id="260" r:id="R463b2f87dbc44b7a"/>
+    <p:sldId xmlns:r="http://schemas.openxmlformats.org/officeDocument/2006/relationships" id="261" r:id="R5d190beb5eac4c49"/>
+    <p:sldId xmlns:r="http://schemas.openxmlformats.org/officeDocument/2006/relationships" id="262" r:id="Rf9844eab8430478c"/>
+    <p:sldId xmlns:r="http://schemas.openxmlformats.org/officeDocument/2006/relationships" id="263" r:id="Rfecb26b9a57b4dda"/>
+    <p:sldId xmlns:r="http://schemas.openxmlformats.org/officeDocument/2006/relationships" id="264" r:id="Rb696639ea1a44b18"/>
+    <p:sldId xmlns:r="http://schemas.openxmlformats.org/officeDocument/2006/relationships" id="265" r:id="R795e7e8bbf204cd6"/>
+    <p:sldId xmlns:r="http://schemas.openxmlformats.org/officeDocument/2006/relationships" id="266" r:id="R3a507cfe2ee340d1"/>
+    <p:sldId xmlns:r="http://schemas.openxmlformats.org/officeDocument/2006/relationships" id="267" r:id="R9dfb54a8e66c47d6"/>
   </p:sldIdLst>
   <p:sldSz cx="12192000" cy="6858000"/>
   <p:notesSz cx="6858000" cy="9144000"/>
@@ -1338,7 +1338,7 @@
   </p:cSld>
   <p:clrMap bg1="lt1" tx1="dk1" bg2="lt2" tx2="dk2" accent1="accent1" accent2="accent2" accent3="accent3" accent4="accent4" accent5="accent5" accent6="accent6" hlink="hlink" folHlink="folHlink"/>
   <p:sldLayoutIdLst>
-    <p:sldLayoutId xmlns:r="http://schemas.openxmlformats.org/officeDocument/2006/relationships" id="2147483649" r:id="Rcb7980d3854b4d17"/>
+    <p:sldLayoutId xmlns:r="http://schemas.openxmlformats.org/officeDocument/2006/relationships" id="2147483649" r:id="Rd6f9261025564288"/>
   </p:sldLayoutIdLst>
   <p:txStyles>
     <p:titleStyle>
@@ -1889,7 +1889,7 @@
           <p:cNvPr id="1" name="cover-rule">
             <a:extLst xmlns:a="http://schemas.openxmlformats.org/drawingml/2006/main">
               <a:ext uri="{FF2B5EF4-FFF2-40B4-BE49-F238E27FC236}">
-                <a16:creationId xmlns:a16="http://schemas.microsoft.com/office/drawing/2014/main" id="{7705BE3D-ECAD-4E65-947A-5F73800248B0}"/>
+                <a16:creationId xmlns:a16="http://schemas.microsoft.com/office/drawing/2014/main" id="{0AACF4C8-C716-4107-B161-8E3ACDCADD99}"/>
               </a:ext>
             </a:extLst>
           </p:cNvPr>
@@ -1922,7 +1922,7 @@
           <p:cNvPr id="2" name="cover-ring-1">
             <a:extLst xmlns:a="http://schemas.openxmlformats.org/drawingml/2006/main">
               <a:ext uri="{FF2B5EF4-FFF2-40B4-BE49-F238E27FC236}">
-                <a16:creationId xmlns:a16="http://schemas.microsoft.com/office/drawing/2014/main" id="{18B8E706-2C08-4AC1-B599-D709BEAB98A0}"/>
+                <a16:creationId xmlns:a16="http://schemas.microsoft.com/office/drawing/2014/main" id="{6CE58A69-626C-459A-9799-1864DEF34530}"/>
               </a:ext>
             </a:extLst>
           </p:cNvPr>
@@ -1953,7 +1953,7 @@
           <p:cNvPr id="3" name="cover-ring-2">
             <a:extLst xmlns:a="http://schemas.openxmlformats.org/drawingml/2006/main">
               <a:ext uri="{FF2B5EF4-FFF2-40B4-BE49-F238E27FC236}">
-                <a16:creationId xmlns:a16="http://schemas.microsoft.com/office/drawing/2014/main" id="{9AD63F0B-F1C0-4102-9093-DDBD9A70128E}"/>
+                <a16:creationId xmlns:a16="http://schemas.microsoft.com/office/drawing/2014/main" id="{4BF7D3E7-D307-497A-9527-F45764F01C74}"/>
               </a:ext>
             </a:extLst>
           </p:cNvPr>
@@ -1984,7 +1984,7 @@
           <p:cNvPr id="4" name="cover-core">
             <a:extLst xmlns:a="http://schemas.openxmlformats.org/drawingml/2006/main">
               <a:ext uri="{FF2B5EF4-FFF2-40B4-BE49-F238E27FC236}">
-                <a16:creationId xmlns:a16="http://schemas.microsoft.com/office/drawing/2014/main" id="{A3B74930-743A-4755-8DE6-C0FF58DB9BAA}"/>
+                <a16:creationId xmlns:a16="http://schemas.microsoft.com/office/drawing/2014/main" id="{94D61784-22D2-4D35-B7D2-AD0A2D4D62C2}"/>
               </a:ext>
             </a:extLst>
           </p:cNvPr>
@@ -2017,7 +2017,7 @@
           <p:cNvPr id="5" name="cover-line-1">
             <a:extLst xmlns:a="http://schemas.openxmlformats.org/drawingml/2006/main">
               <a:ext uri="{FF2B5EF4-FFF2-40B4-BE49-F238E27FC236}">
-                <a16:creationId xmlns:a16="http://schemas.microsoft.com/office/drawing/2014/main" id="{AF13744A-09D0-4749-A5D5-BD37D35200C2}"/>
+                <a16:creationId xmlns:a16="http://schemas.microsoft.com/office/drawing/2014/main" id="{80862B8B-457E-4E19-95AF-29F18D38F174}"/>
               </a:ext>
             </a:extLst>
           </p:cNvPr>
@@ -2048,7 +2048,7 @@
           <p:cNvPr id="6" name="cover-line-2">
             <a:extLst xmlns:a="http://schemas.openxmlformats.org/drawingml/2006/main">
               <a:ext uri="{FF2B5EF4-FFF2-40B4-BE49-F238E27FC236}">
-                <a16:creationId xmlns:a16="http://schemas.microsoft.com/office/drawing/2014/main" id="{C3992FB7-22FA-4744-A78F-EB50AB44A5F3}"/>
+                <a16:creationId xmlns:a16="http://schemas.microsoft.com/office/drawing/2014/main" id="{23304925-736B-4748-A82B-F4E62C989EB0}"/>
               </a:ext>
             </a:extLst>
           </p:cNvPr>
@@ -2079,7 +2079,7 @@
           <p:cNvPr id="7" name="cover-eyebrow">
             <a:extLst xmlns:a="http://schemas.openxmlformats.org/drawingml/2006/main">
               <a:ext uri="{FF2B5EF4-FFF2-40B4-BE49-F238E27FC236}">
-                <a16:creationId xmlns:a16="http://schemas.microsoft.com/office/drawing/2014/main" id="{E944F409-EED2-4AFB-BC91-3F2F72125236}"/>
+                <a16:creationId xmlns:a16="http://schemas.microsoft.com/office/drawing/2014/main" id="{BBFB1D80-3B50-4CA6-8F39-B5B410D76796}"/>
               </a:ext>
             </a:extLst>
           </p:cNvPr>
@@ -2137,7 +2137,7 @@
           <p:cNvPr id="8" name="cover-title">
             <a:extLst xmlns:a="http://schemas.openxmlformats.org/drawingml/2006/main">
               <a:ext uri="{FF2B5EF4-FFF2-40B4-BE49-F238E27FC236}">
-                <a16:creationId xmlns:a16="http://schemas.microsoft.com/office/drawing/2014/main" id="{D3DF4401-368F-42E0-8DBD-86FFD4004331}"/>
+                <a16:creationId xmlns:a16="http://schemas.microsoft.com/office/drawing/2014/main" id="{E5A748A8-1AE3-4729-908C-5AF481458909}"/>
               </a:ext>
             </a:extLst>
           </p:cNvPr>
@@ -2195,7 +2195,7 @@
           <p:cNvPr id="9" name="cover-subtitle">
             <a:extLst xmlns:a="http://schemas.openxmlformats.org/drawingml/2006/main">
               <a:ext uri="{FF2B5EF4-FFF2-40B4-BE49-F238E27FC236}">
-                <a16:creationId xmlns:a16="http://schemas.microsoft.com/office/drawing/2014/main" id="{1824344E-3CB4-4433-A2A7-C7619D4A01EB}"/>
+                <a16:creationId xmlns:a16="http://schemas.microsoft.com/office/drawing/2014/main" id="{C8BEBFA9-8BBE-449F-999D-C1E46CFFED58}"/>
               </a:ext>
             </a:extLst>
           </p:cNvPr>
@@ -2257,7 +2257,7 @@
           <p:cNvPr id="10" name="cover-lead">
             <a:extLst xmlns:a="http://schemas.openxmlformats.org/drawingml/2006/main">
               <a:ext uri="{FF2B5EF4-FFF2-40B4-BE49-F238E27FC236}">
-                <a16:creationId xmlns:a16="http://schemas.microsoft.com/office/drawing/2014/main" id="{EE8814D3-A793-4BA4-A8D9-1F74C2B507DF}"/>
+                <a16:creationId xmlns:a16="http://schemas.microsoft.com/office/drawing/2014/main" id="{CFBD16C4-59A3-4CAC-9464-88A48F0BB995}"/>
               </a:ext>
             </a:extLst>
           </p:cNvPr>
@@ -2315,7 +2315,7 @@
           <p:cNvPr id="11" name="cover-course">
             <a:extLst xmlns:a="http://schemas.openxmlformats.org/drawingml/2006/main">
               <a:ext uri="{FF2B5EF4-FFF2-40B4-BE49-F238E27FC236}">
-                <a16:creationId xmlns:a16="http://schemas.microsoft.com/office/drawing/2014/main" id="{4CD61543-DBC3-4951-BD4A-B61B1AE032A0}"/>
+                <a16:creationId xmlns:a16="http://schemas.microsoft.com/office/drawing/2014/main" id="{321C08C4-7CA8-4652-A3F0-B82BDCA2A9E8}"/>
               </a:ext>
             </a:extLst>
           </p:cNvPr>
@@ -2373,7 +2373,7 @@
           <p:cNvPr id="12" name="cover-id">
             <a:extLst xmlns:a="http://schemas.openxmlformats.org/drawingml/2006/main">
               <a:ext uri="{FF2B5EF4-FFF2-40B4-BE49-F238E27FC236}">
-                <a16:creationId xmlns:a16="http://schemas.microsoft.com/office/drawing/2014/main" id="{1CE51050-8CB6-4A88-AB2B-632C6FC979D6}"/>
+                <a16:creationId xmlns:a16="http://schemas.microsoft.com/office/drawing/2014/main" id="{F71F08A3-18C3-4550-A114-56EA4B32E15B}"/>
               </a:ext>
             </a:extLst>
           </p:cNvPr>
@@ -2429,7 +2429,7 @@
     </p:spTree>
     <p:extLst>
       <p:ext uri="{BB962C8B-B14F-4D97-AF65-F5344CB8AC3E}">
-        <p14:creationId xmlns:p14="http://schemas.microsoft.com/office/powerpoint/2010/main" val="524696870"/>
+        <p14:creationId xmlns:p14="http://schemas.microsoft.com/office/powerpoint/2010/main" val="1402991099"/>
       </p:ext>
     </p:extLst>
   </p:cSld>
@@ -2460,7 +2460,7 @@
           <p:cNvPr id="1" name="s10-rule">
             <a:extLst xmlns:a="http://schemas.openxmlformats.org/drawingml/2006/main">
               <a:ext uri="{FF2B5EF4-FFF2-40B4-BE49-F238E27FC236}">
-                <a16:creationId xmlns:a16="http://schemas.microsoft.com/office/drawing/2014/main" id="{568E5325-87BA-45FB-AB54-0E111BDA5391}"/>
+                <a16:creationId xmlns:a16="http://schemas.microsoft.com/office/drawing/2014/main" id="{E38B47EC-96B4-4D4F-B830-80368139BB25}"/>
               </a:ext>
             </a:extLst>
           </p:cNvPr>
@@ -2493,7 +2493,7 @@
           <p:cNvPr id="2" name="s10-eyebrow">
             <a:extLst xmlns:a="http://schemas.openxmlformats.org/drawingml/2006/main">
               <a:ext uri="{FF2B5EF4-FFF2-40B4-BE49-F238E27FC236}">
-                <a16:creationId xmlns:a16="http://schemas.microsoft.com/office/drawing/2014/main" id="{4B86E79A-F31B-41FF-A39A-BD9E450BD954}"/>
+                <a16:creationId xmlns:a16="http://schemas.microsoft.com/office/drawing/2014/main" id="{5E01D95F-0ABD-4B43-A707-117D64A4F2D7}"/>
               </a:ext>
             </a:extLst>
           </p:cNvPr>
@@ -2551,7 +2551,7 @@
           <p:cNvPr id="3" name="s10-title">
             <a:extLst xmlns:a="http://schemas.openxmlformats.org/drawingml/2006/main">
               <a:ext uri="{FF2B5EF4-FFF2-40B4-BE49-F238E27FC236}">
-                <a16:creationId xmlns:a16="http://schemas.microsoft.com/office/drawing/2014/main" id="{FC981293-9D59-48A7-93D6-DCF439AE8FF7}"/>
+                <a16:creationId xmlns:a16="http://schemas.microsoft.com/office/drawing/2014/main" id="{CDA75BA9-5A1E-4AAB-A63A-87203BEE3690}"/>
               </a:ext>
             </a:extLst>
           </p:cNvPr>
@@ -2609,7 +2609,7 @@
           <p:cNvPr id="4" name="s10-footer">
             <a:extLst xmlns:a="http://schemas.openxmlformats.org/drawingml/2006/main">
               <a:ext uri="{FF2B5EF4-FFF2-40B4-BE49-F238E27FC236}">
-                <a16:creationId xmlns:a16="http://schemas.microsoft.com/office/drawing/2014/main" id="{29E00783-803F-41C8-B2A6-734DE67A3BB3}"/>
+                <a16:creationId xmlns:a16="http://schemas.microsoft.com/office/drawing/2014/main" id="{01B14EFB-E8D6-4C91-B827-A59ED1A2FCFE}"/>
               </a:ext>
             </a:extLst>
           </p:cNvPr>
@@ -2640,7 +2640,7 @@
           <p:cNvPr id="5" name="s10-identity">
             <a:extLst xmlns:a="http://schemas.openxmlformats.org/drawingml/2006/main">
               <a:ext uri="{FF2B5EF4-FFF2-40B4-BE49-F238E27FC236}">
-                <a16:creationId xmlns:a16="http://schemas.microsoft.com/office/drawing/2014/main" id="{4853A1A2-8C20-4B5E-A91E-A8992B0A5DEE}"/>
+                <a16:creationId xmlns:a16="http://schemas.microsoft.com/office/drawing/2014/main" id="{1E5D16DE-ED00-4613-8EE3-319AF9D4BBAD}"/>
               </a:ext>
             </a:extLst>
           </p:cNvPr>
@@ -2698,7 +2698,7 @@
           <p:cNvPr id="6" name="practice-circle-0">
             <a:extLst xmlns:a="http://schemas.openxmlformats.org/drawingml/2006/main">
               <a:ext uri="{FF2B5EF4-FFF2-40B4-BE49-F238E27FC236}">
-                <a16:creationId xmlns:a16="http://schemas.microsoft.com/office/drawing/2014/main" id="{B4CDBD26-0F8A-42AF-8663-ADD9C5F1A898}"/>
+                <a16:creationId xmlns:a16="http://schemas.microsoft.com/office/drawing/2014/main" id="{FD9E42BA-95FF-4D4D-AF6F-11BBB4627254}"/>
               </a:ext>
             </a:extLst>
           </p:cNvPr>
@@ -2731,7 +2731,7 @@
           <p:cNvPr id="7" name="practice-number-0">
             <a:extLst xmlns:a="http://schemas.openxmlformats.org/drawingml/2006/main">
               <a:ext uri="{FF2B5EF4-FFF2-40B4-BE49-F238E27FC236}">
-                <a16:creationId xmlns:a16="http://schemas.microsoft.com/office/drawing/2014/main" id="{BCB9E520-022A-4EA7-806F-9236BFEB9473}"/>
+                <a16:creationId xmlns:a16="http://schemas.microsoft.com/office/drawing/2014/main" id="{5B51553F-2689-4569-925C-4C9648A6EA32}"/>
               </a:ext>
             </a:extLst>
           </p:cNvPr>
@@ -2789,7 +2789,7 @@
           <p:cNvPr id="8" name="practice-item-0">
             <a:extLst xmlns:a="http://schemas.openxmlformats.org/drawingml/2006/main">
               <a:ext uri="{FF2B5EF4-FFF2-40B4-BE49-F238E27FC236}">
-                <a16:creationId xmlns:a16="http://schemas.microsoft.com/office/drawing/2014/main" id="{60386AA2-C0A9-43BD-B987-632B9A150935}"/>
+                <a16:creationId xmlns:a16="http://schemas.microsoft.com/office/drawing/2014/main" id="{F0624C92-4571-4724-9F74-A7248AF06633}"/>
               </a:ext>
             </a:extLst>
           </p:cNvPr>
@@ -2853,7 +2853,7 @@
           <p:cNvPr id="9" name="practice-connector-0">
             <a:extLst xmlns:a="http://schemas.openxmlformats.org/drawingml/2006/main">
               <a:ext uri="{FF2B5EF4-FFF2-40B4-BE49-F238E27FC236}">
-                <a16:creationId xmlns:a16="http://schemas.microsoft.com/office/drawing/2014/main" id="{59AE2A77-5791-45D8-AEE2-48520825DA9D}"/>
+                <a16:creationId xmlns:a16="http://schemas.microsoft.com/office/drawing/2014/main" id="{3B31174E-E7E8-4074-A958-7C9B46D4A558}"/>
               </a:ext>
             </a:extLst>
           </p:cNvPr>
@@ -2884,7 +2884,7 @@
           <p:cNvPr id="10" name="practice-circle-1">
             <a:extLst xmlns:a="http://schemas.openxmlformats.org/drawingml/2006/main">
               <a:ext uri="{FF2B5EF4-FFF2-40B4-BE49-F238E27FC236}">
-                <a16:creationId xmlns:a16="http://schemas.microsoft.com/office/drawing/2014/main" id="{7098685E-BFD2-41B2-A27F-8732CFB2701D}"/>
+                <a16:creationId xmlns:a16="http://schemas.microsoft.com/office/drawing/2014/main" id="{6249715F-48A4-4615-B7E8-F131A5E8FE20}"/>
               </a:ext>
             </a:extLst>
           </p:cNvPr>
@@ -2917,7 +2917,7 @@
           <p:cNvPr id="11" name="practice-number-1">
             <a:extLst xmlns:a="http://schemas.openxmlformats.org/drawingml/2006/main">
               <a:ext uri="{FF2B5EF4-FFF2-40B4-BE49-F238E27FC236}">
-                <a16:creationId xmlns:a16="http://schemas.microsoft.com/office/drawing/2014/main" id="{DD4DA328-B7DE-4477-BBC4-D0E6FDD972C2}"/>
+                <a16:creationId xmlns:a16="http://schemas.microsoft.com/office/drawing/2014/main" id="{38981E35-B482-47E9-AAC9-C682C5C041C5}"/>
               </a:ext>
             </a:extLst>
           </p:cNvPr>
@@ -2975,7 +2975,7 @@
           <p:cNvPr id="12" name="practice-item-1">
             <a:extLst xmlns:a="http://schemas.openxmlformats.org/drawingml/2006/main">
               <a:ext uri="{FF2B5EF4-FFF2-40B4-BE49-F238E27FC236}">
-                <a16:creationId xmlns:a16="http://schemas.microsoft.com/office/drawing/2014/main" id="{DFD04E8E-548C-4B6A-908B-233D6EC934D9}"/>
+                <a16:creationId xmlns:a16="http://schemas.microsoft.com/office/drawing/2014/main" id="{B97840AC-D2C9-4510-9F37-FBFF67CC8057}"/>
               </a:ext>
             </a:extLst>
           </p:cNvPr>
@@ -3039,7 +3039,7 @@
           <p:cNvPr id="13" name="practice-connector-1">
             <a:extLst xmlns:a="http://schemas.openxmlformats.org/drawingml/2006/main">
               <a:ext uri="{FF2B5EF4-FFF2-40B4-BE49-F238E27FC236}">
-                <a16:creationId xmlns:a16="http://schemas.microsoft.com/office/drawing/2014/main" id="{A1C7D56B-37AA-4E99-9714-737476E9DB03}"/>
+                <a16:creationId xmlns:a16="http://schemas.microsoft.com/office/drawing/2014/main" id="{C583FD9A-7486-44C4-A2E6-6C6514D8BC7D}"/>
               </a:ext>
             </a:extLst>
           </p:cNvPr>
@@ -3070,7 +3070,7 @@
           <p:cNvPr id="14" name="practice-circle-2">
             <a:extLst xmlns:a="http://schemas.openxmlformats.org/drawingml/2006/main">
               <a:ext uri="{FF2B5EF4-FFF2-40B4-BE49-F238E27FC236}">
-                <a16:creationId xmlns:a16="http://schemas.microsoft.com/office/drawing/2014/main" id="{C00B8864-1CF8-4187-9D6B-63ADE79A4E47}"/>
+                <a16:creationId xmlns:a16="http://schemas.microsoft.com/office/drawing/2014/main" id="{2A91489F-0A01-41D1-B62D-4DD35095B53F}"/>
               </a:ext>
             </a:extLst>
           </p:cNvPr>
@@ -3103,7 +3103,7 @@
           <p:cNvPr id="15" name="practice-number-2">
             <a:extLst xmlns:a="http://schemas.openxmlformats.org/drawingml/2006/main">
               <a:ext uri="{FF2B5EF4-FFF2-40B4-BE49-F238E27FC236}">
-                <a16:creationId xmlns:a16="http://schemas.microsoft.com/office/drawing/2014/main" id="{2890DB7A-E02C-486E-9BAA-9C0A2889D655}"/>
+                <a16:creationId xmlns:a16="http://schemas.microsoft.com/office/drawing/2014/main" id="{D56991DC-D5E8-423B-A5D2-3BE285BDECBF}"/>
               </a:ext>
             </a:extLst>
           </p:cNvPr>
@@ -3161,7 +3161,7 @@
           <p:cNvPr id="16" name="practice-item-2">
             <a:extLst xmlns:a="http://schemas.openxmlformats.org/drawingml/2006/main">
               <a:ext uri="{FF2B5EF4-FFF2-40B4-BE49-F238E27FC236}">
-                <a16:creationId xmlns:a16="http://schemas.microsoft.com/office/drawing/2014/main" id="{17C3D642-C096-4055-A79A-2CFFD1F99881}"/>
+                <a16:creationId xmlns:a16="http://schemas.microsoft.com/office/drawing/2014/main" id="{0A9EB37A-E61A-4D26-B9BD-33DB3264A327}"/>
               </a:ext>
             </a:extLst>
           </p:cNvPr>
@@ -3223,7 +3223,7 @@
     </p:spTree>
     <p:extLst>
       <p:ext uri="{BB962C8B-B14F-4D97-AF65-F5344CB8AC3E}">
-        <p14:creationId xmlns:p14="http://schemas.microsoft.com/office/powerpoint/2010/main" val="849666053"/>
+        <p14:creationId xmlns:p14="http://schemas.microsoft.com/office/powerpoint/2010/main" val="207085281"/>
       </p:ext>
     </p:extLst>
   </p:cSld>
@@ -3254,7 +3254,7 @@
           <p:cNvPr id="1" name="s11-rule">
             <a:extLst xmlns:a="http://schemas.openxmlformats.org/drawingml/2006/main">
               <a:ext uri="{FF2B5EF4-FFF2-40B4-BE49-F238E27FC236}">
-                <a16:creationId xmlns:a16="http://schemas.microsoft.com/office/drawing/2014/main" id="{141E4C98-90D6-4885-B3C5-994FF24DEB4A}"/>
+                <a16:creationId xmlns:a16="http://schemas.microsoft.com/office/drawing/2014/main" id="{CF1D5B19-29E5-405F-A256-3BF954AE65FB}"/>
               </a:ext>
             </a:extLst>
           </p:cNvPr>
@@ -3287,7 +3287,7 @@
           <p:cNvPr id="2" name="s11-eyebrow">
             <a:extLst xmlns:a="http://schemas.openxmlformats.org/drawingml/2006/main">
               <a:ext uri="{FF2B5EF4-FFF2-40B4-BE49-F238E27FC236}">
-                <a16:creationId xmlns:a16="http://schemas.microsoft.com/office/drawing/2014/main" id="{CC0F26C4-7017-40EC-A7EE-EE26A6D9B32B}"/>
+                <a16:creationId xmlns:a16="http://schemas.microsoft.com/office/drawing/2014/main" id="{2452EA0A-1A91-4A3E-9F5B-4A7526962E00}"/>
               </a:ext>
             </a:extLst>
           </p:cNvPr>
@@ -3345,7 +3345,7 @@
           <p:cNvPr id="3" name="s11-title">
             <a:extLst xmlns:a="http://schemas.openxmlformats.org/drawingml/2006/main">
               <a:ext uri="{FF2B5EF4-FFF2-40B4-BE49-F238E27FC236}">
-                <a16:creationId xmlns:a16="http://schemas.microsoft.com/office/drawing/2014/main" id="{5CCBEB42-7131-494B-94B2-1CD3B927A427}"/>
+                <a16:creationId xmlns:a16="http://schemas.microsoft.com/office/drawing/2014/main" id="{E028B85C-0AD4-4D14-AD81-636E18727657}"/>
               </a:ext>
             </a:extLst>
           </p:cNvPr>
@@ -3403,7 +3403,7 @@
           <p:cNvPr id="4" name="s11-footer">
             <a:extLst xmlns:a="http://schemas.openxmlformats.org/drawingml/2006/main">
               <a:ext uri="{FF2B5EF4-FFF2-40B4-BE49-F238E27FC236}">
-                <a16:creationId xmlns:a16="http://schemas.microsoft.com/office/drawing/2014/main" id="{9AF4E53C-0532-4DE6-9BF0-391E6113D919}"/>
+                <a16:creationId xmlns:a16="http://schemas.microsoft.com/office/drawing/2014/main" id="{C995FC8A-8387-48A7-9ADC-7F649C11B289}"/>
               </a:ext>
             </a:extLst>
           </p:cNvPr>
@@ -3434,7 +3434,7 @@
           <p:cNvPr id="5" name="s11-identity">
             <a:extLst xmlns:a="http://schemas.openxmlformats.org/drawingml/2006/main">
               <a:ext uri="{FF2B5EF4-FFF2-40B4-BE49-F238E27FC236}">
-                <a16:creationId xmlns:a16="http://schemas.microsoft.com/office/drawing/2014/main" id="{46A9CCFD-1C5A-4EB0-AF48-4D4A71F3D0A6}"/>
+                <a16:creationId xmlns:a16="http://schemas.microsoft.com/office/drawing/2014/main" id="{1E3A0C56-B429-457C-851C-81C846625EB1}"/>
               </a:ext>
             </a:extLst>
           </p:cNvPr>
@@ -3492,7 +3492,7 @@
           <p:cNvPr id="6" name="recap-circle-0">
             <a:extLst xmlns:a="http://schemas.openxmlformats.org/drawingml/2006/main">
               <a:ext uri="{FF2B5EF4-FFF2-40B4-BE49-F238E27FC236}">
-                <a16:creationId xmlns:a16="http://schemas.microsoft.com/office/drawing/2014/main" id="{D4B5EA0B-B542-4191-92AF-E4983B8867AB}"/>
+                <a16:creationId xmlns:a16="http://schemas.microsoft.com/office/drawing/2014/main" id="{C64D8F5A-A9C6-4303-8A1B-D06A106E319B}"/>
               </a:ext>
             </a:extLst>
           </p:cNvPr>
@@ -3525,7 +3525,7 @@
           <p:cNvPr id="7" name="recap-number-0">
             <a:extLst xmlns:a="http://schemas.openxmlformats.org/drawingml/2006/main">
               <a:ext uri="{FF2B5EF4-FFF2-40B4-BE49-F238E27FC236}">
-                <a16:creationId xmlns:a16="http://schemas.microsoft.com/office/drawing/2014/main" id="{BEE4CBD5-9371-4A04-898B-32EC4C6CAD1B}"/>
+                <a16:creationId xmlns:a16="http://schemas.microsoft.com/office/drawing/2014/main" id="{69496E10-F891-4DC1-85E7-452A349E8C45}"/>
               </a:ext>
             </a:extLst>
           </p:cNvPr>
@@ -3583,7 +3583,7 @@
           <p:cNvPr id="8" name="recap-item-0">
             <a:extLst xmlns:a="http://schemas.openxmlformats.org/drawingml/2006/main">
               <a:ext uri="{FF2B5EF4-FFF2-40B4-BE49-F238E27FC236}">
-                <a16:creationId xmlns:a16="http://schemas.microsoft.com/office/drawing/2014/main" id="{B4AC4BB1-7501-4EB6-B26B-FC42CC6622C5}"/>
+                <a16:creationId xmlns:a16="http://schemas.microsoft.com/office/drawing/2014/main" id="{1B5A2333-9030-42DC-851A-547B85EC1BEF}"/>
               </a:ext>
             </a:extLst>
           </p:cNvPr>
@@ -3647,7 +3647,7 @@
           <p:cNvPr id="9" name="recap-connector-0">
             <a:extLst xmlns:a="http://schemas.openxmlformats.org/drawingml/2006/main">
               <a:ext uri="{FF2B5EF4-FFF2-40B4-BE49-F238E27FC236}">
-                <a16:creationId xmlns:a16="http://schemas.microsoft.com/office/drawing/2014/main" id="{E8E272C5-D5C0-42BF-ABC2-1CE01430F416}"/>
+                <a16:creationId xmlns:a16="http://schemas.microsoft.com/office/drawing/2014/main" id="{1CB0C3F3-11DE-4248-993C-521C28E5A085}"/>
               </a:ext>
             </a:extLst>
           </p:cNvPr>
@@ -3678,7 +3678,7 @@
           <p:cNvPr id="10" name="recap-circle-1">
             <a:extLst xmlns:a="http://schemas.openxmlformats.org/drawingml/2006/main">
               <a:ext uri="{FF2B5EF4-FFF2-40B4-BE49-F238E27FC236}">
-                <a16:creationId xmlns:a16="http://schemas.microsoft.com/office/drawing/2014/main" id="{7DACF29C-5FCE-4F20-A8D2-33588D6249D6}"/>
+                <a16:creationId xmlns:a16="http://schemas.microsoft.com/office/drawing/2014/main" id="{B34D53AE-C110-41DA-BB4F-E7919CC0406F}"/>
               </a:ext>
             </a:extLst>
           </p:cNvPr>
@@ -3711,7 +3711,7 @@
           <p:cNvPr id="11" name="recap-number-1">
             <a:extLst xmlns:a="http://schemas.openxmlformats.org/drawingml/2006/main">
               <a:ext uri="{FF2B5EF4-FFF2-40B4-BE49-F238E27FC236}">
-                <a16:creationId xmlns:a16="http://schemas.microsoft.com/office/drawing/2014/main" id="{B5F4F76B-0783-4D19-8192-7D029B48648E}"/>
+                <a16:creationId xmlns:a16="http://schemas.microsoft.com/office/drawing/2014/main" id="{E6587CF6-DAFF-4346-A990-79F09B95D36F}"/>
               </a:ext>
             </a:extLst>
           </p:cNvPr>
@@ -3769,7 +3769,7 @@
           <p:cNvPr id="12" name="recap-item-1">
             <a:extLst xmlns:a="http://schemas.openxmlformats.org/drawingml/2006/main">
               <a:ext uri="{FF2B5EF4-FFF2-40B4-BE49-F238E27FC236}">
-                <a16:creationId xmlns:a16="http://schemas.microsoft.com/office/drawing/2014/main" id="{91EDDD70-B15A-4C36-825C-243B8DF136D2}"/>
+                <a16:creationId xmlns:a16="http://schemas.microsoft.com/office/drawing/2014/main" id="{DD639E78-D895-404A-9486-54FD4193FC01}"/>
               </a:ext>
             </a:extLst>
           </p:cNvPr>
@@ -3833,7 +3833,7 @@
           <p:cNvPr id="13" name="recap-connector-1">
             <a:extLst xmlns:a="http://schemas.openxmlformats.org/drawingml/2006/main">
               <a:ext uri="{FF2B5EF4-FFF2-40B4-BE49-F238E27FC236}">
-                <a16:creationId xmlns:a16="http://schemas.microsoft.com/office/drawing/2014/main" id="{1E84FD0B-03FB-4FAC-8BB4-2F6BBA74C68A}"/>
+                <a16:creationId xmlns:a16="http://schemas.microsoft.com/office/drawing/2014/main" id="{38DD2DBF-019C-4CCC-8F10-C752BA8849B1}"/>
               </a:ext>
             </a:extLst>
           </p:cNvPr>
@@ -3864,7 +3864,7 @@
           <p:cNvPr id="14" name="recap-circle-2">
             <a:extLst xmlns:a="http://schemas.openxmlformats.org/drawingml/2006/main">
               <a:ext uri="{FF2B5EF4-FFF2-40B4-BE49-F238E27FC236}">
-                <a16:creationId xmlns:a16="http://schemas.microsoft.com/office/drawing/2014/main" id="{56F1B571-D46A-49AF-8650-3F60705C4F58}"/>
+                <a16:creationId xmlns:a16="http://schemas.microsoft.com/office/drawing/2014/main" id="{011B4C50-9662-42A4-8751-33594A062188}"/>
               </a:ext>
             </a:extLst>
           </p:cNvPr>
@@ -3897,7 +3897,7 @@
           <p:cNvPr id="15" name="recap-number-2">
             <a:extLst xmlns:a="http://schemas.openxmlformats.org/drawingml/2006/main">
               <a:ext uri="{FF2B5EF4-FFF2-40B4-BE49-F238E27FC236}">
-                <a16:creationId xmlns:a16="http://schemas.microsoft.com/office/drawing/2014/main" id="{BF0DE1BA-4885-4454-9F9C-A5FF60796F93}"/>
+                <a16:creationId xmlns:a16="http://schemas.microsoft.com/office/drawing/2014/main" id="{287C3B97-75AD-4B82-8186-D6132F14274E}"/>
               </a:ext>
             </a:extLst>
           </p:cNvPr>
@@ -3955,7 +3955,7 @@
           <p:cNvPr id="16" name="recap-item-2">
             <a:extLst xmlns:a="http://schemas.openxmlformats.org/drawingml/2006/main">
               <a:ext uri="{FF2B5EF4-FFF2-40B4-BE49-F238E27FC236}">
-                <a16:creationId xmlns:a16="http://schemas.microsoft.com/office/drawing/2014/main" id="{F816D740-ECA5-4E9D-8C71-B6A87FA405BE}"/>
+                <a16:creationId xmlns:a16="http://schemas.microsoft.com/office/drawing/2014/main" id="{244BB2D5-A669-4202-A5A1-269C754F29A4}"/>
               </a:ext>
             </a:extLst>
           </p:cNvPr>
@@ -4017,7 +4017,7 @@
     </p:spTree>
     <p:extLst>
       <p:ext uri="{BB962C8B-B14F-4D97-AF65-F5344CB8AC3E}">
-        <p14:creationId xmlns:p14="http://schemas.microsoft.com/office/powerpoint/2010/main" val="464384185"/>
+        <p14:creationId xmlns:p14="http://schemas.microsoft.com/office/powerpoint/2010/main" val="925226180"/>
       </p:ext>
     </p:extLst>
   </p:cSld>
@@ -4048,7 +4048,7 @@
           <p:cNvPr id="1" name="s12-rule">
             <a:extLst xmlns:a="http://schemas.openxmlformats.org/drawingml/2006/main">
               <a:ext uri="{FF2B5EF4-FFF2-40B4-BE49-F238E27FC236}">
-                <a16:creationId xmlns:a16="http://schemas.microsoft.com/office/drawing/2014/main" id="{98E25897-0B60-457F-92BB-51E296316DE8}"/>
+                <a16:creationId xmlns:a16="http://schemas.microsoft.com/office/drawing/2014/main" id="{36EADBEF-2C12-46E2-A47E-9118B03D937B}"/>
               </a:ext>
             </a:extLst>
           </p:cNvPr>
@@ -4081,7 +4081,7 @@
           <p:cNvPr id="2" name="s12-eyebrow">
             <a:extLst xmlns:a="http://schemas.openxmlformats.org/drawingml/2006/main">
               <a:ext uri="{FF2B5EF4-FFF2-40B4-BE49-F238E27FC236}">
-                <a16:creationId xmlns:a16="http://schemas.microsoft.com/office/drawing/2014/main" id="{BAD312A0-88CC-4E33-B5CD-32EE92B9FBDC}"/>
+                <a16:creationId xmlns:a16="http://schemas.microsoft.com/office/drawing/2014/main" id="{A8D3AB80-9351-4A1B-8B8F-3D936C6F1780}"/>
               </a:ext>
             </a:extLst>
           </p:cNvPr>
@@ -4139,7 +4139,7 @@
           <p:cNvPr id="3" name="s12-title">
             <a:extLst xmlns:a="http://schemas.openxmlformats.org/drawingml/2006/main">
               <a:ext uri="{FF2B5EF4-FFF2-40B4-BE49-F238E27FC236}">
-                <a16:creationId xmlns:a16="http://schemas.microsoft.com/office/drawing/2014/main" id="{B984C188-921F-47F4-AE8C-7E332531B742}"/>
+                <a16:creationId xmlns:a16="http://schemas.microsoft.com/office/drawing/2014/main" id="{93081A2C-5BBA-4FBC-93A0-A954257B215F}"/>
               </a:ext>
             </a:extLst>
           </p:cNvPr>
@@ -4197,7 +4197,7 @@
           <p:cNvPr id="4" name="s12-footer">
             <a:extLst xmlns:a="http://schemas.openxmlformats.org/drawingml/2006/main">
               <a:ext uri="{FF2B5EF4-FFF2-40B4-BE49-F238E27FC236}">
-                <a16:creationId xmlns:a16="http://schemas.microsoft.com/office/drawing/2014/main" id="{915CD8B9-5A49-4A11-A586-715882AAAF51}"/>
+                <a16:creationId xmlns:a16="http://schemas.microsoft.com/office/drawing/2014/main" id="{620FD1BA-5A4B-427B-BFCC-8BD4D8E2F840}"/>
               </a:ext>
             </a:extLst>
           </p:cNvPr>
@@ -4228,7 +4228,7 @@
           <p:cNvPr id="5" name="s12-identity">
             <a:extLst xmlns:a="http://schemas.openxmlformats.org/drawingml/2006/main">
               <a:ext uri="{FF2B5EF4-FFF2-40B4-BE49-F238E27FC236}">
-                <a16:creationId xmlns:a16="http://schemas.microsoft.com/office/drawing/2014/main" id="{F56E1561-F133-4E72-A163-CCF374003D95}"/>
+                <a16:creationId xmlns:a16="http://schemas.microsoft.com/office/drawing/2014/main" id="{CE232F0B-4BDF-42A9-B645-12AE3D35D5BD}"/>
               </a:ext>
             </a:extLst>
           </p:cNvPr>
@@ -4286,7 +4286,7 @@
           <p:cNvPr id="6" name="source-0">
             <a:extLst xmlns:a="http://schemas.openxmlformats.org/drawingml/2006/main">
               <a:ext uri="{FF2B5EF4-FFF2-40B4-BE49-F238E27FC236}">
-                <a16:creationId xmlns:a16="http://schemas.microsoft.com/office/drawing/2014/main" id="{C8B23F59-2316-4EEB-9C60-EA7B73A9E776}"/>
+                <a16:creationId xmlns:a16="http://schemas.microsoft.com/office/drawing/2014/main" id="{AF667BEF-B53D-4ED2-9185-84215096337E}"/>
               </a:ext>
             </a:extLst>
           </p:cNvPr>
@@ -4350,7 +4350,7 @@
           <p:cNvPr id="7" name="source-1">
             <a:extLst xmlns:a="http://schemas.openxmlformats.org/drawingml/2006/main">
               <a:ext uri="{FF2B5EF4-FFF2-40B4-BE49-F238E27FC236}">
-                <a16:creationId xmlns:a16="http://schemas.microsoft.com/office/drawing/2014/main" id="{821CFE57-BF6C-418C-B5BA-A67CA9E997EA}"/>
+                <a16:creationId xmlns:a16="http://schemas.microsoft.com/office/drawing/2014/main" id="{B1559D4B-5E92-45C7-83FD-ED0FD59619CE}"/>
               </a:ext>
             </a:extLst>
           </p:cNvPr>
@@ -4414,7 +4414,7 @@
           <p:cNvPr id="8" name="s12-takeaway-rule">
             <a:extLst xmlns:a="http://schemas.openxmlformats.org/drawingml/2006/main">
               <a:ext uri="{FF2B5EF4-FFF2-40B4-BE49-F238E27FC236}">
-                <a16:creationId xmlns:a16="http://schemas.microsoft.com/office/drawing/2014/main" id="{95530A12-7546-423E-A1C8-AA918A3C7B7D}"/>
+                <a16:creationId xmlns:a16="http://schemas.microsoft.com/office/drawing/2014/main" id="{614E7B83-01B7-41F5-A87C-34258B5C34C1}"/>
               </a:ext>
             </a:extLst>
           </p:cNvPr>
@@ -4447,7 +4447,7 @@
           <p:cNvPr id="9" name="s12-takeaway">
             <a:extLst xmlns:a="http://schemas.openxmlformats.org/drawingml/2006/main">
               <a:ext uri="{FF2B5EF4-FFF2-40B4-BE49-F238E27FC236}">
-                <a16:creationId xmlns:a16="http://schemas.microsoft.com/office/drawing/2014/main" id="{63DF72B3-C9C1-4040-923D-64BE4414C311}"/>
+                <a16:creationId xmlns:a16="http://schemas.microsoft.com/office/drawing/2014/main" id="{7049D9C8-8D42-482E-AA15-762D74FE4327}"/>
               </a:ext>
             </a:extLst>
           </p:cNvPr>
@@ -4472,7 +4472,7 @@
         </p:spPr>
         <p:txBody>
           <a:bodyPr xmlns:a="http://schemas.openxmlformats.org/drawingml/2006/main" lIns="0" tIns="0" rIns="0" bIns="0" anchor="ctr">
-            <a:normAutofit fontScale="100000"/>
+            <a:normAutofit fontScale="95911"/>
           </a:bodyPr>
           <a:lstStyle xmlns:a="http://schemas.openxmlformats.org/drawingml/2006/main"/>
           <a:p xmlns:a="http://schemas.openxmlformats.org/drawingml/2006/main">
@@ -4495,7 +4495,7 @@
                 <a:ea typeface="PingFang SC"/>
                 <a:cs typeface="PingFang SC"/>
               </a:rPr>
-              <a:t>公开幻灯片只使用课程原创文字与原生图形；完整论证、链接和事实边界请见本节讲义。</a:t>
+              <a:t>课程精编页用于讲授主线；播放器中的“原课件”模式保留团队 PowerPoint 精选页、真实图片和可播放视频。</a:t>
             </a:r>
           </a:p>
         </p:txBody>
@@ -4503,7 +4503,7 @@
     </p:spTree>
     <p:extLst>
       <p:ext uri="{BB962C8B-B14F-4D97-AF65-F5344CB8AC3E}">
-        <p14:creationId xmlns:p14="http://schemas.microsoft.com/office/powerpoint/2010/main" val="1057435235"/>
+        <p14:creationId xmlns:p14="http://schemas.microsoft.com/office/powerpoint/2010/main" val="598361321"/>
       </p:ext>
     </p:extLst>
   </p:cSld>
@@ -4534,7 +4534,7 @@
           <p:cNvPr id="1" name="s2-rule">
             <a:extLst xmlns:a="http://schemas.openxmlformats.org/drawingml/2006/main">
               <a:ext uri="{FF2B5EF4-FFF2-40B4-BE49-F238E27FC236}">
-                <a16:creationId xmlns:a16="http://schemas.microsoft.com/office/drawing/2014/main" id="{99AAB406-6FC9-4409-A06C-86194C181A33}"/>
+                <a16:creationId xmlns:a16="http://schemas.microsoft.com/office/drawing/2014/main" id="{ACE4CEEA-1814-427F-8BED-AC981EA1BFD7}"/>
               </a:ext>
             </a:extLst>
           </p:cNvPr>
@@ -4567,7 +4567,7 @@
           <p:cNvPr id="2" name="s2-eyebrow">
             <a:extLst xmlns:a="http://schemas.openxmlformats.org/drawingml/2006/main">
               <a:ext uri="{FF2B5EF4-FFF2-40B4-BE49-F238E27FC236}">
-                <a16:creationId xmlns:a16="http://schemas.microsoft.com/office/drawing/2014/main" id="{67A338B8-B26B-4A54-A492-7C1029557070}"/>
+                <a16:creationId xmlns:a16="http://schemas.microsoft.com/office/drawing/2014/main" id="{57015DFC-CD7D-41CF-81A8-9CFDF983A8EC}"/>
               </a:ext>
             </a:extLst>
           </p:cNvPr>
@@ -4625,7 +4625,7 @@
           <p:cNvPr id="3" name="s2-title">
             <a:extLst xmlns:a="http://schemas.openxmlformats.org/drawingml/2006/main">
               <a:ext uri="{FF2B5EF4-FFF2-40B4-BE49-F238E27FC236}">
-                <a16:creationId xmlns:a16="http://schemas.microsoft.com/office/drawing/2014/main" id="{EA14A013-DCA9-4926-8F76-C0EE28C3B160}"/>
+                <a16:creationId xmlns:a16="http://schemas.microsoft.com/office/drawing/2014/main" id="{FD10F263-B80F-4375-86FF-5F13E2A92F58}"/>
               </a:ext>
             </a:extLst>
           </p:cNvPr>
@@ -4683,7 +4683,7 @@
           <p:cNvPr id="4" name="s2-footer">
             <a:extLst xmlns:a="http://schemas.openxmlformats.org/drawingml/2006/main">
               <a:ext uri="{FF2B5EF4-FFF2-40B4-BE49-F238E27FC236}">
-                <a16:creationId xmlns:a16="http://schemas.microsoft.com/office/drawing/2014/main" id="{451BE452-AB4D-47CF-912F-E7815E5414BD}"/>
+                <a16:creationId xmlns:a16="http://schemas.microsoft.com/office/drawing/2014/main" id="{B00B6118-4BAC-4510-AEC4-B49181853C01}"/>
               </a:ext>
             </a:extLst>
           </p:cNvPr>
@@ -4714,7 +4714,7 @@
           <p:cNvPr id="5" name="s2-identity">
             <a:extLst xmlns:a="http://schemas.openxmlformats.org/drawingml/2006/main">
               <a:ext uri="{FF2B5EF4-FFF2-40B4-BE49-F238E27FC236}">
-                <a16:creationId xmlns:a16="http://schemas.microsoft.com/office/drawing/2014/main" id="{607C0E30-1D53-4AB9-86E7-2D7EF2F9B17A}"/>
+                <a16:creationId xmlns:a16="http://schemas.microsoft.com/office/drawing/2014/main" id="{71F8A0E4-615F-4628-A8AA-0E1A1A9568E9}"/>
               </a:ext>
             </a:extLst>
           </p:cNvPr>
@@ -4772,7 +4772,7 @@
           <p:cNvPr id="6" name="objective-1">
             <a:extLst xmlns:a="http://schemas.openxmlformats.org/drawingml/2006/main">
               <a:ext uri="{FF2B5EF4-FFF2-40B4-BE49-F238E27FC236}">
-                <a16:creationId xmlns:a16="http://schemas.microsoft.com/office/drawing/2014/main" id="{8E24151E-FFC4-467E-BE82-BE31E223103F}"/>
+                <a16:creationId xmlns:a16="http://schemas.microsoft.com/office/drawing/2014/main" id="{A1CCBEE5-97E5-4E67-8224-9A86424B345F}"/>
               </a:ext>
             </a:extLst>
           </p:cNvPr>
@@ -4859,7 +4859,7 @@
           <p:cNvPr id="7" name="objective-2">
             <a:extLst xmlns:a="http://schemas.openxmlformats.org/drawingml/2006/main">
               <a:ext uri="{FF2B5EF4-FFF2-40B4-BE49-F238E27FC236}">
-                <a16:creationId xmlns:a16="http://schemas.microsoft.com/office/drawing/2014/main" id="{EA0DE816-FE0D-4630-AEE3-4214F9E8F4C4}"/>
+                <a16:creationId xmlns:a16="http://schemas.microsoft.com/office/drawing/2014/main" id="{6628684B-5609-4796-A4AC-84885387989D}"/>
               </a:ext>
             </a:extLst>
           </p:cNvPr>
@@ -4946,7 +4946,7 @@
           <p:cNvPr id="8" name="objective-3">
             <a:extLst xmlns:a="http://schemas.openxmlformats.org/drawingml/2006/main">
               <a:ext uri="{FF2B5EF4-FFF2-40B4-BE49-F238E27FC236}">
-                <a16:creationId xmlns:a16="http://schemas.microsoft.com/office/drawing/2014/main" id="{252C561A-8B47-40AF-8415-609F23EBE3CC}"/>
+                <a16:creationId xmlns:a16="http://schemas.microsoft.com/office/drawing/2014/main" id="{3F2DEEF4-F199-4D17-BFFF-A9EF021FEA84}"/>
               </a:ext>
             </a:extLst>
           </p:cNvPr>
@@ -5033,7 +5033,7 @@
           <p:cNvPr id="9" name="objective-4">
             <a:extLst xmlns:a="http://schemas.openxmlformats.org/drawingml/2006/main">
               <a:ext uri="{FF2B5EF4-FFF2-40B4-BE49-F238E27FC236}">
-                <a16:creationId xmlns:a16="http://schemas.microsoft.com/office/drawing/2014/main" id="{48597D96-F201-457E-92C9-9CF4F9FAAA47}"/>
+                <a16:creationId xmlns:a16="http://schemas.microsoft.com/office/drawing/2014/main" id="{8C30C5EB-A2D8-4ABA-9DF4-789942AA2BBE}"/>
               </a:ext>
             </a:extLst>
           </p:cNvPr>
@@ -5118,7 +5118,7 @@
     </p:spTree>
     <p:extLst>
       <p:ext uri="{BB962C8B-B14F-4D97-AF65-F5344CB8AC3E}">
-        <p14:creationId xmlns:p14="http://schemas.microsoft.com/office/powerpoint/2010/main" val="1519531231"/>
+        <p14:creationId xmlns:p14="http://schemas.microsoft.com/office/powerpoint/2010/main" val="1026679667"/>
       </p:ext>
     </p:extLst>
   </p:cSld>
@@ -5149,7 +5149,7 @@
           <p:cNvPr id="1" name="s3-rule">
             <a:extLst xmlns:a="http://schemas.openxmlformats.org/drawingml/2006/main">
               <a:ext uri="{FF2B5EF4-FFF2-40B4-BE49-F238E27FC236}">
-                <a16:creationId xmlns:a16="http://schemas.microsoft.com/office/drawing/2014/main" id="{A503BA20-8230-4A05-BB3A-7370E04E927B}"/>
+                <a16:creationId xmlns:a16="http://schemas.microsoft.com/office/drawing/2014/main" id="{5BDAD293-7434-4812-A90F-7B91837B45E8}"/>
               </a:ext>
             </a:extLst>
           </p:cNvPr>
@@ -5182,7 +5182,7 @@
           <p:cNvPr id="2" name="s3-eyebrow">
             <a:extLst xmlns:a="http://schemas.openxmlformats.org/drawingml/2006/main">
               <a:ext uri="{FF2B5EF4-FFF2-40B4-BE49-F238E27FC236}">
-                <a16:creationId xmlns:a16="http://schemas.microsoft.com/office/drawing/2014/main" id="{534E9E8D-2CB6-4D5D-AD83-3B43BF431056}"/>
+                <a16:creationId xmlns:a16="http://schemas.microsoft.com/office/drawing/2014/main" id="{C1D854D4-2E97-48B1-BF07-06A3C911936E}"/>
               </a:ext>
             </a:extLst>
           </p:cNvPr>
@@ -5240,7 +5240,7 @@
           <p:cNvPr id="3" name="s3-title">
             <a:extLst xmlns:a="http://schemas.openxmlformats.org/drawingml/2006/main">
               <a:ext uri="{FF2B5EF4-FFF2-40B4-BE49-F238E27FC236}">
-                <a16:creationId xmlns:a16="http://schemas.microsoft.com/office/drawing/2014/main" id="{DAA988DF-2908-41F3-B7B0-C78377496145}"/>
+                <a16:creationId xmlns:a16="http://schemas.microsoft.com/office/drawing/2014/main" id="{9932E310-63BE-4393-A3ED-D9A4930FD3EB}"/>
               </a:ext>
             </a:extLst>
           </p:cNvPr>
@@ -5298,7 +5298,7 @@
           <p:cNvPr id="4" name="s3-footer">
             <a:extLst xmlns:a="http://schemas.openxmlformats.org/drawingml/2006/main">
               <a:ext uri="{FF2B5EF4-FFF2-40B4-BE49-F238E27FC236}">
-                <a16:creationId xmlns:a16="http://schemas.microsoft.com/office/drawing/2014/main" id="{D4E2FA7E-DA7C-469C-AA42-80C5513F5932}"/>
+                <a16:creationId xmlns:a16="http://schemas.microsoft.com/office/drawing/2014/main" id="{6DF9B0D8-1CF7-415F-8CA7-8D456ABA9B26}"/>
               </a:ext>
             </a:extLst>
           </p:cNvPr>
@@ -5329,7 +5329,7 @@
           <p:cNvPr id="5" name="s3-identity">
             <a:extLst xmlns:a="http://schemas.openxmlformats.org/drawingml/2006/main">
               <a:ext uri="{FF2B5EF4-FFF2-40B4-BE49-F238E27FC236}">
-                <a16:creationId xmlns:a16="http://schemas.microsoft.com/office/drawing/2014/main" id="{DE67C2D8-089B-4589-B6BB-EDEA646B10AC}"/>
+                <a16:creationId xmlns:a16="http://schemas.microsoft.com/office/drawing/2014/main" id="{414E99C2-D1AE-45D7-9CB8-633F780C5D74}"/>
               </a:ext>
             </a:extLst>
           </p:cNvPr>
@@ -5387,7 +5387,7 @@
           <p:cNvPr id="6" name="core-no-0">
             <a:extLst xmlns:a="http://schemas.openxmlformats.org/drawingml/2006/main">
               <a:ext uri="{FF2B5EF4-FFF2-40B4-BE49-F238E27FC236}">
-                <a16:creationId xmlns:a16="http://schemas.microsoft.com/office/drawing/2014/main" id="{F0022C7B-8325-4F27-8932-D349042DAA2F}"/>
+                <a16:creationId xmlns:a16="http://schemas.microsoft.com/office/drawing/2014/main" id="{3B42EE71-84ED-4423-B0CB-B690ACA04719}"/>
               </a:ext>
             </a:extLst>
           </p:cNvPr>
@@ -5445,7 +5445,7 @@
           <p:cNvPr id="7" name="core-label-0">
             <a:extLst xmlns:a="http://schemas.openxmlformats.org/drawingml/2006/main">
               <a:ext uri="{FF2B5EF4-FFF2-40B4-BE49-F238E27FC236}">
-                <a16:creationId xmlns:a16="http://schemas.microsoft.com/office/drawing/2014/main" id="{04CC274E-C0F6-4F3F-A7C8-70574F6893B1}"/>
+                <a16:creationId xmlns:a16="http://schemas.microsoft.com/office/drawing/2014/main" id="{32E07BE9-29B3-4A08-96CB-44B6EDA458C9}"/>
               </a:ext>
             </a:extLst>
           </p:cNvPr>
@@ -5503,7 +5503,7 @@
           <p:cNvPr id="8" name="core-body-0">
             <a:extLst xmlns:a="http://schemas.openxmlformats.org/drawingml/2006/main">
               <a:ext uri="{FF2B5EF4-FFF2-40B4-BE49-F238E27FC236}">
-                <a16:creationId xmlns:a16="http://schemas.microsoft.com/office/drawing/2014/main" id="{86A48823-F2BF-49B8-B27E-91DA61A836C5}"/>
+                <a16:creationId xmlns:a16="http://schemas.microsoft.com/office/drawing/2014/main" id="{E76520F0-6F1C-4E62-A814-803BF819048D}"/>
               </a:ext>
             </a:extLst>
           </p:cNvPr>
@@ -5567,7 +5567,7 @@
           <p:cNvPr id="9" name="core-no-1">
             <a:extLst xmlns:a="http://schemas.openxmlformats.org/drawingml/2006/main">
               <a:ext uri="{FF2B5EF4-FFF2-40B4-BE49-F238E27FC236}">
-                <a16:creationId xmlns:a16="http://schemas.microsoft.com/office/drawing/2014/main" id="{FCF07C5A-CA93-4CA4-8E47-78C9B225B67E}"/>
+                <a16:creationId xmlns:a16="http://schemas.microsoft.com/office/drawing/2014/main" id="{6E07461D-0123-40BE-8775-1E6367304014}"/>
               </a:ext>
             </a:extLst>
           </p:cNvPr>
@@ -5625,7 +5625,7 @@
           <p:cNvPr id="10" name="core-label-1">
             <a:extLst xmlns:a="http://schemas.openxmlformats.org/drawingml/2006/main">
               <a:ext uri="{FF2B5EF4-FFF2-40B4-BE49-F238E27FC236}">
-                <a16:creationId xmlns:a16="http://schemas.microsoft.com/office/drawing/2014/main" id="{87846B58-F6DB-4FC2-AF60-005BF25F7718}"/>
+                <a16:creationId xmlns:a16="http://schemas.microsoft.com/office/drawing/2014/main" id="{AD416717-39B5-4348-98F5-C67EFA82FF03}"/>
               </a:ext>
             </a:extLst>
           </p:cNvPr>
@@ -5683,7 +5683,7 @@
           <p:cNvPr id="11" name="core-body-1">
             <a:extLst xmlns:a="http://schemas.openxmlformats.org/drawingml/2006/main">
               <a:ext uri="{FF2B5EF4-FFF2-40B4-BE49-F238E27FC236}">
-                <a16:creationId xmlns:a16="http://schemas.microsoft.com/office/drawing/2014/main" id="{88833533-EB26-4654-A3C9-29FE61662BE5}"/>
+                <a16:creationId xmlns:a16="http://schemas.microsoft.com/office/drawing/2014/main" id="{D611430C-D402-49D1-A9D2-790A1B2005E5}"/>
               </a:ext>
             </a:extLst>
           </p:cNvPr>
@@ -5747,7 +5747,7 @@
           <p:cNvPr id="12" name="s3-takeaway-rule">
             <a:extLst xmlns:a="http://schemas.openxmlformats.org/drawingml/2006/main">
               <a:ext uri="{FF2B5EF4-FFF2-40B4-BE49-F238E27FC236}">
-                <a16:creationId xmlns:a16="http://schemas.microsoft.com/office/drawing/2014/main" id="{7E7E798C-4D9B-432D-8845-7F550E349469}"/>
+                <a16:creationId xmlns:a16="http://schemas.microsoft.com/office/drawing/2014/main" id="{C7DE3231-E638-4E2D-AAEC-3BE8C8629B59}"/>
               </a:ext>
             </a:extLst>
           </p:cNvPr>
@@ -5780,7 +5780,7 @@
           <p:cNvPr id="13" name="s3-takeaway">
             <a:extLst xmlns:a="http://schemas.openxmlformats.org/drawingml/2006/main">
               <a:ext uri="{FF2B5EF4-FFF2-40B4-BE49-F238E27FC236}">
-                <a16:creationId xmlns:a16="http://schemas.microsoft.com/office/drawing/2014/main" id="{336AEA5E-7F5F-44FA-9138-976532C53B48}"/>
+                <a16:creationId xmlns:a16="http://schemas.microsoft.com/office/drawing/2014/main" id="{375A9689-B79B-4A44-A8F8-B08DA8DD0ED7}"/>
               </a:ext>
             </a:extLst>
           </p:cNvPr>
@@ -5836,7 +5836,7 @@
     </p:spTree>
     <p:extLst>
       <p:ext uri="{BB962C8B-B14F-4D97-AF65-F5344CB8AC3E}">
-        <p14:creationId xmlns:p14="http://schemas.microsoft.com/office/powerpoint/2010/main" val="18773100"/>
+        <p14:creationId xmlns:p14="http://schemas.microsoft.com/office/powerpoint/2010/main" val="135809739"/>
       </p:ext>
     </p:extLst>
   </p:cSld>
@@ -5867,7 +5867,7 @@
           <p:cNvPr id="1" name="s4-rule">
             <a:extLst xmlns:a="http://schemas.openxmlformats.org/drawingml/2006/main">
               <a:ext uri="{FF2B5EF4-FFF2-40B4-BE49-F238E27FC236}">
-                <a16:creationId xmlns:a16="http://schemas.microsoft.com/office/drawing/2014/main" id="{EAF9B832-2F96-4E24-A312-0F2290BCE6D9}"/>
+                <a16:creationId xmlns:a16="http://schemas.microsoft.com/office/drawing/2014/main" id="{C462D91C-9B6C-4E25-A10B-D2F689AA84E4}"/>
               </a:ext>
             </a:extLst>
           </p:cNvPr>
@@ -5900,7 +5900,7 @@
           <p:cNvPr id="2" name="s4-eyebrow">
             <a:extLst xmlns:a="http://schemas.openxmlformats.org/drawingml/2006/main">
               <a:ext uri="{FF2B5EF4-FFF2-40B4-BE49-F238E27FC236}">
-                <a16:creationId xmlns:a16="http://schemas.microsoft.com/office/drawing/2014/main" id="{4DE94003-8D85-4AE7-A785-7E6B6E097C9A}"/>
+                <a16:creationId xmlns:a16="http://schemas.microsoft.com/office/drawing/2014/main" id="{196DAF58-E981-49AA-9FA9-8E3B9867740A}"/>
               </a:ext>
             </a:extLst>
           </p:cNvPr>
@@ -5958,7 +5958,7 @@
           <p:cNvPr id="3" name="s4-title">
             <a:extLst xmlns:a="http://schemas.openxmlformats.org/drawingml/2006/main">
               <a:ext uri="{FF2B5EF4-FFF2-40B4-BE49-F238E27FC236}">
-                <a16:creationId xmlns:a16="http://schemas.microsoft.com/office/drawing/2014/main" id="{4E0795C4-B7BD-4130-846C-999DAFAE3DEE}"/>
+                <a16:creationId xmlns:a16="http://schemas.microsoft.com/office/drawing/2014/main" id="{B9B7B6A0-451D-4F08-BEC7-6CEE71A5BA15}"/>
               </a:ext>
             </a:extLst>
           </p:cNvPr>
@@ -6016,7 +6016,7 @@
           <p:cNvPr id="4" name="s4-footer">
             <a:extLst xmlns:a="http://schemas.openxmlformats.org/drawingml/2006/main">
               <a:ext uri="{FF2B5EF4-FFF2-40B4-BE49-F238E27FC236}">
-                <a16:creationId xmlns:a16="http://schemas.microsoft.com/office/drawing/2014/main" id="{7C63F040-8573-4622-AD4B-CF30DD3D173B}"/>
+                <a16:creationId xmlns:a16="http://schemas.microsoft.com/office/drawing/2014/main" id="{A62C6112-58BE-4566-9D64-DFBAED37FC2A}"/>
               </a:ext>
             </a:extLst>
           </p:cNvPr>
@@ -6047,7 +6047,7 @@
           <p:cNvPr id="5" name="s4-identity">
             <a:extLst xmlns:a="http://schemas.openxmlformats.org/drawingml/2006/main">
               <a:ext uri="{FF2B5EF4-FFF2-40B4-BE49-F238E27FC236}">
-                <a16:creationId xmlns:a16="http://schemas.microsoft.com/office/drawing/2014/main" id="{86D50794-DDEF-421A-A324-D816550B1600}"/>
+                <a16:creationId xmlns:a16="http://schemas.microsoft.com/office/drawing/2014/main" id="{91168013-A22B-4536-BC92-2216ED8C93B9}"/>
               </a:ext>
             </a:extLst>
           </p:cNvPr>
@@ -6105,7 +6105,7 @@
           <p:cNvPr id="6" name="core-no-0">
             <a:extLst xmlns:a="http://schemas.openxmlformats.org/drawingml/2006/main">
               <a:ext uri="{FF2B5EF4-FFF2-40B4-BE49-F238E27FC236}">
-                <a16:creationId xmlns:a16="http://schemas.microsoft.com/office/drawing/2014/main" id="{3FDD1419-5B5D-402C-9BB8-0500022AA857}"/>
+                <a16:creationId xmlns:a16="http://schemas.microsoft.com/office/drawing/2014/main" id="{64B88FCC-9C6A-4FB2-8A53-D2005CE3D749}"/>
               </a:ext>
             </a:extLst>
           </p:cNvPr>
@@ -6163,7 +6163,7 @@
           <p:cNvPr id="7" name="core-label-0">
             <a:extLst xmlns:a="http://schemas.openxmlformats.org/drawingml/2006/main">
               <a:ext uri="{FF2B5EF4-FFF2-40B4-BE49-F238E27FC236}">
-                <a16:creationId xmlns:a16="http://schemas.microsoft.com/office/drawing/2014/main" id="{93C3B96F-B3D8-4AC9-BC18-A4922021C7B4}"/>
+                <a16:creationId xmlns:a16="http://schemas.microsoft.com/office/drawing/2014/main" id="{49E67794-DF34-4D5C-9480-92C9D68A0176}"/>
               </a:ext>
             </a:extLst>
           </p:cNvPr>
@@ -6221,7 +6221,7 @@
           <p:cNvPr id="8" name="core-body-0">
             <a:extLst xmlns:a="http://schemas.openxmlformats.org/drawingml/2006/main">
               <a:ext uri="{FF2B5EF4-FFF2-40B4-BE49-F238E27FC236}">
-                <a16:creationId xmlns:a16="http://schemas.microsoft.com/office/drawing/2014/main" id="{C6A7D3C9-1A48-4A62-8B8B-985AAB86984E}"/>
+                <a16:creationId xmlns:a16="http://schemas.microsoft.com/office/drawing/2014/main" id="{F5977CD5-52B1-4BFC-B9EE-D4504965D8C1}"/>
               </a:ext>
             </a:extLst>
           </p:cNvPr>
@@ -6285,7 +6285,7 @@
           <p:cNvPr id="9" name="core-no-1">
             <a:extLst xmlns:a="http://schemas.openxmlformats.org/drawingml/2006/main">
               <a:ext uri="{FF2B5EF4-FFF2-40B4-BE49-F238E27FC236}">
-                <a16:creationId xmlns:a16="http://schemas.microsoft.com/office/drawing/2014/main" id="{07CEF786-ED6D-425A-A765-141709397C4A}"/>
+                <a16:creationId xmlns:a16="http://schemas.microsoft.com/office/drawing/2014/main" id="{BCB96CE7-992E-4BF4-88C1-CDCF5031AEA6}"/>
               </a:ext>
             </a:extLst>
           </p:cNvPr>
@@ -6343,7 +6343,7 @@
           <p:cNvPr id="10" name="core-label-1">
             <a:extLst xmlns:a="http://schemas.openxmlformats.org/drawingml/2006/main">
               <a:ext uri="{FF2B5EF4-FFF2-40B4-BE49-F238E27FC236}">
-                <a16:creationId xmlns:a16="http://schemas.microsoft.com/office/drawing/2014/main" id="{45938182-B375-4B57-8F25-79800DD4A95C}"/>
+                <a16:creationId xmlns:a16="http://schemas.microsoft.com/office/drawing/2014/main" id="{D537C291-1F59-437F-8BF7-DAD61DF93BFD}"/>
               </a:ext>
             </a:extLst>
           </p:cNvPr>
@@ -6401,7 +6401,7 @@
           <p:cNvPr id="11" name="core-body-1">
             <a:extLst xmlns:a="http://schemas.openxmlformats.org/drawingml/2006/main">
               <a:ext uri="{FF2B5EF4-FFF2-40B4-BE49-F238E27FC236}">
-                <a16:creationId xmlns:a16="http://schemas.microsoft.com/office/drawing/2014/main" id="{58DE8A22-827A-4818-A5EF-2C3A94A9C132}"/>
+                <a16:creationId xmlns:a16="http://schemas.microsoft.com/office/drawing/2014/main" id="{B73EBF40-D068-4AFF-A24A-FC63491C76C8}"/>
               </a:ext>
             </a:extLst>
           </p:cNvPr>
@@ -6465,7 +6465,7 @@
           <p:cNvPr id="12" name="s4-takeaway-rule">
             <a:extLst xmlns:a="http://schemas.openxmlformats.org/drawingml/2006/main">
               <a:ext uri="{FF2B5EF4-FFF2-40B4-BE49-F238E27FC236}">
-                <a16:creationId xmlns:a16="http://schemas.microsoft.com/office/drawing/2014/main" id="{C7DF97E4-7B2D-498D-BB35-2A0BFFDD41CF}"/>
+                <a16:creationId xmlns:a16="http://schemas.microsoft.com/office/drawing/2014/main" id="{3F3DE70D-61A2-40FA-AE06-47C4C55FCC1E}"/>
               </a:ext>
             </a:extLst>
           </p:cNvPr>
@@ -6498,7 +6498,7 @@
           <p:cNvPr id="13" name="s4-takeaway">
             <a:extLst xmlns:a="http://schemas.openxmlformats.org/drawingml/2006/main">
               <a:ext uri="{FF2B5EF4-FFF2-40B4-BE49-F238E27FC236}">
-                <a16:creationId xmlns:a16="http://schemas.microsoft.com/office/drawing/2014/main" id="{CFB820D7-C630-40A6-8713-B10C2FB6D023}"/>
+                <a16:creationId xmlns:a16="http://schemas.microsoft.com/office/drawing/2014/main" id="{05FB5BEF-B2BB-49DE-ADCE-E58A2C0E323D}"/>
               </a:ext>
             </a:extLst>
           </p:cNvPr>
@@ -6554,7 +6554,7 @@
     </p:spTree>
     <p:extLst>
       <p:ext uri="{BB962C8B-B14F-4D97-AF65-F5344CB8AC3E}">
-        <p14:creationId xmlns:p14="http://schemas.microsoft.com/office/powerpoint/2010/main" val="1304421773"/>
+        <p14:creationId xmlns:p14="http://schemas.microsoft.com/office/powerpoint/2010/main" val="1780789441"/>
       </p:ext>
     </p:extLst>
   </p:cSld>
@@ -6585,7 +6585,7 @@
           <p:cNvPr id="1" name="s5-rule">
             <a:extLst xmlns:a="http://schemas.openxmlformats.org/drawingml/2006/main">
               <a:ext uri="{FF2B5EF4-FFF2-40B4-BE49-F238E27FC236}">
-                <a16:creationId xmlns:a16="http://schemas.microsoft.com/office/drawing/2014/main" id="{0F2CBBA1-90F1-4C51-9676-1AB44E098FDA}"/>
+                <a16:creationId xmlns:a16="http://schemas.microsoft.com/office/drawing/2014/main" id="{15D64B20-EB03-4203-8BF5-4B1D9D8D291F}"/>
               </a:ext>
             </a:extLst>
           </p:cNvPr>
@@ -6618,7 +6618,7 @@
           <p:cNvPr id="2" name="s5-eyebrow">
             <a:extLst xmlns:a="http://schemas.openxmlformats.org/drawingml/2006/main">
               <a:ext uri="{FF2B5EF4-FFF2-40B4-BE49-F238E27FC236}">
-                <a16:creationId xmlns:a16="http://schemas.microsoft.com/office/drawing/2014/main" id="{F6B615FF-EE4D-4BF9-9969-DBFCB575379D}"/>
+                <a16:creationId xmlns:a16="http://schemas.microsoft.com/office/drawing/2014/main" id="{530A8B95-DA16-41C5-BF93-B903D605BE3E}"/>
               </a:ext>
             </a:extLst>
           </p:cNvPr>
@@ -6676,7 +6676,7 @@
           <p:cNvPr id="3" name="s5-title">
             <a:extLst xmlns:a="http://schemas.openxmlformats.org/drawingml/2006/main">
               <a:ext uri="{FF2B5EF4-FFF2-40B4-BE49-F238E27FC236}">
-                <a16:creationId xmlns:a16="http://schemas.microsoft.com/office/drawing/2014/main" id="{08AA5202-E6AF-4CAE-9B70-726DBC216322}"/>
+                <a16:creationId xmlns:a16="http://schemas.microsoft.com/office/drawing/2014/main" id="{E1CFC241-5179-40F0-B10E-CB080CA1FDF7}"/>
               </a:ext>
             </a:extLst>
           </p:cNvPr>
@@ -6734,7 +6734,7 @@
           <p:cNvPr id="4" name="s5-footer">
             <a:extLst xmlns:a="http://schemas.openxmlformats.org/drawingml/2006/main">
               <a:ext uri="{FF2B5EF4-FFF2-40B4-BE49-F238E27FC236}">
-                <a16:creationId xmlns:a16="http://schemas.microsoft.com/office/drawing/2014/main" id="{412CD4D9-538B-45D0-BC6D-E2CD1267D43F}"/>
+                <a16:creationId xmlns:a16="http://schemas.microsoft.com/office/drawing/2014/main" id="{AB8C1097-6FB2-407D-A4A7-813C29EA0EC9}"/>
               </a:ext>
             </a:extLst>
           </p:cNvPr>
@@ -6765,7 +6765,7 @@
           <p:cNvPr id="5" name="s5-identity">
             <a:extLst xmlns:a="http://schemas.openxmlformats.org/drawingml/2006/main">
               <a:ext uri="{FF2B5EF4-FFF2-40B4-BE49-F238E27FC236}">
-                <a16:creationId xmlns:a16="http://schemas.microsoft.com/office/drawing/2014/main" id="{9F694A78-736D-4063-8831-34D9F9350ED8}"/>
+                <a16:creationId xmlns:a16="http://schemas.microsoft.com/office/drawing/2014/main" id="{236C9A6E-0322-45F8-ACB6-A9C4A201BC30}"/>
               </a:ext>
             </a:extLst>
           </p:cNvPr>
@@ -6823,7 +6823,7 @@
           <p:cNvPr id="6" name="core-no-0">
             <a:extLst xmlns:a="http://schemas.openxmlformats.org/drawingml/2006/main">
               <a:ext uri="{FF2B5EF4-FFF2-40B4-BE49-F238E27FC236}">
-                <a16:creationId xmlns:a16="http://schemas.microsoft.com/office/drawing/2014/main" id="{3A0CC34A-A788-45B6-9AAA-D480E7FD8A75}"/>
+                <a16:creationId xmlns:a16="http://schemas.microsoft.com/office/drawing/2014/main" id="{451FCD2F-FE43-4FE8-A9AF-4D34DD23D07C}"/>
               </a:ext>
             </a:extLst>
           </p:cNvPr>
@@ -6881,7 +6881,7 @@
           <p:cNvPr id="7" name="core-label-0">
             <a:extLst xmlns:a="http://schemas.openxmlformats.org/drawingml/2006/main">
               <a:ext uri="{FF2B5EF4-FFF2-40B4-BE49-F238E27FC236}">
-                <a16:creationId xmlns:a16="http://schemas.microsoft.com/office/drawing/2014/main" id="{8C906C4D-3EC7-4045-B70A-9176B0ED3436}"/>
+                <a16:creationId xmlns:a16="http://schemas.microsoft.com/office/drawing/2014/main" id="{87230F52-1CF5-4965-9CD8-654F83ECFDEF}"/>
               </a:ext>
             </a:extLst>
           </p:cNvPr>
@@ -6939,7 +6939,7 @@
           <p:cNvPr id="8" name="core-body-0">
             <a:extLst xmlns:a="http://schemas.openxmlformats.org/drawingml/2006/main">
               <a:ext uri="{FF2B5EF4-FFF2-40B4-BE49-F238E27FC236}">
-                <a16:creationId xmlns:a16="http://schemas.microsoft.com/office/drawing/2014/main" id="{4793F151-2C7B-4E58-A8E4-A31D059E4B45}"/>
+                <a16:creationId xmlns:a16="http://schemas.microsoft.com/office/drawing/2014/main" id="{643372C9-B66B-4F7B-8B5C-DE3E6F8D3B61}"/>
               </a:ext>
             </a:extLst>
           </p:cNvPr>
@@ -7003,7 +7003,7 @@
           <p:cNvPr id="9" name="core-no-1">
             <a:extLst xmlns:a="http://schemas.openxmlformats.org/drawingml/2006/main">
               <a:ext uri="{FF2B5EF4-FFF2-40B4-BE49-F238E27FC236}">
-                <a16:creationId xmlns:a16="http://schemas.microsoft.com/office/drawing/2014/main" id="{B58F0341-C6CF-4050-BD35-4AAEA73EBC21}"/>
+                <a16:creationId xmlns:a16="http://schemas.microsoft.com/office/drawing/2014/main" id="{62E90A0C-C10A-45C7-A3F8-940EA8AF7EF9}"/>
               </a:ext>
             </a:extLst>
           </p:cNvPr>
@@ -7061,7 +7061,7 @@
           <p:cNvPr id="10" name="core-body-1">
             <a:extLst xmlns:a="http://schemas.openxmlformats.org/drawingml/2006/main">
               <a:ext uri="{FF2B5EF4-FFF2-40B4-BE49-F238E27FC236}">
-                <a16:creationId xmlns:a16="http://schemas.microsoft.com/office/drawing/2014/main" id="{33672F8F-C642-4EF4-B5B1-15FBDD50487E}"/>
+                <a16:creationId xmlns:a16="http://schemas.microsoft.com/office/drawing/2014/main" id="{E81E6E08-98E3-4517-A62F-685374FE0B5B}"/>
               </a:ext>
             </a:extLst>
           </p:cNvPr>
@@ -7125,7 +7125,7 @@
           <p:cNvPr id="11" name="s5-takeaway-rule">
             <a:extLst xmlns:a="http://schemas.openxmlformats.org/drawingml/2006/main">
               <a:ext uri="{FF2B5EF4-FFF2-40B4-BE49-F238E27FC236}">
-                <a16:creationId xmlns:a16="http://schemas.microsoft.com/office/drawing/2014/main" id="{EF4DDA30-D862-46C1-91D3-0C8FBE03CC00}"/>
+                <a16:creationId xmlns:a16="http://schemas.microsoft.com/office/drawing/2014/main" id="{FCD3830D-49DC-432F-9F61-9E3CE0ABA9A3}"/>
               </a:ext>
             </a:extLst>
           </p:cNvPr>
@@ -7158,7 +7158,7 @@
           <p:cNvPr id="12" name="s5-takeaway">
             <a:extLst xmlns:a="http://schemas.openxmlformats.org/drawingml/2006/main">
               <a:ext uri="{FF2B5EF4-FFF2-40B4-BE49-F238E27FC236}">
-                <a16:creationId xmlns:a16="http://schemas.microsoft.com/office/drawing/2014/main" id="{14A7D312-A944-46CA-BD4B-A756F9FC6E0F}"/>
+                <a16:creationId xmlns:a16="http://schemas.microsoft.com/office/drawing/2014/main" id="{231CF4D3-8244-4EC2-ABB5-898FBFAA5C33}"/>
               </a:ext>
             </a:extLst>
           </p:cNvPr>
@@ -7214,7 +7214,7 @@
     </p:spTree>
     <p:extLst>
       <p:ext uri="{BB962C8B-B14F-4D97-AF65-F5344CB8AC3E}">
-        <p14:creationId xmlns:p14="http://schemas.microsoft.com/office/powerpoint/2010/main" val="25690446"/>
+        <p14:creationId xmlns:p14="http://schemas.microsoft.com/office/powerpoint/2010/main" val="647607438"/>
       </p:ext>
     </p:extLst>
   </p:cSld>
@@ -7245,7 +7245,7 @@
           <p:cNvPr id="1" name="s6-rule">
             <a:extLst xmlns:a="http://schemas.openxmlformats.org/drawingml/2006/main">
               <a:ext uri="{FF2B5EF4-FFF2-40B4-BE49-F238E27FC236}">
-                <a16:creationId xmlns:a16="http://schemas.microsoft.com/office/drawing/2014/main" id="{03261ADA-9B70-474E-BBD4-0836AC4DB791}"/>
+                <a16:creationId xmlns:a16="http://schemas.microsoft.com/office/drawing/2014/main" id="{B89C13FE-2C05-4F0A-908F-1071684F6B0B}"/>
               </a:ext>
             </a:extLst>
           </p:cNvPr>
@@ -7278,7 +7278,7 @@
           <p:cNvPr id="2" name="s6-eyebrow">
             <a:extLst xmlns:a="http://schemas.openxmlformats.org/drawingml/2006/main">
               <a:ext uri="{FF2B5EF4-FFF2-40B4-BE49-F238E27FC236}">
-                <a16:creationId xmlns:a16="http://schemas.microsoft.com/office/drawing/2014/main" id="{B321BB0A-8B57-4FFD-879A-FF87CDF18B09}"/>
+                <a16:creationId xmlns:a16="http://schemas.microsoft.com/office/drawing/2014/main" id="{475CA701-E092-4B50-A8FA-F70E547D18C4}"/>
               </a:ext>
             </a:extLst>
           </p:cNvPr>
@@ -7336,7 +7336,7 @@
           <p:cNvPr id="3" name="s6-title">
             <a:extLst xmlns:a="http://schemas.openxmlformats.org/drawingml/2006/main">
               <a:ext uri="{FF2B5EF4-FFF2-40B4-BE49-F238E27FC236}">
-                <a16:creationId xmlns:a16="http://schemas.microsoft.com/office/drawing/2014/main" id="{B5E5E752-83F0-4E81-81C9-4F6439CD699D}"/>
+                <a16:creationId xmlns:a16="http://schemas.microsoft.com/office/drawing/2014/main" id="{FA3E1D25-85A5-48D5-BA77-8624806DE1EB}"/>
               </a:ext>
             </a:extLst>
           </p:cNvPr>
@@ -7394,7 +7394,7 @@
           <p:cNvPr id="4" name="s6-footer">
             <a:extLst xmlns:a="http://schemas.openxmlformats.org/drawingml/2006/main">
               <a:ext uri="{FF2B5EF4-FFF2-40B4-BE49-F238E27FC236}">
-                <a16:creationId xmlns:a16="http://schemas.microsoft.com/office/drawing/2014/main" id="{31E3930B-99AF-4ED9-8A97-751BA53B0D4C}"/>
+                <a16:creationId xmlns:a16="http://schemas.microsoft.com/office/drawing/2014/main" id="{9C9CBA17-B83B-4307-ACAB-165E7FEE8841}"/>
               </a:ext>
             </a:extLst>
           </p:cNvPr>
@@ -7425,7 +7425,7 @@
           <p:cNvPr id="5" name="s6-identity">
             <a:extLst xmlns:a="http://schemas.openxmlformats.org/drawingml/2006/main">
               <a:ext uri="{FF2B5EF4-FFF2-40B4-BE49-F238E27FC236}">
-                <a16:creationId xmlns:a16="http://schemas.microsoft.com/office/drawing/2014/main" id="{1C5F1746-7FD9-4E42-9B5B-09C7C92D8D4C}"/>
+                <a16:creationId xmlns:a16="http://schemas.microsoft.com/office/drawing/2014/main" id="{88309D43-5F52-4E81-8D4A-4DCC1CC0E6DB}"/>
               </a:ext>
             </a:extLst>
           </p:cNvPr>
@@ -7483,7 +7483,7 @@
           <p:cNvPr id="6" name="core-no-0">
             <a:extLst xmlns:a="http://schemas.openxmlformats.org/drawingml/2006/main">
               <a:ext uri="{FF2B5EF4-FFF2-40B4-BE49-F238E27FC236}">
-                <a16:creationId xmlns:a16="http://schemas.microsoft.com/office/drawing/2014/main" id="{4C49EC99-4A68-4DF1-A05A-3F8FF0CDD8CB}"/>
+                <a16:creationId xmlns:a16="http://schemas.microsoft.com/office/drawing/2014/main" id="{56895A0A-E98E-44CA-904D-C8AF351F31D8}"/>
               </a:ext>
             </a:extLst>
           </p:cNvPr>
@@ -7541,7 +7541,7 @@
           <p:cNvPr id="7" name="core-label-0">
             <a:extLst xmlns:a="http://schemas.openxmlformats.org/drawingml/2006/main">
               <a:ext uri="{FF2B5EF4-FFF2-40B4-BE49-F238E27FC236}">
-                <a16:creationId xmlns:a16="http://schemas.microsoft.com/office/drawing/2014/main" id="{DBF8A0E5-4C64-47F3-BE38-1DCE73A9A857}"/>
+                <a16:creationId xmlns:a16="http://schemas.microsoft.com/office/drawing/2014/main" id="{65DA03DA-2E4E-423F-8876-0A6AFC51A564}"/>
               </a:ext>
             </a:extLst>
           </p:cNvPr>
@@ -7599,7 +7599,7 @@
           <p:cNvPr id="8" name="core-body-0">
             <a:extLst xmlns:a="http://schemas.openxmlformats.org/drawingml/2006/main">
               <a:ext uri="{FF2B5EF4-FFF2-40B4-BE49-F238E27FC236}">
-                <a16:creationId xmlns:a16="http://schemas.microsoft.com/office/drawing/2014/main" id="{FE3D5FA3-64B9-469F-A184-CC0A1EF4FAEF}"/>
+                <a16:creationId xmlns:a16="http://schemas.microsoft.com/office/drawing/2014/main" id="{FD5CAD14-78A0-49DF-ABA1-844750E804E0}"/>
               </a:ext>
             </a:extLst>
           </p:cNvPr>
@@ -7663,7 +7663,7 @@
           <p:cNvPr id="9" name="core-no-1">
             <a:extLst xmlns:a="http://schemas.openxmlformats.org/drawingml/2006/main">
               <a:ext uri="{FF2B5EF4-FFF2-40B4-BE49-F238E27FC236}">
-                <a16:creationId xmlns:a16="http://schemas.microsoft.com/office/drawing/2014/main" id="{F08CE625-681E-40DC-A6EE-84DB9EBB4640}"/>
+                <a16:creationId xmlns:a16="http://schemas.microsoft.com/office/drawing/2014/main" id="{9F971B15-72B5-4440-B3FC-DA9E047283A5}"/>
               </a:ext>
             </a:extLst>
           </p:cNvPr>
@@ -7721,7 +7721,7 @@
           <p:cNvPr id="10" name="core-body-1">
             <a:extLst xmlns:a="http://schemas.openxmlformats.org/drawingml/2006/main">
               <a:ext uri="{FF2B5EF4-FFF2-40B4-BE49-F238E27FC236}">
-                <a16:creationId xmlns:a16="http://schemas.microsoft.com/office/drawing/2014/main" id="{ACC6C925-0311-4770-A5A3-D8B66D5F2FF0}"/>
+                <a16:creationId xmlns:a16="http://schemas.microsoft.com/office/drawing/2014/main" id="{7D86B024-BD18-478E-A692-1E091D3D8093}"/>
               </a:ext>
             </a:extLst>
           </p:cNvPr>
@@ -7785,7 +7785,7 @@
           <p:cNvPr id="11" name="core-no-2">
             <a:extLst xmlns:a="http://schemas.openxmlformats.org/drawingml/2006/main">
               <a:ext uri="{FF2B5EF4-FFF2-40B4-BE49-F238E27FC236}">
-                <a16:creationId xmlns:a16="http://schemas.microsoft.com/office/drawing/2014/main" id="{6DDB18A4-2BF1-4A0E-BA09-B6E0ED3541AF}"/>
+                <a16:creationId xmlns:a16="http://schemas.microsoft.com/office/drawing/2014/main" id="{CDD040CD-B3BF-48E5-97EA-D609447A2E4B}"/>
               </a:ext>
             </a:extLst>
           </p:cNvPr>
@@ -7843,7 +7843,7 @@
           <p:cNvPr id="12" name="core-body-2">
             <a:extLst xmlns:a="http://schemas.openxmlformats.org/drawingml/2006/main">
               <a:ext uri="{FF2B5EF4-FFF2-40B4-BE49-F238E27FC236}">
-                <a16:creationId xmlns:a16="http://schemas.microsoft.com/office/drawing/2014/main" id="{9CF236FD-5081-4751-AD3D-EE39E2D4C0E2}"/>
+                <a16:creationId xmlns:a16="http://schemas.microsoft.com/office/drawing/2014/main" id="{4753B368-3E81-40ED-970B-8413F0B0C606}"/>
               </a:ext>
             </a:extLst>
           </p:cNvPr>
@@ -7907,7 +7907,7 @@
           <p:cNvPr id="13" name="s6-takeaway-rule">
             <a:extLst xmlns:a="http://schemas.openxmlformats.org/drawingml/2006/main">
               <a:ext uri="{FF2B5EF4-FFF2-40B4-BE49-F238E27FC236}">
-                <a16:creationId xmlns:a16="http://schemas.microsoft.com/office/drawing/2014/main" id="{DCB5F672-77A6-4313-BBE0-58EE31CD8DAD}"/>
+                <a16:creationId xmlns:a16="http://schemas.microsoft.com/office/drawing/2014/main" id="{958D5798-6EAE-4E79-BFE4-9F24C4515EB9}"/>
               </a:ext>
             </a:extLst>
           </p:cNvPr>
@@ -7940,7 +7940,7 @@
           <p:cNvPr id="14" name="s6-takeaway">
             <a:extLst xmlns:a="http://schemas.openxmlformats.org/drawingml/2006/main">
               <a:ext uri="{FF2B5EF4-FFF2-40B4-BE49-F238E27FC236}">
-                <a16:creationId xmlns:a16="http://schemas.microsoft.com/office/drawing/2014/main" id="{B05B7731-4942-4240-91A4-D240B279B964}"/>
+                <a16:creationId xmlns:a16="http://schemas.microsoft.com/office/drawing/2014/main" id="{2812C41E-BE96-4FB2-88A9-BCCF967E69EE}"/>
               </a:ext>
             </a:extLst>
           </p:cNvPr>
@@ -7996,7 +7996,7 @@
     </p:spTree>
     <p:extLst>
       <p:ext uri="{BB962C8B-B14F-4D97-AF65-F5344CB8AC3E}">
-        <p14:creationId xmlns:p14="http://schemas.microsoft.com/office/powerpoint/2010/main" val="806253564"/>
+        <p14:creationId xmlns:p14="http://schemas.microsoft.com/office/powerpoint/2010/main" val="1214345831"/>
       </p:ext>
     </p:extLst>
   </p:cSld>
@@ -8027,7 +8027,7 @@
           <p:cNvPr id="1" name="s7-rule">
             <a:extLst xmlns:a="http://schemas.openxmlformats.org/drawingml/2006/main">
               <a:ext uri="{FF2B5EF4-FFF2-40B4-BE49-F238E27FC236}">
-                <a16:creationId xmlns:a16="http://schemas.microsoft.com/office/drawing/2014/main" id="{2720C2B0-36D9-44F2-A109-81C928F60FDC}"/>
+                <a16:creationId xmlns:a16="http://schemas.microsoft.com/office/drawing/2014/main" id="{D7F76C75-6852-4EC2-8A6D-B2EC31BD2DCC}"/>
               </a:ext>
             </a:extLst>
           </p:cNvPr>
@@ -8060,7 +8060,7 @@
           <p:cNvPr id="2" name="s7-eyebrow">
             <a:extLst xmlns:a="http://schemas.openxmlformats.org/drawingml/2006/main">
               <a:ext uri="{FF2B5EF4-FFF2-40B4-BE49-F238E27FC236}">
-                <a16:creationId xmlns:a16="http://schemas.microsoft.com/office/drawing/2014/main" id="{1317BEFD-097A-49C7-BD18-82015EEBEDD4}"/>
+                <a16:creationId xmlns:a16="http://schemas.microsoft.com/office/drawing/2014/main" id="{E4A2C3D5-C76C-4AE3-9692-1FF94CFEFD09}"/>
               </a:ext>
             </a:extLst>
           </p:cNvPr>
@@ -8118,7 +8118,7 @@
           <p:cNvPr id="3" name="s7-title">
             <a:extLst xmlns:a="http://schemas.openxmlformats.org/drawingml/2006/main">
               <a:ext uri="{FF2B5EF4-FFF2-40B4-BE49-F238E27FC236}">
-                <a16:creationId xmlns:a16="http://schemas.microsoft.com/office/drawing/2014/main" id="{FCE7F841-A406-4DD6-ADE8-90B50B9BC167}"/>
+                <a16:creationId xmlns:a16="http://schemas.microsoft.com/office/drawing/2014/main" id="{2A9DED01-2C45-4E9D-A86C-DCF2AD505687}"/>
               </a:ext>
             </a:extLst>
           </p:cNvPr>
@@ -8176,7 +8176,7 @@
           <p:cNvPr id="4" name="s7-footer">
             <a:extLst xmlns:a="http://schemas.openxmlformats.org/drawingml/2006/main">
               <a:ext uri="{FF2B5EF4-FFF2-40B4-BE49-F238E27FC236}">
-                <a16:creationId xmlns:a16="http://schemas.microsoft.com/office/drawing/2014/main" id="{E129AD2B-81DB-40B8-A411-FC7AB686617B}"/>
+                <a16:creationId xmlns:a16="http://schemas.microsoft.com/office/drawing/2014/main" id="{E45CED33-ACD8-452C-8361-7524E61C5127}"/>
               </a:ext>
             </a:extLst>
           </p:cNvPr>
@@ -8207,7 +8207,7 @@
           <p:cNvPr id="5" name="s7-identity">
             <a:extLst xmlns:a="http://schemas.openxmlformats.org/drawingml/2006/main">
               <a:ext uri="{FF2B5EF4-FFF2-40B4-BE49-F238E27FC236}">
-                <a16:creationId xmlns:a16="http://schemas.microsoft.com/office/drawing/2014/main" id="{9BFE9D71-CEE5-4A47-9654-DDA28DB1537D}"/>
+                <a16:creationId xmlns:a16="http://schemas.microsoft.com/office/drawing/2014/main" id="{64ED8B03-8C16-4126-9AAA-060A23EBE256}"/>
               </a:ext>
             </a:extLst>
           </p:cNvPr>
@@ -8265,7 +8265,7 @@
           <p:cNvPr id="6" name="core-no-0">
             <a:extLst xmlns:a="http://schemas.openxmlformats.org/drawingml/2006/main">
               <a:ext uri="{FF2B5EF4-FFF2-40B4-BE49-F238E27FC236}">
-                <a16:creationId xmlns:a16="http://schemas.microsoft.com/office/drawing/2014/main" id="{15FD8E0A-BD0B-4B6C-B557-DE59147B0515}"/>
+                <a16:creationId xmlns:a16="http://schemas.microsoft.com/office/drawing/2014/main" id="{789B2881-9EFA-4C9F-B341-632AA5DD06F0}"/>
               </a:ext>
             </a:extLst>
           </p:cNvPr>
@@ -8323,7 +8323,7 @@
           <p:cNvPr id="7" name="core-label-0">
             <a:extLst xmlns:a="http://schemas.openxmlformats.org/drawingml/2006/main">
               <a:ext uri="{FF2B5EF4-FFF2-40B4-BE49-F238E27FC236}">
-                <a16:creationId xmlns:a16="http://schemas.microsoft.com/office/drawing/2014/main" id="{DC5B4E3C-6B82-4000-BD00-807627415A1E}"/>
+                <a16:creationId xmlns:a16="http://schemas.microsoft.com/office/drawing/2014/main" id="{15AAE112-2510-4D78-A288-7EFF5435B2F2}"/>
               </a:ext>
             </a:extLst>
           </p:cNvPr>
@@ -8381,7 +8381,7 @@
           <p:cNvPr id="8" name="core-body-0">
             <a:extLst xmlns:a="http://schemas.openxmlformats.org/drawingml/2006/main">
               <a:ext uri="{FF2B5EF4-FFF2-40B4-BE49-F238E27FC236}">
-                <a16:creationId xmlns:a16="http://schemas.microsoft.com/office/drawing/2014/main" id="{800F7ADC-FC92-4F66-B43D-17985954A165}"/>
+                <a16:creationId xmlns:a16="http://schemas.microsoft.com/office/drawing/2014/main" id="{4B5CE639-F446-42E5-A774-5A9BD8EADBD4}"/>
               </a:ext>
             </a:extLst>
           </p:cNvPr>
@@ -8445,7 +8445,7 @@
           <p:cNvPr id="9" name="core-no-1">
             <a:extLst xmlns:a="http://schemas.openxmlformats.org/drawingml/2006/main">
               <a:ext uri="{FF2B5EF4-FFF2-40B4-BE49-F238E27FC236}">
-                <a16:creationId xmlns:a16="http://schemas.microsoft.com/office/drawing/2014/main" id="{DD75DB41-21F0-4810-B7B4-505CFB67983C}"/>
+                <a16:creationId xmlns:a16="http://schemas.microsoft.com/office/drawing/2014/main" id="{BE12B830-AF8F-4392-BB13-025411436CF0}"/>
               </a:ext>
             </a:extLst>
           </p:cNvPr>
@@ -8503,7 +8503,7 @@
           <p:cNvPr id="10" name="core-body-1">
             <a:extLst xmlns:a="http://schemas.openxmlformats.org/drawingml/2006/main">
               <a:ext uri="{FF2B5EF4-FFF2-40B4-BE49-F238E27FC236}">
-                <a16:creationId xmlns:a16="http://schemas.microsoft.com/office/drawing/2014/main" id="{95ECE830-8808-4CCE-A0AF-92A37EEF5250}"/>
+                <a16:creationId xmlns:a16="http://schemas.microsoft.com/office/drawing/2014/main" id="{A6C44B35-9DE5-43E6-B67A-A41BB8378DD4}"/>
               </a:ext>
             </a:extLst>
           </p:cNvPr>
@@ -8567,7 +8567,7 @@
           <p:cNvPr id="11" name="s7-takeaway-rule">
             <a:extLst xmlns:a="http://schemas.openxmlformats.org/drawingml/2006/main">
               <a:ext uri="{FF2B5EF4-FFF2-40B4-BE49-F238E27FC236}">
-                <a16:creationId xmlns:a16="http://schemas.microsoft.com/office/drawing/2014/main" id="{DB0AAD0C-CBD2-4F45-A48A-8A44DA213D08}"/>
+                <a16:creationId xmlns:a16="http://schemas.microsoft.com/office/drawing/2014/main" id="{F3A71635-1C50-46AF-9440-F1717CF340F7}"/>
               </a:ext>
             </a:extLst>
           </p:cNvPr>
@@ -8600,7 +8600,7 @@
           <p:cNvPr id="12" name="s7-takeaway">
             <a:extLst xmlns:a="http://schemas.openxmlformats.org/drawingml/2006/main">
               <a:ext uri="{FF2B5EF4-FFF2-40B4-BE49-F238E27FC236}">
-                <a16:creationId xmlns:a16="http://schemas.microsoft.com/office/drawing/2014/main" id="{C38D0D5A-4B7C-4DC7-B448-8221FC956C78}"/>
+                <a16:creationId xmlns:a16="http://schemas.microsoft.com/office/drawing/2014/main" id="{896A0C13-F1F3-4EEF-91C0-C33FA23D0569}"/>
               </a:ext>
             </a:extLst>
           </p:cNvPr>
@@ -8656,7 +8656,7 @@
     </p:spTree>
     <p:extLst>
       <p:ext uri="{BB962C8B-B14F-4D97-AF65-F5344CB8AC3E}">
-        <p14:creationId xmlns:p14="http://schemas.microsoft.com/office/powerpoint/2010/main" val="289981765"/>
+        <p14:creationId xmlns:p14="http://schemas.microsoft.com/office/powerpoint/2010/main" val="624585734"/>
       </p:ext>
     </p:extLst>
   </p:cSld>
@@ -8687,7 +8687,7 @@
           <p:cNvPr id="1" name="s8-rule">
             <a:extLst xmlns:a="http://schemas.openxmlformats.org/drawingml/2006/main">
               <a:ext uri="{FF2B5EF4-FFF2-40B4-BE49-F238E27FC236}">
-                <a16:creationId xmlns:a16="http://schemas.microsoft.com/office/drawing/2014/main" id="{0CEB829B-FB77-43F6-B339-55ECAE0C071F}"/>
+                <a16:creationId xmlns:a16="http://schemas.microsoft.com/office/drawing/2014/main" id="{F0DC18B1-95A5-48BB-8C28-B36BAF3495EF}"/>
               </a:ext>
             </a:extLst>
           </p:cNvPr>
@@ -8720,7 +8720,7 @@
           <p:cNvPr id="2" name="s8-eyebrow">
             <a:extLst xmlns:a="http://schemas.openxmlformats.org/drawingml/2006/main">
               <a:ext uri="{FF2B5EF4-FFF2-40B4-BE49-F238E27FC236}">
-                <a16:creationId xmlns:a16="http://schemas.microsoft.com/office/drawing/2014/main" id="{92C23213-CAC5-41F8-A516-F542AEA41ACB}"/>
+                <a16:creationId xmlns:a16="http://schemas.microsoft.com/office/drawing/2014/main" id="{4F26F1BC-05C5-4817-A4CF-0CA280E01AC6}"/>
               </a:ext>
             </a:extLst>
           </p:cNvPr>
@@ -8778,7 +8778,7 @@
           <p:cNvPr id="3" name="s8-title">
             <a:extLst xmlns:a="http://schemas.openxmlformats.org/drawingml/2006/main">
               <a:ext uri="{FF2B5EF4-FFF2-40B4-BE49-F238E27FC236}">
-                <a16:creationId xmlns:a16="http://schemas.microsoft.com/office/drawing/2014/main" id="{DD98955E-D617-4458-8AF0-BA1E7A9785F4}"/>
+                <a16:creationId xmlns:a16="http://schemas.microsoft.com/office/drawing/2014/main" id="{90CB3C5E-15D8-4008-B064-8B6150451B37}"/>
               </a:ext>
             </a:extLst>
           </p:cNvPr>
@@ -8836,7 +8836,7 @@
           <p:cNvPr id="4" name="s8-footer">
             <a:extLst xmlns:a="http://schemas.openxmlformats.org/drawingml/2006/main">
               <a:ext uri="{FF2B5EF4-FFF2-40B4-BE49-F238E27FC236}">
-                <a16:creationId xmlns:a16="http://schemas.microsoft.com/office/drawing/2014/main" id="{F8A5E655-B2EC-46D2-87D8-CD527FDEAB2E}"/>
+                <a16:creationId xmlns:a16="http://schemas.microsoft.com/office/drawing/2014/main" id="{BB2441BB-7813-4CC9-B1F1-FB3E0FA8527F}"/>
               </a:ext>
             </a:extLst>
           </p:cNvPr>
@@ -8867,7 +8867,7 @@
           <p:cNvPr id="5" name="s8-identity">
             <a:extLst xmlns:a="http://schemas.openxmlformats.org/drawingml/2006/main">
               <a:ext uri="{FF2B5EF4-FFF2-40B4-BE49-F238E27FC236}">
-                <a16:creationId xmlns:a16="http://schemas.microsoft.com/office/drawing/2014/main" id="{6948AF33-8922-473D-BAEE-0EF6FF6D5F70}"/>
+                <a16:creationId xmlns:a16="http://schemas.microsoft.com/office/drawing/2014/main" id="{A5D275D7-7E60-4A6B-86AC-061379C173DA}"/>
               </a:ext>
             </a:extLst>
           </p:cNvPr>
@@ -8925,7 +8925,7 @@
           <p:cNvPr id="6" name="core-no-0">
             <a:extLst xmlns:a="http://schemas.openxmlformats.org/drawingml/2006/main">
               <a:ext uri="{FF2B5EF4-FFF2-40B4-BE49-F238E27FC236}">
-                <a16:creationId xmlns:a16="http://schemas.microsoft.com/office/drawing/2014/main" id="{892588F1-4D7D-4AFF-A922-E7D116F73457}"/>
+                <a16:creationId xmlns:a16="http://schemas.microsoft.com/office/drawing/2014/main" id="{A9C54A98-6C2C-4D25-9889-16A7908AF740}"/>
               </a:ext>
             </a:extLst>
           </p:cNvPr>
@@ -8983,7 +8983,7 @@
           <p:cNvPr id="7" name="core-label-0">
             <a:extLst xmlns:a="http://schemas.openxmlformats.org/drawingml/2006/main">
               <a:ext uri="{FF2B5EF4-FFF2-40B4-BE49-F238E27FC236}">
-                <a16:creationId xmlns:a16="http://schemas.microsoft.com/office/drawing/2014/main" id="{E1D26125-CA56-4C9F-B5D2-7A7FA6A43EF3}"/>
+                <a16:creationId xmlns:a16="http://schemas.microsoft.com/office/drawing/2014/main" id="{08A1F8EC-1E24-4F20-847D-FC5D739627DB}"/>
               </a:ext>
             </a:extLst>
           </p:cNvPr>
@@ -9041,7 +9041,7 @@
           <p:cNvPr id="8" name="core-body-0">
             <a:extLst xmlns:a="http://schemas.openxmlformats.org/drawingml/2006/main">
               <a:ext uri="{FF2B5EF4-FFF2-40B4-BE49-F238E27FC236}">
-                <a16:creationId xmlns:a16="http://schemas.microsoft.com/office/drawing/2014/main" id="{3644D231-0FD6-4883-B0DC-EBADD6195CB6}"/>
+                <a16:creationId xmlns:a16="http://schemas.microsoft.com/office/drawing/2014/main" id="{B832D841-9AC0-4222-8583-B665DD4BD2C3}"/>
               </a:ext>
             </a:extLst>
           </p:cNvPr>
@@ -9105,7 +9105,7 @@
           <p:cNvPr id="9" name="s8-takeaway-rule">
             <a:extLst xmlns:a="http://schemas.openxmlformats.org/drawingml/2006/main">
               <a:ext uri="{FF2B5EF4-FFF2-40B4-BE49-F238E27FC236}">
-                <a16:creationId xmlns:a16="http://schemas.microsoft.com/office/drawing/2014/main" id="{5A120209-E06F-4BA0-B98B-D5B87C9A8023}"/>
+                <a16:creationId xmlns:a16="http://schemas.microsoft.com/office/drawing/2014/main" id="{C4939889-B6E0-4ED5-8B45-7F00920FE2AC}"/>
               </a:ext>
             </a:extLst>
           </p:cNvPr>
@@ -9138,7 +9138,7 @@
           <p:cNvPr id="10" name="s8-takeaway">
             <a:extLst xmlns:a="http://schemas.openxmlformats.org/drawingml/2006/main">
               <a:ext uri="{FF2B5EF4-FFF2-40B4-BE49-F238E27FC236}">
-                <a16:creationId xmlns:a16="http://schemas.microsoft.com/office/drawing/2014/main" id="{704E2ADC-586A-4097-873B-C66D97C14BDE}"/>
+                <a16:creationId xmlns:a16="http://schemas.microsoft.com/office/drawing/2014/main" id="{1E6D77B8-82A0-4C6F-8BC6-CA3D0C31374F}"/>
               </a:ext>
             </a:extLst>
           </p:cNvPr>
@@ -9194,7 +9194,7 @@
     </p:spTree>
     <p:extLst>
       <p:ext uri="{BB962C8B-B14F-4D97-AF65-F5344CB8AC3E}">
-        <p14:creationId xmlns:p14="http://schemas.microsoft.com/office/powerpoint/2010/main" val="1171326893"/>
+        <p14:creationId xmlns:p14="http://schemas.microsoft.com/office/powerpoint/2010/main" val="985131578"/>
       </p:ext>
     </p:extLst>
   </p:cSld>
@@ -9225,7 +9225,7 @@
           <p:cNvPr id="1" name="s9-rule">
             <a:extLst xmlns:a="http://schemas.openxmlformats.org/drawingml/2006/main">
               <a:ext uri="{FF2B5EF4-FFF2-40B4-BE49-F238E27FC236}">
-                <a16:creationId xmlns:a16="http://schemas.microsoft.com/office/drawing/2014/main" id="{BE5E7A8F-ABA7-454B-BA70-4F2AD4BD02CC}"/>
+                <a16:creationId xmlns:a16="http://schemas.microsoft.com/office/drawing/2014/main" id="{28B5472D-AD22-4583-A83D-D57B4B02A781}"/>
               </a:ext>
             </a:extLst>
           </p:cNvPr>
@@ -9258,7 +9258,7 @@
           <p:cNvPr id="2" name="s9-eyebrow">
             <a:extLst xmlns:a="http://schemas.openxmlformats.org/drawingml/2006/main">
               <a:ext uri="{FF2B5EF4-FFF2-40B4-BE49-F238E27FC236}">
-                <a16:creationId xmlns:a16="http://schemas.microsoft.com/office/drawing/2014/main" id="{09E596E8-D423-425B-9565-514F47574D77}"/>
+                <a16:creationId xmlns:a16="http://schemas.microsoft.com/office/drawing/2014/main" id="{C0314E7D-CFF5-4F13-A3F1-DF08F2F17474}"/>
               </a:ext>
             </a:extLst>
           </p:cNvPr>
@@ -9316,7 +9316,7 @@
           <p:cNvPr id="3" name="s9-title">
             <a:extLst xmlns:a="http://schemas.openxmlformats.org/drawingml/2006/main">
               <a:ext uri="{FF2B5EF4-FFF2-40B4-BE49-F238E27FC236}">
-                <a16:creationId xmlns:a16="http://schemas.microsoft.com/office/drawing/2014/main" id="{FD15589B-0CEE-41AF-8454-096C41A2154A}"/>
+                <a16:creationId xmlns:a16="http://schemas.microsoft.com/office/drawing/2014/main" id="{048CF735-6CC8-4461-9F9F-60436F4F5761}"/>
               </a:ext>
             </a:extLst>
           </p:cNvPr>
@@ -9374,7 +9374,7 @@
           <p:cNvPr id="4" name="s9-footer">
             <a:extLst xmlns:a="http://schemas.openxmlformats.org/drawingml/2006/main">
               <a:ext uri="{FF2B5EF4-FFF2-40B4-BE49-F238E27FC236}">
-                <a16:creationId xmlns:a16="http://schemas.microsoft.com/office/drawing/2014/main" id="{CF4F854D-413C-42D9-BF5A-9DC2B5C97C58}"/>
+                <a16:creationId xmlns:a16="http://schemas.microsoft.com/office/drawing/2014/main" id="{E2829CF2-F4D1-489C-BC56-B2D60C1640DE}"/>
               </a:ext>
             </a:extLst>
           </p:cNvPr>
@@ -9405,7 +9405,7 @@
           <p:cNvPr id="5" name="s9-identity">
             <a:extLst xmlns:a="http://schemas.openxmlformats.org/drawingml/2006/main">
               <a:ext uri="{FF2B5EF4-FFF2-40B4-BE49-F238E27FC236}">
-                <a16:creationId xmlns:a16="http://schemas.microsoft.com/office/drawing/2014/main" id="{C32D5B54-E38A-40A4-A447-FB1BBFB4618E}"/>
+                <a16:creationId xmlns:a16="http://schemas.microsoft.com/office/drawing/2014/main" id="{43172398-6A0C-4ED4-ACC5-AB68158D3C58}"/>
               </a:ext>
             </a:extLst>
           </p:cNvPr>
@@ -9463,7 +9463,7 @@
           <p:cNvPr id="6" name="case-title">
             <a:extLst xmlns:a="http://schemas.openxmlformats.org/drawingml/2006/main">
               <a:ext uri="{FF2B5EF4-FFF2-40B4-BE49-F238E27FC236}">
-                <a16:creationId xmlns:a16="http://schemas.microsoft.com/office/drawing/2014/main" id="{392206DF-D719-44E2-802B-4C153C378B98}"/>
+                <a16:creationId xmlns:a16="http://schemas.microsoft.com/office/drawing/2014/main" id="{F618FA31-126B-47A5-A9F8-E317E80AA482}"/>
               </a:ext>
             </a:extLst>
           </p:cNvPr>
@@ -9527,7 +9527,7 @@
           <p:cNvPr id="7" name="case-row-0">
             <a:extLst xmlns:a="http://schemas.openxmlformats.org/drawingml/2006/main">
               <a:ext uri="{FF2B5EF4-FFF2-40B4-BE49-F238E27FC236}">
-                <a16:creationId xmlns:a16="http://schemas.microsoft.com/office/drawing/2014/main" id="{A2D83C58-0915-4663-BE16-68A33C32AB31}"/>
+                <a16:creationId xmlns:a16="http://schemas.microsoft.com/office/drawing/2014/main" id="{8783FDAC-3D5F-490C-890E-F38C601921DF}"/>
               </a:ext>
             </a:extLst>
           </p:cNvPr>
@@ -9591,7 +9591,7 @@
           <p:cNvPr id="8" name="case-row-1">
             <a:extLst xmlns:a="http://schemas.openxmlformats.org/drawingml/2006/main">
               <a:ext uri="{FF2B5EF4-FFF2-40B4-BE49-F238E27FC236}">
-                <a16:creationId xmlns:a16="http://schemas.microsoft.com/office/drawing/2014/main" id="{DCC81C78-E07F-4B24-88BB-4D9E3F1969FB}"/>
+                <a16:creationId xmlns:a16="http://schemas.microsoft.com/office/drawing/2014/main" id="{6583D2AC-62BA-4D33-85B1-5E0E128D0081}"/>
               </a:ext>
             </a:extLst>
           </p:cNvPr>
@@ -9655,7 +9655,7 @@
           <p:cNvPr id="9" name="s9-takeaway-rule">
             <a:extLst xmlns:a="http://schemas.openxmlformats.org/drawingml/2006/main">
               <a:ext uri="{FF2B5EF4-FFF2-40B4-BE49-F238E27FC236}">
-                <a16:creationId xmlns:a16="http://schemas.microsoft.com/office/drawing/2014/main" id="{34050A27-010A-4F8B-9B8A-0E24E89FF9CC}"/>
+                <a16:creationId xmlns:a16="http://schemas.microsoft.com/office/drawing/2014/main" id="{A11DE090-9484-4DB8-855F-1F68CEC460DC}"/>
               </a:ext>
             </a:extLst>
           </p:cNvPr>
@@ -9688,7 +9688,7 @@
           <p:cNvPr id="10" name="s9-takeaway">
             <a:extLst xmlns:a="http://schemas.openxmlformats.org/drawingml/2006/main">
               <a:ext uri="{FF2B5EF4-FFF2-40B4-BE49-F238E27FC236}">
-                <a16:creationId xmlns:a16="http://schemas.microsoft.com/office/drawing/2014/main" id="{F49364D3-A5F0-482B-9ED3-DD062034D9FB}"/>
+                <a16:creationId xmlns:a16="http://schemas.microsoft.com/office/drawing/2014/main" id="{107F1D87-BA6A-40AD-B938-EF8CCB7FAA4D}"/>
               </a:ext>
             </a:extLst>
           </p:cNvPr>
@@ -9744,7 +9744,7 @@
     </p:spTree>
     <p:extLst>
       <p:ext uri="{BB962C8B-B14F-4D97-AF65-F5344CB8AC3E}">
-        <p14:creationId xmlns:p14="http://schemas.microsoft.com/office/powerpoint/2010/main" val="1939815296"/>
+        <p14:creationId xmlns:p14="http://schemas.microsoft.com/office/powerpoint/2010/main" val="934195334"/>
       </p:ext>
     </p:extLst>
   </p:cSld>

--- a/docs/public/course-assets/course-pptx/ag-004.pptx
+++ b/docs/public/course-assets/course-pptx/ag-004.pptx
@@ -2,24 +2,24 @@
 <file path=ppt/presentation.xml><?xml version="1.0" encoding="utf-8"?>
 <p:presentation xmlns:p="http://schemas.openxmlformats.org/presentationml/2006/main">
   <p:sldMasterIdLst>
-    <p:sldMasterId xmlns:r="http://schemas.openxmlformats.org/officeDocument/2006/relationships" id="2147483648" r:id="R2a5845c7a3dd496c"/>
+    <p:sldMasterId xmlns:r="http://schemas.openxmlformats.org/officeDocument/2006/relationships" id="2147483648" r:id="R5c572595df07436e"/>
   </p:sldMasterIdLst>
   <p:notesMasterIdLst>
-    <p:notesMasterId xmlns:r="http://schemas.openxmlformats.org/officeDocument/2006/relationships" r:id="R2abf903aca7c4fd6"/>
+    <p:notesMasterId xmlns:r="http://schemas.openxmlformats.org/officeDocument/2006/relationships" r:id="R1604e9accbe6467f"/>
   </p:notesMasterIdLst>
   <p:sldIdLst>
-    <p:sldId xmlns:r="http://schemas.openxmlformats.org/officeDocument/2006/relationships" id="256" r:id="R62b4e0c047be468e"/>
-    <p:sldId xmlns:r="http://schemas.openxmlformats.org/officeDocument/2006/relationships" id="257" r:id="Rf9d1bfcbed474e42"/>
-    <p:sldId xmlns:r="http://schemas.openxmlformats.org/officeDocument/2006/relationships" id="258" r:id="Re7ae9388293b4f48"/>
-    <p:sldId xmlns:r="http://schemas.openxmlformats.org/officeDocument/2006/relationships" id="259" r:id="R21f44a3ba8a846d9"/>
-    <p:sldId xmlns:r="http://schemas.openxmlformats.org/officeDocument/2006/relationships" id="260" r:id="R463b2f87dbc44b7a"/>
-    <p:sldId xmlns:r="http://schemas.openxmlformats.org/officeDocument/2006/relationships" id="261" r:id="R5d190beb5eac4c49"/>
-    <p:sldId xmlns:r="http://schemas.openxmlformats.org/officeDocument/2006/relationships" id="262" r:id="Rf9844eab8430478c"/>
-    <p:sldId xmlns:r="http://schemas.openxmlformats.org/officeDocument/2006/relationships" id="263" r:id="Rfecb26b9a57b4dda"/>
-    <p:sldId xmlns:r="http://schemas.openxmlformats.org/officeDocument/2006/relationships" id="264" r:id="Rb696639ea1a44b18"/>
-    <p:sldId xmlns:r="http://schemas.openxmlformats.org/officeDocument/2006/relationships" id="265" r:id="R795e7e8bbf204cd6"/>
-    <p:sldId xmlns:r="http://schemas.openxmlformats.org/officeDocument/2006/relationships" id="266" r:id="R3a507cfe2ee340d1"/>
-    <p:sldId xmlns:r="http://schemas.openxmlformats.org/officeDocument/2006/relationships" id="267" r:id="R9dfb54a8e66c47d6"/>
+    <p:sldId xmlns:r="http://schemas.openxmlformats.org/officeDocument/2006/relationships" id="256" r:id="R050a3c85f6d743b8"/>
+    <p:sldId xmlns:r="http://schemas.openxmlformats.org/officeDocument/2006/relationships" id="257" r:id="Rb1c2150043964369"/>
+    <p:sldId xmlns:r="http://schemas.openxmlformats.org/officeDocument/2006/relationships" id="258" r:id="Re3c3b0baa3864c7f"/>
+    <p:sldId xmlns:r="http://schemas.openxmlformats.org/officeDocument/2006/relationships" id="259" r:id="R4d99ba5b8f8d41c7"/>
+    <p:sldId xmlns:r="http://schemas.openxmlformats.org/officeDocument/2006/relationships" id="260" r:id="R490233cfc8cf4fc5"/>
+    <p:sldId xmlns:r="http://schemas.openxmlformats.org/officeDocument/2006/relationships" id="261" r:id="R984512f0e3ea450d"/>
+    <p:sldId xmlns:r="http://schemas.openxmlformats.org/officeDocument/2006/relationships" id="262" r:id="R959cdaaa2fdd49b0"/>
+    <p:sldId xmlns:r="http://schemas.openxmlformats.org/officeDocument/2006/relationships" id="263" r:id="Rb2edfe076df74d9f"/>
+    <p:sldId xmlns:r="http://schemas.openxmlformats.org/officeDocument/2006/relationships" id="264" r:id="R7b0d8ea8e98a4b5c"/>
+    <p:sldId xmlns:r="http://schemas.openxmlformats.org/officeDocument/2006/relationships" id="265" r:id="R1e595028ceb346c7"/>
+    <p:sldId xmlns:r="http://schemas.openxmlformats.org/officeDocument/2006/relationships" id="266" r:id="R89d503fa1f26426f"/>
+    <p:sldId xmlns:r="http://schemas.openxmlformats.org/officeDocument/2006/relationships" id="267" r:id="R5c99b3e85af44243"/>
   </p:sldIdLst>
   <p:sldSz cx="12192000" cy="6858000"/>
   <p:notesSz cx="6858000" cy="9144000"/>
@@ -1338,7 +1338,7 @@
   </p:cSld>
   <p:clrMap bg1="lt1" tx1="dk1" bg2="lt2" tx2="dk2" accent1="accent1" accent2="accent2" accent3="accent3" accent4="accent4" accent5="accent5" accent6="accent6" hlink="hlink" folHlink="folHlink"/>
   <p:sldLayoutIdLst>
-    <p:sldLayoutId xmlns:r="http://schemas.openxmlformats.org/officeDocument/2006/relationships" id="2147483649" r:id="Rd6f9261025564288"/>
+    <p:sldLayoutId xmlns:r="http://schemas.openxmlformats.org/officeDocument/2006/relationships" id="2147483649" r:id="Ra5bb35e27de54070"/>
   </p:sldLayoutIdLst>
   <p:txStyles>
     <p:titleStyle>
@@ -1889,7 +1889,7 @@
           <p:cNvPr id="1" name="cover-rule">
             <a:extLst xmlns:a="http://schemas.openxmlformats.org/drawingml/2006/main">
               <a:ext uri="{FF2B5EF4-FFF2-40B4-BE49-F238E27FC236}">
-                <a16:creationId xmlns:a16="http://schemas.microsoft.com/office/drawing/2014/main" id="{0AACF4C8-C716-4107-B161-8E3ACDCADD99}"/>
+                <a16:creationId xmlns:a16="http://schemas.microsoft.com/office/drawing/2014/main" id="{6990B160-AF2F-48E5-8BAD-8B721D88DFBA}"/>
               </a:ext>
             </a:extLst>
           </p:cNvPr>
@@ -1922,7 +1922,7 @@
           <p:cNvPr id="2" name="cover-ring-1">
             <a:extLst xmlns:a="http://schemas.openxmlformats.org/drawingml/2006/main">
               <a:ext uri="{FF2B5EF4-FFF2-40B4-BE49-F238E27FC236}">
-                <a16:creationId xmlns:a16="http://schemas.microsoft.com/office/drawing/2014/main" id="{6CE58A69-626C-459A-9799-1864DEF34530}"/>
+                <a16:creationId xmlns:a16="http://schemas.microsoft.com/office/drawing/2014/main" id="{723E527B-3696-4CED-ABFB-6CD88F1CEFD0}"/>
               </a:ext>
             </a:extLst>
           </p:cNvPr>
@@ -1953,7 +1953,7 @@
           <p:cNvPr id="3" name="cover-ring-2">
             <a:extLst xmlns:a="http://schemas.openxmlformats.org/drawingml/2006/main">
               <a:ext uri="{FF2B5EF4-FFF2-40B4-BE49-F238E27FC236}">
-                <a16:creationId xmlns:a16="http://schemas.microsoft.com/office/drawing/2014/main" id="{4BF7D3E7-D307-497A-9527-F45764F01C74}"/>
+                <a16:creationId xmlns:a16="http://schemas.microsoft.com/office/drawing/2014/main" id="{0B4FDCDC-49DA-4F7E-96AA-5FAA95EB7D0B}"/>
               </a:ext>
             </a:extLst>
           </p:cNvPr>
@@ -1984,7 +1984,7 @@
           <p:cNvPr id="4" name="cover-core">
             <a:extLst xmlns:a="http://schemas.openxmlformats.org/drawingml/2006/main">
               <a:ext uri="{FF2B5EF4-FFF2-40B4-BE49-F238E27FC236}">
-                <a16:creationId xmlns:a16="http://schemas.microsoft.com/office/drawing/2014/main" id="{94D61784-22D2-4D35-B7D2-AD0A2D4D62C2}"/>
+                <a16:creationId xmlns:a16="http://schemas.microsoft.com/office/drawing/2014/main" id="{15021B7F-FA58-4E79-BA00-663354AC3804}"/>
               </a:ext>
             </a:extLst>
           </p:cNvPr>
@@ -2017,7 +2017,7 @@
           <p:cNvPr id="5" name="cover-line-1">
             <a:extLst xmlns:a="http://schemas.openxmlformats.org/drawingml/2006/main">
               <a:ext uri="{FF2B5EF4-FFF2-40B4-BE49-F238E27FC236}">
-                <a16:creationId xmlns:a16="http://schemas.microsoft.com/office/drawing/2014/main" id="{80862B8B-457E-4E19-95AF-29F18D38F174}"/>
+                <a16:creationId xmlns:a16="http://schemas.microsoft.com/office/drawing/2014/main" id="{B5B1D856-9C66-4636-B32B-20836A4DB5D3}"/>
               </a:ext>
             </a:extLst>
           </p:cNvPr>
@@ -2048,7 +2048,7 @@
           <p:cNvPr id="6" name="cover-line-2">
             <a:extLst xmlns:a="http://schemas.openxmlformats.org/drawingml/2006/main">
               <a:ext uri="{FF2B5EF4-FFF2-40B4-BE49-F238E27FC236}">
-                <a16:creationId xmlns:a16="http://schemas.microsoft.com/office/drawing/2014/main" id="{23304925-736B-4748-A82B-F4E62C989EB0}"/>
+                <a16:creationId xmlns:a16="http://schemas.microsoft.com/office/drawing/2014/main" id="{175F242C-A2AE-41AA-AEA2-0170C3D0C73F}"/>
               </a:ext>
             </a:extLst>
           </p:cNvPr>
@@ -2079,7 +2079,7 @@
           <p:cNvPr id="7" name="cover-eyebrow">
             <a:extLst xmlns:a="http://schemas.openxmlformats.org/drawingml/2006/main">
               <a:ext uri="{FF2B5EF4-FFF2-40B4-BE49-F238E27FC236}">
-                <a16:creationId xmlns:a16="http://schemas.microsoft.com/office/drawing/2014/main" id="{BBFB1D80-3B50-4CA6-8F39-B5B410D76796}"/>
+                <a16:creationId xmlns:a16="http://schemas.microsoft.com/office/drawing/2014/main" id="{B4866527-B67D-4AC8-9956-3C827769CDF2}"/>
               </a:ext>
             </a:extLst>
           </p:cNvPr>
@@ -2137,7 +2137,7 @@
           <p:cNvPr id="8" name="cover-title">
             <a:extLst xmlns:a="http://schemas.openxmlformats.org/drawingml/2006/main">
               <a:ext uri="{FF2B5EF4-FFF2-40B4-BE49-F238E27FC236}">
-                <a16:creationId xmlns:a16="http://schemas.microsoft.com/office/drawing/2014/main" id="{E5A748A8-1AE3-4729-908C-5AF481458909}"/>
+                <a16:creationId xmlns:a16="http://schemas.microsoft.com/office/drawing/2014/main" id="{BC75C092-087C-4CCF-A515-35F93CAA4156}"/>
               </a:ext>
             </a:extLst>
           </p:cNvPr>
@@ -2195,7 +2195,7 @@
           <p:cNvPr id="9" name="cover-subtitle">
             <a:extLst xmlns:a="http://schemas.openxmlformats.org/drawingml/2006/main">
               <a:ext uri="{FF2B5EF4-FFF2-40B4-BE49-F238E27FC236}">
-                <a16:creationId xmlns:a16="http://schemas.microsoft.com/office/drawing/2014/main" id="{C8BEBFA9-8BBE-449F-999D-C1E46CFFED58}"/>
+                <a16:creationId xmlns:a16="http://schemas.microsoft.com/office/drawing/2014/main" id="{C8EA02A4-06C0-460E-9611-320599FAF973}"/>
               </a:ext>
             </a:extLst>
           </p:cNvPr>
@@ -2257,7 +2257,7 @@
           <p:cNvPr id="10" name="cover-lead">
             <a:extLst xmlns:a="http://schemas.openxmlformats.org/drawingml/2006/main">
               <a:ext uri="{FF2B5EF4-FFF2-40B4-BE49-F238E27FC236}">
-                <a16:creationId xmlns:a16="http://schemas.microsoft.com/office/drawing/2014/main" id="{CFBD16C4-59A3-4CAC-9464-88A48F0BB995}"/>
+                <a16:creationId xmlns:a16="http://schemas.microsoft.com/office/drawing/2014/main" id="{30351815-B2A7-48F9-A6DB-805C3CBA4777}"/>
               </a:ext>
             </a:extLst>
           </p:cNvPr>
@@ -2315,7 +2315,7 @@
           <p:cNvPr id="11" name="cover-course">
             <a:extLst xmlns:a="http://schemas.openxmlformats.org/drawingml/2006/main">
               <a:ext uri="{FF2B5EF4-FFF2-40B4-BE49-F238E27FC236}">
-                <a16:creationId xmlns:a16="http://schemas.microsoft.com/office/drawing/2014/main" id="{321C08C4-7CA8-4652-A3F0-B82BDCA2A9E8}"/>
+                <a16:creationId xmlns:a16="http://schemas.microsoft.com/office/drawing/2014/main" id="{DCFC5720-CB73-4625-9397-9312B279FFE0}"/>
               </a:ext>
             </a:extLst>
           </p:cNvPr>
@@ -2373,7 +2373,7 @@
           <p:cNvPr id="12" name="cover-id">
             <a:extLst xmlns:a="http://schemas.openxmlformats.org/drawingml/2006/main">
               <a:ext uri="{FF2B5EF4-FFF2-40B4-BE49-F238E27FC236}">
-                <a16:creationId xmlns:a16="http://schemas.microsoft.com/office/drawing/2014/main" id="{F71F08A3-18C3-4550-A114-56EA4B32E15B}"/>
+                <a16:creationId xmlns:a16="http://schemas.microsoft.com/office/drawing/2014/main" id="{F0B3E3AA-A4E2-45A7-8159-48BE3A3F8F84}"/>
               </a:ext>
             </a:extLst>
           </p:cNvPr>
@@ -2429,7 +2429,7 @@
     </p:spTree>
     <p:extLst>
       <p:ext uri="{BB962C8B-B14F-4D97-AF65-F5344CB8AC3E}">
-        <p14:creationId xmlns:p14="http://schemas.microsoft.com/office/powerpoint/2010/main" val="1402991099"/>
+        <p14:creationId xmlns:p14="http://schemas.microsoft.com/office/powerpoint/2010/main" val="1274769574"/>
       </p:ext>
     </p:extLst>
   </p:cSld>
@@ -2460,7 +2460,7 @@
           <p:cNvPr id="1" name="s10-rule">
             <a:extLst xmlns:a="http://schemas.openxmlformats.org/drawingml/2006/main">
               <a:ext uri="{FF2B5EF4-FFF2-40B4-BE49-F238E27FC236}">
-                <a16:creationId xmlns:a16="http://schemas.microsoft.com/office/drawing/2014/main" id="{E38B47EC-96B4-4D4F-B830-80368139BB25}"/>
+                <a16:creationId xmlns:a16="http://schemas.microsoft.com/office/drawing/2014/main" id="{4E68AA8C-6A2C-42E4-AB8E-CF079592803A}"/>
               </a:ext>
             </a:extLst>
           </p:cNvPr>
@@ -2493,7 +2493,7 @@
           <p:cNvPr id="2" name="s10-eyebrow">
             <a:extLst xmlns:a="http://schemas.openxmlformats.org/drawingml/2006/main">
               <a:ext uri="{FF2B5EF4-FFF2-40B4-BE49-F238E27FC236}">
-                <a16:creationId xmlns:a16="http://schemas.microsoft.com/office/drawing/2014/main" id="{5E01D95F-0ABD-4B43-A707-117D64A4F2D7}"/>
+                <a16:creationId xmlns:a16="http://schemas.microsoft.com/office/drawing/2014/main" id="{5BFE4F7D-4EEC-43F5-BE03-BAFCD434800A}"/>
               </a:ext>
             </a:extLst>
           </p:cNvPr>
@@ -2551,7 +2551,7 @@
           <p:cNvPr id="3" name="s10-title">
             <a:extLst xmlns:a="http://schemas.openxmlformats.org/drawingml/2006/main">
               <a:ext uri="{FF2B5EF4-FFF2-40B4-BE49-F238E27FC236}">
-                <a16:creationId xmlns:a16="http://schemas.microsoft.com/office/drawing/2014/main" id="{CDA75BA9-5A1E-4AAB-A63A-87203BEE3690}"/>
+                <a16:creationId xmlns:a16="http://schemas.microsoft.com/office/drawing/2014/main" id="{2385E4FC-1627-4367-99AD-1B4BE4BE7569}"/>
               </a:ext>
             </a:extLst>
           </p:cNvPr>
@@ -2609,7 +2609,7 @@
           <p:cNvPr id="4" name="s10-footer">
             <a:extLst xmlns:a="http://schemas.openxmlformats.org/drawingml/2006/main">
               <a:ext uri="{FF2B5EF4-FFF2-40B4-BE49-F238E27FC236}">
-                <a16:creationId xmlns:a16="http://schemas.microsoft.com/office/drawing/2014/main" id="{01B14EFB-E8D6-4C91-B827-A59ED1A2FCFE}"/>
+                <a16:creationId xmlns:a16="http://schemas.microsoft.com/office/drawing/2014/main" id="{61773C17-BABA-46CB-8E53-F276700E3373}"/>
               </a:ext>
             </a:extLst>
           </p:cNvPr>
@@ -2640,7 +2640,7 @@
           <p:cNvPr id="5" name="s10-identity">
             <a:extLst xmlns:a="http://schemas.openxmlformats.org/drawingml/2006/main">
               <a:ext uri="{FF2B5EF4-FFF2-40B4-BE49-F238E27FC236}">
-                <a16:creationId xmlns:a16="http://schemas.microsoft.com/office/drawing/2014/main" id="{1E5D16DE-ED00-4613-8EE3-319AF9D4BBAD}"/>
+                <a16:creationId xmlns:a16="http://schemas.microsoft.com/office/drawing/2014/main" id="{1690E744-10BD-4718-B7F2-BA2C7C7F11B3}"/>
               </a:ext>
             </a:extLst>
           </p:cNvPr>
@@ -2698,7 +2698,7 @@
           <p:cNvPr id="6" name="practice-circle-0">
             <a:extLst xmlns:a="http://schemas.openxmlformats.org/drawingml/2006/main">
               <a:ext uri="{FF2B5EF4-FFF2-40B4-BE49-F238E27FC236}">
-                <a16:creationId xmlns:a16="http://schemas.microsoft.com/office/drawing/2014/main" id="{FD9E42BA-95FF-4D4D-AF6F-11BBB4627254}"/>
+                <a16:creationId xmlns:a16="http://schemas.microsoft.com/office/drawing/2014/main" id="{76A85357-7F65-4D69-8751-74A930BBAB80}"/>
               </a:ext>
             </a:extLst>
           </p:cNvPr>
@@ -2731,7 +2731,7 @@
           <p:cNvPr id="7" name="practice-number-0">
             <a:extLst xmlns:a="http://schemas.openxmlformats.org/drawingml/2006/main">
               <a:ext uri="{FF2B5EF4-FFF2-40B4-BE49-F238E27FC236}">
-                <a16:creationId xmlns:a16="http://schemas.microsoft.com/office/drawing/2014/main" id="{5B51553F-2689-4569-925C-4C9648A6EA32}"/>
+                <a16:creationId xmlns:a16="http://schemas.microsoft.com/office/drawing/2014/main" id="{C95FBB6B-C94D-4ED8-B36C-D404B0319E61}"/>
               </a:ext>
             </a:extLst>
           </p:cNvPr>
@@ -2789,7 +2789,7 @@
           <p:cNvPr id="8" name="practice-item-0">
             <a:extLst xmlns:a="http://schemas.openxmlformats.org/drawingml/2006/main">
               <a:ext uri="{FF2B5EF4-FFF2-40B4-BE49-F238E27FC236}">
-                <a16:creationId xmlns:a16="http://schemas.microsoft.com/office/drawing/2014/main" id="{F0624C92-4571-4724-9F74-A7248AF06633}"/>
+                <a16:creationId xmlns:a16="http://schemas.microsoft.com/office/drawing/2014/main" id="{53AF3171-F3EC-4D08-95AE-94B0D0C5408C}"/>
               </a:ext>
             </a:extLst>
           </p:cNvPr>
@@ -2853,7 +2853,7 @@
           <p:cNvPr id="9" name="practice-connector-0">
             <a:extLst xmlns:a="http://schemas.openxmlformats.org/drawingml/2006/main">
               <a:ext uri="{FF2B5EF4-FFF2-40B4-BE49-F238E27FC236}">
-                <a16:creationId xmlns:a16="http://schemas.microsoft.com/office/drawing/2014/main" id="{3B31174E-E7E8-4074-A958-7C9B46D4A558}"/>
+                <a16:creationId xmlns:a16="http://schemas.microsoft.com/office/drawing/2014/main" id="{42886574-B50A-44D1-9C52-EBF81DB6E087}"/>
               </a:ext>
             </a:extLst>
           </p:cNvPr>
@@ -2884,7 +2884,7 @@
           <p:cNvPr id="10" name="practice-circle-1">
             <a:extLst xmlns:a="http://schemas.openxmlformats.org/drawingml/2006/main">
               <a:ext uri="{FF2B5EF4-FFF2-40B4-BE49-F238E27FC236}">
-                <a16:creationId xmlns:a16="http://schemas.microsoft.com/office/drawing/2014/main" id="{6249715F-48A4-4615-B7E8-F131A5E8FE20}"/>
+                <a16:creationId xmlns:a16="http://schemas.microsoft.com/office/drawing/2014/main" id="{E24114E7-35B2-43D7-BE25-65C1ABF2DCAE}"/>
               </a:ext>
             </a:extLst>
           </p:cNvPr>
@@ -2917,7 +2917,7 @@
           <p:cNvPr id="11" name="practice-number-1">
             <a:extLst xmlns:a="http://schemas.openxmlformats.org/drawingml/2006/main">
               <a:ext uri="{FF2B5EF4-FFF2-40B4-BE49-F238E27FC236}">
-                <a16:creationId xmlns:a16="http://schemas.microsoft.com/office/drawing/2014/main" id="{38981E35-B482-47E9-AAC9-C682C5C041C5}"/>
+                <a16:creationId xmlns:a16="http://schemas.microsoft.com/office/drawing/2014/main" id="{B93B51DC-72E2-4636-BB5E-1FC1E9347D1E}"/>
               </a:ext>
             </a:extLst>
           </p:cNvPr>
@@ -2975,7 +2975,7 @@
           <p:cNvPr id="12" name="practice-item-1">
             <a:extLst xmlns:a="http://schemas.openxmlformats.org/drawingml/2006/main">
               <a:ext uri="{FF2B5EF4-FFF2-40B4-BE49-F238E27FC236}">
-                <a16:creationId xmlns:a16="http://schemas.microsoft.com/office/drawing/2014/main" id="{B97840AC-D2C9-4510-9F37-FBFF67CC8057}"/>
+                <a16:creationId xmlns:a16="http://schemas.microsoft.com/office/drawing/2014/main" id="{CF86A160-2FD3-4F20-95D6-B71E118DB72B}"/>
               </a:ext>
             </a:extLst>
           </p:cNvPr>
@@ -3039,7 +3039,7 @@
           <p:cNvPr id="13" name="practice-connector-1">
             <a:extLst xmlns:a="http://schemas.openxmlformats.org/drawingml/2006/main">
               <a:ext uri="{FF2B5EF4-FFF2-40B4-BE49-F238E27FC236}">
-                <a16:creationId xmlns:a16="http://schemas.microsoft.com/office/drawing/2014/main" id="{C583FD9A-7486-44C4-A2E6-6C6514D8BC7D}"/>
+                <a16:creationId xmlns:a16="http://schemas.microsoft.com/office/drawing/2014/main" id="{CCB141F6-B286-4F40-B946-FE70E0B4D3FA}"/>
               </a:ext>
             </a:extLst>
           </p:cNvPr>
@@ -3070,7 +3070,7 @@
           <p:cNvPr id="14" name="practice-circle-2">
             <a:extLst xmlns:a="http://schemas.openxmlformats.org/drawingml/2006/main">
               <a:ext uri="{FF2B5EF4-FFF2-40B4-BE49-F238E27FC236}">
-                <a16:creationId xmlns:a16="http://schemas.microsoft.com/office/drawing/2014/main" id="{2A91489F-0A01-41D1-B62D-4DD35095B53F}"/>
+                <a16:creationId xmlns:a16="http://schemas.microsoft.com/office/drawing/2014/main" id="{FF3A224E-BFBC-42C7-A6E6-69CC56CCF116}"/>
               </a:ext>
             </a:extLst>
           </p:cNvPr>
@@ -3103,7 +3103,7 @@
           <p:cNvPr id="15" name="practice-number-2">
             <a:extLst xmlns:a="http://schemas.openxmlformats.org/drawingml/2006/main">
               <a:ext uri="{FF2B5EF4-FFF2-40B4-BE49-F238E27FC236}">
-                <a16:creationId xmlns:a16="http://schemas.microsoft.com/office/drawing/2014/main" id="{D56991DC-D5E8-423B-A5D2-3BE285BDECBF}"/>
+                <a16:creationId xmlns:a16="http://schemas.microsoft.com/office/drawing/2014/main" id="{8F129927-A070-4A55-BA31-32DD190F1C40}"/>
               </a:ext>
             </a:extLst>
           </p:cNvPr>
@@ -3161,7 +3161,7 @@
           <p:cNvPr id="16" name="practice-item-2">
             <a:extLst xmlns:a="http://schemas.openxmlformats.org/drawingml/2006/main">
               <a:ext uri="{FF2B5EF4-FFF2-40B4-BE49-F238E27FC236}">
-                <a16:creationId xmlns:a16="http://schemas.microsoft.com/office/drawing/2014/main" id="{0A9EB37A-E61A-4D26-B9BD-33DB3264A327}"/>
+                <a16:creationId xmlns:a16="http://schemas.microsoft.com/office/drawing/2014/main" id="{0A40F204-8D34-4A84-8148-7AA35419D0C2}"/>
               </a:ext>
             </a:extLst>
           </p:cNvPr>
@@ -3223,7 +3223,7 @@
     </p:spTree>
     <p:extLst>
       <p:ext uri="{BB962C8B-B14F-4D97-AF65-F5344CB8AC3E}">
-        <p14:creationId xmlns:p14="http://schemas.microsoft.com/office/powerpoint/2010/main" val="207085281"/>
+        <p14:creationId xmlns:p14="http://schemas.microsoft.com/office/powerpoint/2010/main" val="1465658844"/>
       </p:ext>
     </p:extLst>
   </p:cSld>
@@ -3254,7 +3254,7 @@
           <p:cNvPr id="1" name="s11-rule">
             <a:extLst xmlns:a="http://schemas.openxmlformats.org/drawingml/2006/main">
               <a:ext uri="{FF2B5EF4-FFF2-40B4-BE49-F238E27FC236}">
-                <a16:creationId xmlns:a16="http://schemas.microsoft.com/office/drawing/2014/main" id="{CF1D5B19-29E5-405F-A256-3BF954AE65FB}"/>
+                <a16:creationId xmlns:a16="http://schemas.microsoft.com/office/drawing/2014/main" id="{E4723A6C-867E-4535-9C69-A880D83DC60F}"/>
               </a:ext>
             </a:extLst>
           </p:cNvPr>
@@ -3287,7 +3287,7 @@
           <p:cNvPr id="2" name="s11-eyebrow">
             <a:extLst xmlns:a="http://schemas.openxmlformats.org/drawingml/2006/main">
               <a:ext uri="{FF2B5EF4-FFF2-40B4-BE49-F238E27FC236}">
-                <a16:creationId xmlns:a16="http://schemas.microsoft.com/office/drawing/2014/main" id="{2452EA0A-1A91-4A3E-9F5B-4A7526962E00}"/>
+                <a16:creationId xmlns:a16="http://schemas.microsoft.com/office/drawing/2014/main" id="{877901E9-CB6C-4CD6-83EA-5431B3D0635F}"/>
               </a:ext>
             </a:extLst>
           </p:cNvPr>
@@ -3345,7 +3345,7 @@
           <p:cNvPr id="3" name="s11-title">
             <a:extLst xmlns:a="http://schemas.openxmlformats.org/drawingml/2006/main">
               <a:ext uri="{FF2B5EF4-FFF2-40B4-BE49-F238E27FC236}">
-                <a16:creationId xmlns:a16="http://schemas.microsoft.com/office/drawing/2014/main" id="{E028B85C-0AD4-4D14-AD81-636E18727657}"/>
+                <a16:creationId xmlns:a16="http://schemas.microsoft.com/office/drawing/2014/main" id="{7523389A-7DD1-4B8D-897E-7D998CA3B8E5}"/>
               </a:ext>
             </a:extLst>
           </p:cNvPr>
@@ -3403,7 +3403,7 @@
           <p:cNvPr id="4" name="s11-footer">
             <a:extLst xmlns:a="http://schemas.openxmlformats.org/drawingml/2006/main">
               <a:ext uri="{FF2B5EF4-FFF2-40B4-BE49-F238E27FC236}">
-                <a16:creationId xmlns:a16="http://schemas.microsoft.com/office/drawing/2014/main" id="{C995FC8A-8387-48A7-9ADC-7F649C11B289}"/>
+                <a16:creationId xmlns:a16="http://schemas.microsoft.com/office/drawing/2014/main" id="{FB7CB6A0-0972-420E-A89C-021629DB52FB}"/>
               </a:ext>
             </a:extLst>
           </p:cNvPr>
@@ -3434,7 +3434,7 @@
           <p:cNvPr id="5" name="s11-identity">
             <a:extLst xmlns:a="http://schemas.openxmlformats.org/drawingml/2006/main">
               <a:ext uri="{FF2B5EF4-FFF2-40B4-BE49-F238E27FC236}">
-                <a16:creationId xmlns:a16="http://schemas.microsoft.com/office/drawing/2014/main" id="{1E3A0C56-B429-457C-851C-81C846625EB1}"/>
+                <a16:creationId xmlns:a16="http://schemas.microsoft.com/office/drawing/2014/main" id="{228B6269-EA03-4F0F-850F-FA291D063A3B}"/>
               </a:ext>
             </a:extLst>
           </p:cNvPr>
@@ -3492,7 +3492,7 @@
           <p:cNvPr id="6" name="recap-circle-0">
             <a:extLst xmlns:a="http://schemas.openxmlformats.org/drawingml/2006/main">
               <a:ext uri="{FF2B5EF4-FFF2-40B4-BE49-F238E27FC236}">
-                <a16:creationId xmlns:a16="http://schemas.microsoft.com/office/drawing/2014/main" id="{C64D8F5A-A9C6-4303-8A1B-D06A106E319B}"/>
+                <a16:creationId xmlns:a16="http://schemas.microsoft.com/office/drawing/2014/main" id="{D3914D84-2A0A-4495-99A0-986C1BA96430}"/>
               </a:ext>
             </a:extLst>
           </p:cNvPr>
@@ -3525,7 +3525,7 @@
           <p:cNvPr id="7" name="recap-number-0">
             <a:extLst xmlns:a="http://schemas.openxmlformats.org/drawingml/2006/main">
               <a:ext uri="{FF2B5EF4-FFF2-40B4-BE49-F238E27FC236}">
-                <a16:creationId xmlns:a16="http://schemas.microsoft.com/office/drawing/2014/main" id="{69496E10-F891-4DC1-85E7-452A349E8C45}"/>
+                <a16:creationId xmlns:a16="http://schemas.microsoft.com/office/drawing/2014/main" id="{17086920-5360-4880-B5F3-D047FE21A9DA}"/>
               </a:ext>
             </a:extLst>
           </p:cNvPr>
@@ -3583,7 +3583,7 @@
           <p:cNvPr id="8" name="recap-item-0">
             <a:extLst xmlns:a="http://schemas.openxmlformats.org/drawingml/2006/main">
               <a:ext uri="{FF2B5EF4-FFF2-40B4-BE49-F238E27FC236}">
-                <a16:creationId xmlns:a16="http://schemas.microsoft.com/office/drawing/2014/main" id="{1B5A2333-9030-42DC-851A-547B85EC1BEF}"/>
+                <a16:creationId xmlns:a16="http://schemas.microsoft.com/office/drawing/2014/main" id="{BF8B0837-7171-468A-8C29-ED3609B626D4}"/>
               </a:ext>
             </a:extLst>
           </p:cNvPr>
@@ -3647,7 +3647,7 @@
           <p:cNvPr id="9" name="recap-connector-0">
             <a:extLst xmlns:a="http://schemas.openxmlformats.org/drawingml/2006/main">
               <a:ext uri="{FF2B5EF4-FFF2-40B4-BE49-F238E27FC236}">
-                <a16:creationId xmlns:a16="http://schemas.microsoft.com/office/drawing/2014/main" id="{1CB0C3F3-11DE-4248-993C-521C28E5A085}"/>
+                <a16:creationId xmlns:a16="http://schemas.microsoft.com/office/drawing/2014/main" id="{2B3F88AB-2972-482B-B964-EFA17E4F2CF9}"/>
               </a:ext>
             </a:extLst>
           </p:cNvPr>
@@ -3678,7 +3678,7 @@
           <p:cNvPr id="10" name="recap-circle-1">
             <a:extLst xmlns:a="http://schemas.openxmlformats.org/drawingml/2006/main">
               <a:ext uri="{FF2B5EF4-FFF2-40B4-BE49-F238E27FC236}">
-                <a16:creationId xmlns:a16="http://schemas.microsoft.com/office/drawing/2014/main" id="{B34D53AE-C110-41DA-BB4F-E7919CC0406F}"/>
+                <a16:creationId xmlns:a16="http://schemas.microsoft.com/office/drawing/2014/main" id="{0699CBB2-AEB8-448C-916F-D9B28EFC4B4C}"/>
               </a:ext>
             </a:extLst>
           </p:cNvPr>
@@ -3711,7 +3711,7 @@
           <p:cNvPr id="11" name="recap-number-1">
             <a:extLst xmlns:a="http://schemas.openxmlformats.org/drawingml/2006/main">
               <a:ext uri="{FF2B5EF4-FFF2-40B4-BE49-F238E27FC236}">
-                <a16:creationId xmlns:a16="http://schemas.microsoft.com/office/drawing/2014/main" id="{E6587CF6-DAFF-4346-A990-79F09B95D36F}"/>
+                <a16:creationId xmlns:a16="http://schemas.microsoft.com/office/drawing/2014/main" id="{6EE6A961-C5B9-4E92-BE32-B90DFDB49D83}"/>
               </a:ext>
             </a:extLst>
           </p:cNvPr>
@@ -3769,7 +3769,7 @@
           <p:cNvPr id="12" name="recap-item-1">
             <a:extLst xmlns:a="http://schemas.openxmlformats.org/drawingml/2006/main">
               <a:ext uri="{FF2B5EF4-FFF2-40B4-BE49-F238E27FC236}">
-                <a16:creationId xmlns:a16="http://schemas.microsoft.com/office/drawing/2014/main" id="{DD639E78-D895-404A-9486-54FD4193FC01}"/>
+                <a16:creationId xmlns:a16="http://schemas.microsoft.com/office/drawing/2014/main" id="{588A1C82-2233-416F-94AD-3AABCB6C216D}"/>
               </a:ext>
             </a:extLst>
           </p:cNvPr>
@@ -3833,7 +3833,7 @@
           <p:cNvPr id="13" name="recap-connector-1">
             <a:extLst xmlns:a="http://schemas.openxmlformats.org/drawingml/2006/main">
               <a:ext uri="{FF2B5EF4-FFF2-40B4-BE49-F238E27FC236}">
-                <a16:creationId xmlns:a16="http://schemas.microsoft.com/office/drawing/2014/main" id="{38DD2DBF-019C-4CCC-8F10-C752BA8849B1}"/>
+                <a16:creationId xmlns:a16="http://schemas.microsoft.com/office/drawing/2014/main" id="{D0B4E82C-5039-4366-A0AD-69EC0372550E}"/>
               </a:ext>
             </a:extLst>
           </p:cNvPr>
@@ -3864,7 +3864,7 @@
           <p:cNvPr id="14" name="recap-circle-2">
             <a:extLst xmlns:a="http://schemas.openxmlformats.org/drawingml/2006/main">
               <a:ext uri="{FF2B5EF4-FFF2-40B4-BE49-F238E27FC236}">
-                <a16:creationId xmlns:a16="http://schemas.microsoft.com/office/drawing/2014/main" id="{011B4C50-9662-42A4-8751-33594A062188}"/>
+                <a16:creationId xmlns:a16="http://schemas.microsoft.com/office/drawing/2014/main" id="{AEA76AE7-248A-417C-9D29-85146E1B0788}"/>
               </a:ext>
             </a:extLst>
           </p:cNvPr>
@@ -3897,7 +3897,7 @@
           <p:cNvPr id="15" name="recap-number-2">
             <a:extLst xmlns:a="http://schemas.openxmlformats.org/drawingml/2006/main">
               <a:ext uri="{FF2B5EF4-FFF2-40B4-BE49-F238E27FC236}">
-                <a16:creationId xmlns:a16="http://schemas.microsoft.com/office/drawing/2014/main" id="{287C3B97-75AD-4B82-8186-D6132F14274E}"/>
+                <a16:creationId xmlns:a16="http://schemas.microsoft.com/office/drawing/2014/main" id="{97B15FB7-E835-4F83-9345-76F5E8085542}"/>
               </a:ext>
             </a:extLst>
           </p:cNvPr>
@@ -3955,7 +3955,7 @@
           <p:cNvPr id="16" name="recap-item-2">
             <a:extLst xmlns:a="http://schemas.openxmlformats.org/drawingml/2006/main">
               <a:ext uri="{FF2B5EF4-FFF2-40B4-BE49-F238E27FC236}">
-                <a16:creationId xmlns:a16="http://schemas.microsoft.com/office/drawing/2014/main" id="{244BB2D5-A669-4202-A5A1-269C754F29A4}"/>
+                <a16:creationId xmlns:a16="http://schemas.microsoft.com/office/drawing/2014/main" id="{11D5CB36-8B57-4E4B-B73F-8D27BCF6F0A6}"/>
               </a:ext>
             </a:extLst>
           </p:cNvPr>
@@ -4017,7 +4017,7 @@
     </p:spTree>
     <p:extLst>
       <p:ext uri="{BB962C8B-B14F-4D97-AF65-F5344CB8AC3E}">
-        <p14:creationId xmlns:p14="http://schemas.microsoft.com/office/powerpoint/2010/main" val="925226180"/>
+        <p14:creationId xmlns:p14="http://schemas.microsoft.com/office/powerpoint/2010/main" val="905130044"/>
       </p:ext>
     </p:extLst>
   </p:cSld>
@@ -4048,7 +4048,7 @@
           <p:cNvPr id="1" name="s12-rule">
             <a:extLst xmlns:a="http://schemas.openxmlformats.org/drawingml/2006/main">
               <a:ext uri="{FF2B5EF4-FFF2-40B4-BE49-F238E27FC236}">
-                <a16:creationId xmlns:a16="http://schemas.microsoft.com/office/drawing/2014/main" id="{36EADBEF-2C12-46E2-A47E-9118B03D937B}"/>
+                <a16:creationId xmlns:a16="http://schemas.microsoft.com/office/drawing/2014/main" id="{D94E3A86-9EA5-4766-8948-2ECD6B7C763A}"/>
               </a:ext>
             </a:extLst>
           </p:cNvPr>
@@ -4081,7 +4081,7 @@
           <p:cNvPr id="2" name="s12-eyebrow">
             <a:extLst xmlns:a="http://schemas.openxmlformats.org/drawingml/2006/main">
               <a:ext uri="{FF2B5EF4-FFF2-40B4-BE49-F238E27FC236}">
-                <a16:creationId xmlns:a16="http://schemas.microsoft.com/office/drawing/2014/main" id="{A8D3AB80-9351-4A1B-8B8F-3D936C6F1780}"/>
+                <a16:creationId xmlns:a16="http://schemas.microsoft.com/office/drawing/2014/main" id="{A4A5900E-1CB1-4481-BAD1-FB8651084F07}"/>
               </a:ext>
             </a:extLst>
           </p:cNvPr>
@@ -4139,7 +4139,7 @@
           <p:cNvPr id="3" name="s12-title">
             <a:extLst xmlns:a="http://schemas.openxmlformats.org/drawingml/2006/main">
               <a:ext uri="{FF2B5EF4-FFF2-40B4-BE49-F238E27FC236}">
-                <a16:creationId xmlns:a16="http://schemas.microsoft.com/office/drawing/2014/main" id="{93081A2C-5BBA-4FBC-93A0-A954257B215F}"/>
+                <a16:creationId xmlns:a16="http://schemas.microsoft.com/office/drawing/2014/main" id="{0D31218F-A688-4F39-88AE-AA16B10A34AE}"/>
               </a:ext>
             </a:extLst>
           </p:cNvPr>
@@ -4197,7 +4197,7 @@
           <p:cNvPr id="4" name="s12-footer">
             <a:extLst xmlns:a="http://schemas.openxmlformats.org/drawingml/2006/main">
               <a:ext uri="{FF2B5EF4-FFF2-40B4-BE49-F238E27FC236}">
-                <a16:creationId xmlns:a16="http://schemas.microsoft.com/office/drawing/2014/main" id="{620FD1BA-5A4B-427B-BFCC-8BD4D8E2F840}"/>
+                <a16:creationId xmlns:a16="http://schemas.microsoft.com/office/drawing/2014/main" id="{FE5E3854-8078-4E75-AC21-16C3F4969D01}"/>
               </a:ext>
             </a:extLst>
           </p:cNvPr>
@@ -4228,7 +4228,7 @@
           <p:cNvPr id="5" name="s12-identity">
             <a:extLst xmlns:a="http://schemas.openxmlformats.org/drawingml/2006/main">
               <a:ext uri="{FF2B5EF4-FFF2-40B4-BE49-F238E27FC236}">
-                <a16:creationId xmlns:a16="http://schemas.microsoft.com/office/drawing/2014/main" id="{CE232F0B-4BDF-42A9-B645-12AE3D35D5BD}"/>
+                <a16:creationId xmlns:a16="http://schemas.microsoft.com/office/drawing/2014/main" id="{730E037E-F9A5-4C7A-9FD9-D903F53AC822}"/>
               </a:ext>
             </a:extLst>
           </p:cNvPr>
@@ -4286,7 +4286,7 @@
           <p:cNvPr id="6" name="source-0">
             <a:extLst xmlns:a="http://schemas.openxmlformats.org/drawingml/2006/main">
               <a:ext uri="{FF2B5EF4-FFF2-40B4-BE49-F238E27FC236}">
-                <a16:creationId xmlns:a16="http://schemas.microsoft.com/office/drawing/2014/main" id="{AF667BEF-B53D-4ED2-9185-84215096337E}"/>
+                <a16:creationId xmlns:a16="http://schemas.microsoft.com/office/drawing/2014/main" id="{002DBE5D-77A3-46D8-9B51-1444117C986F}"/>
               </a:ext>
             </a:extLst>
           </p:cNvPr>
@@ -4350,7 +4350,7 @@
           <p:cNvPr id="7" name="source-1">
             <a:extLst xmlns:a="http://schemas.openxmlformats.org/drawingml/2006/main">
               <a:ext uri="{FF2B5EF4-FFF2-40B4-BE49-F238E27FC236}">
-                <a16:creationId xmlns:a16="http://schemas.microsoft.com/office/drawing/2014/main" id="{B1559D4B-5E92-45C7-83FD-ED0FD59619CE}"/>
+                <a16:creationId xmlns:a16="http://schemas.microsoft.com/office/drawing/2014/main" id="{7B24F888-A6FB-40A2-BE90-132CAA1F9AE8}"/>
               </a:ext>
             </a:extLst>
           </p:cNvPr>
@@ -4414,7 +4414,7 @@
           <p:cNvPr id="8" name="s12-takeaway-rule">
             <a:extLst xmlns:a="http://schemas.openxmlformats.org/drawingml/2006/main">
               <a:ext uri="{FF2B5EF4-FFF2-40B4-BE49-F238E27FC236}">
-                <a16:creationId xmlns:a16="http://schemas.microsoft.com/office/drawing/2014/main" id="{614E7B83-01B7-41F5-A87C-34258B5C34C1}"/>
+                <a16:creationId xmlns:a16="http://schemas.microsoft.com/office/drawing/2014/main" id="{A64C461C-BB56-4E6C-8072-FCE2AE42470D}"/>
               </a:ext>
             </a:extLst>
           </p:cNvPr>
@@ -4447,7 +4447,7 @@
           <p:cNvPr id="9" name="s12-takeaway">
             <a:extLst xmlns:a="http://schemas.openxmlformats.org/drawingml/2006/main">
               <a:ext uri="{FF2B5EF4-FFF2-40B4-BE49-F238E27FC236}">
-                <a16:creationId xmlns:a16="http://schemas.microsoft.com/office/drawing/2014/main" id="{7049D9C8-8D42-482E-AA15-762D74FE4327}"/>
+                <a16:creationId xmlns:a16="http://schemas.microsoft.com/office/drawing/2014/main" id="{5D3F6626-B453-407F-829C-A4B5A129BF64}"/>
               </a:ext>
             </a:extLst>
           </p:cNvPr>
@@ -4472,7 +4472,7 @@
         </p:spPr>
         <p:txBody>
           <a:bodyPr xmlns:a="http://schemas.openxmlformats.org/drawingml/2006/main" lIns="0" tIns="0" rIns="0" bIns="0" anchor="ctr">
-            <a:normAutofit fontScale="95911"/>
+            <a:normAutofit fontScale="100000"/>
           </a:bodyPr>
           <a:lstStyle xmlns:a="http://schemas.openxmlformats.org/drawingml/2006/main"/>
           <a:p xmlns:a="http://schemas.openxmlformats.org/drawingml/2006/main">
@@ -4495,7 +4495,7 @@
                 <a:ea typeface="PingFang SC"/>
                 <a:cs typeface="PingFang SC"/>
               </a:rPr>
-              <a:t>课程精编页用于讲授主线；播放器中的“原课件”模式保留团队 PowerPoint 精选页、真实图片和可播放视频。</a:t>
+              <a:t>课程正文与幻灯片共享同一知识主线，图片和视频用于帮助理解本节概念与案例。</a:t>
             </a:r>
           </a:p>
         </p:txBody>
@@ -4503,7 +4503,7 @@
     </p:spTree>
     <p:extLst>
       <p:ext uri="{BB962C8B-B14F-4D97-AF65-F5344CB8AC3E}">
-        <p14:creationId xmlns:p14="http://schemas.microsoft.com/office/powerpoint/2010/main" val="598361321"/>
+        <p14:creationId xmlns:p14="http://schemas.microsoft.com/office/powerpoint/2010/main" val="1319430367"/>
       </p:ext>
     </p:extLst>
   </p:cSld>
@@ -4534,7 +4534,7 @@
           <p:cNvPr id="1" name="s2-rule">
             <a:extLst xmlns:a="http://schemas.openxmlformats.org/drawingml/2006/main">
               <a:ext uri="{FF2B5EF4-FFF2-40B4-BE49-F238E27FC236}">
-                <a16:creationId xmlns:a16="http://schemas.microsoft.com/office/drawing/2014/main" id="{ACE4CEEA-1814-427F-8BED-AC981EA1BFD7}"/>
+                <a16:creationId xmlns:a16="http://schemas.microsoft.com/office/drawing/2014/main" id="{8AEDEBB2-1FCD-4A83-B2E5-5629459DD115}"/>
               </a:ext>
             </a:extLst>
           </p:cNvPr>
@@ -4567,7 +4567,7 @@
           <p:cNvPr id="2" name="s2-eyebrow">
             <a:extLst xmlns:a="http://schemas.openxmlformats.org/drawingml/2006/main">
               <a:ext uri="{FF2B5EF4-FFF2-40B4-BE49-F238E27FC236}">
-                <a16:creationId xmlns:a16="http://schemas.microsoft.com/office/drawing/2014/main" id="{57015DFC-CD7D-41CF-81A8-9CFDF983A8EC}"/>
+                <a16:creationId xmlns:a16="http://schemas.microsoft.com/office/drawing/2014/main" id="{48C26E8E-DB42-482A-9A81-0F71DB6BA48A}"/>
               </a:ext>
             </a:extLst>
           </p:cNvPr>
@@ -4625,7 +4625,7 @@
           <p:cNvPr id="3" name="s2-title">
             <a:extLst xmlns:a="http://schemas.openxmlformats.org/drawingml/2006/main">
               <a:ext uri="{FF2B5EF4-FFF2-40B4-BE49-F238E27FC236}">
-                <a16:creationId xmlns:a16="http://schemas.microsoft.com/office/drawing/2014/main" id="{FD10F263-B80F-4375-86FF-5F13E2A92F58}"/>
+                <a16:creationId xmlns:a16="http://schemas.microsoft.com/office/drawing/2014/main" id="{459716CB-B3B0-46B0-B6B5-93A5FCC3C318}"/>
               </a:ext>
             </a:extLst>
           </p:cNvPr>
@@ -4683,7 +4683,7 @@
           <p:cNvPr id="4" name="s2-footer">
             <a:extLst xmlns:a="http://schemas.openxmlformats.org/drawingml/2006/main">
               <a:ext uri="{FF2B5EF4-FFF2-40B4-BE49-F238E27FC236}">
-                <a16:creationId xmlns:a16="http://schemas.microsoft.com/office/drawing/2014/main" id="{B00B6118-4BAC-4510-AEC4-B49181853C01}"/>
+                <a16:creationId xmlns:a16="http://schemas.microsoft.com/office/drawing/2014/main" id="{D028B1FF-30F7-4057-9A83-23742148EA50}"/>
               </a:ext>
             </a:extLst>
           </p:cNvPr>
@@ -4714,7 +4714,7 @@
           <p:cNvPr id="5" name="s2-identity">
             <a:extLst xmlns:a="http://schemas.openxmlformats.org/drawingml/2006/main">
               <a:ext uri="{FF2B5EF4-FFF2-40B4-BE49-F238E27FC236}">
-                <a16:creationId xmlns:a16="http://schemas.microsoft.com/office/drawing/2014/main" id="{71F8A0E4-615F-4628-A8AA-0E1A1A9568E9}"/>
+                <a16:creationId xmlns:a16="http://schemas.microsoft.com/office/drawing/2014/main" id="{23087532-39B7-4493-98B5-925AE59B9143}"/>
               </a:ext>
             </a:extLst>
           </p:cNvPr>
@@ -4772,7 +4772,7 @@
           <p:cNvPr id="6" name="objective-1">
             <a:extLst xmlns:a="http://schemas.openxmlformats.org/drawingml/2006/main">
               <a:ext uri="{FF2B5EF4-FFF2-40B4-BE49-F238E27FC236}">
-                <a16:creationId xmlns:a16="http://schemas.microsoft.com/office/drawing/2014/main" id="{A1CCBEE5-97E5-4E67-8224-9A86424B345F}"/>
+                <a16:creationId xmlns:a16="http://schemas.microsoft.com/office/drawing/2014/main" id="{1AD4D97D-1D25-4156-86E2-CFED90BD7539}"/>
               </a:ext>
             </a:extLst>
           </p:cNvPr>
@@ -4859,7 +4859,7 @@
           <p:cNvPr id="7" name="objective-2">
             <a:extLst xmlns:a="http://schemas.openxmlformats.org/drawingml/2006/main">
               <a:ext uri="{FF2B5EF4-FFF2-40B4-BE49-F238E27FC236}">
-                <a16:creationId xmlns:a16="http://schemas.microsoft.com/office/drawing/2014/main" id="{6628684B-5609-4796-A4AC-84885387989D}"/>
+                <a16:creationId xmlns:a16="http://schemas.microsoft.com/office/drawing/2014/main" id="{B4FC4206-70A1-4B3F-8FC4-9F319FFDB1A3}"/>
               </a:ext>
             </a:extLst>
           </p:cNvPr>
@@ -4946,7 +4946,7 @@
           <p:cNvPr id="8" name="objective-3">
             <a:extLst xmlns:a="http://schemas.openxmlformats.org/drawingml/2006/main">
               <a:ext uri="{FF2B5EF4-FFF2-40B4-BE49-F238E27FC236}">
-                <a16:creationId xmlns:a16="http://schemas.microsoft.com/office/drawing/2014/main" id="{3F2DEEF4-F199-4D17-BFFF-A9EF021FEA84}"/>
+                <a16:creationId xmlns:a16="http://schemas.microsoft.com/office/drawing/2014/main" id="{17514FC4-4EF8-4A5B-B961-CC7BA8A46E86}"/>
               </a:ext>
             </a:extLst>
           </p:cNvPr>
@@ -5033,7 +5033,7 @@
           <p:cNvPr id="9" name="objective-4">
             <a:extLst xmlns:a="http://schemas.openxmlformats.org/drawingml/2006/main">
               <a:ext uri="{FF2B5EF4-FFF2-40B4-BE49-F238E27FC236}">
-                <a16:creationId xmlns:a16="http://schemas.microsoft.com/office/drawing/2014/main" id="{8C30C5EB-A2D8-4ABA-9DF4-789942AA2BBE}"/>
+                <a16:creationId xmlns:a16="http://schemas.microsoft.com/office/drawing/2014/main" id="{7CA8E093-B110-47A8-AFF5-BB0489FE37E4}"/>
               </a:ext>
             </a:extLst>
           </p:cNvPr>
@@ -5118,7 +5118,7 @@
     </p:spTree>
     <p:extLst>
       <p:ext uri="{BB962C8B-B14F-4D97-AF65-F5344CB8AC3E}">
-        <p14:creationId xmlns:p14="http://schemas.microsoft.com/office/powerpoint/2010/main" val="1026679667"/>
+        <p14:creationId xmlns:p14="http://schemas.microsoft.com/office/powerpoint/2010/main" val="2085674069"/>
       </p:ext>
     </p:extLst>
   </p:cSld>
@@ -5149,7 +5149,7 @@
           <p:cNvPr id="1" name="s3-rule">
             <a:extLst xmlns:a="http://schemas.openxmlformats.org/drawingml/2006/main">
               <a:ext uri="{FF2B5EF4-FFF2-40B4-BE49-F238E27FC236}">
-                <a16:creationId xmlns:a16="http://schemas.microsoft.com/office/drawing/2014/main" id="{5BDAD293-7434-4812-A90F-7B91837B45E8}"/>
+                <a16:creationId xmlns:a16="http://schemas.microsoft.com/office/drawing/2014/main" id="{36ED03B4-510E-4B8B-BB67-394F817EFCE9}"/>
               </a:ext>
             </a:extLst>
           </p:cNvPr>
@@ -5182,7 +5182,7 @@
           <p:cNvPr id="2" name="s3-eyebrow">
             <a:extLst xmlns:a="http://schemas.openxmlformats.org/drawingml/2006/main">
               <a:ext uri="{FF2B5EF4-FFF2-40B4-BE49-F238E27FC236}">
-                <a16:creationId xmlns:a16="http://schemas.microsoft.com/office/drawing/2014/main" id="{C1D854D4-2E97-48B1-BF07-06A3C911936E}"/>
+                <a16:creationId xmlns:a16="http://schemas.microsoft.com/office/drawing/2014/main" id="{91FF08E8-1E08-44C4-BB61-ECD49AC17385}"/>
               </a:ext>
             </a:extLst>
           </p:cNvPr>
@@ -5240,7 +5240,7 @@
           <p:cNvPr id="3" name="s3-title">
             <a:extLst xmlns:a="http://schemas.openxmlformats.org/drawingml/2006/main">
               <a:ext uri="{FF2B5EF4-FFF2-40B4-BE49-F238E27FC236}">
-                <a16:creationId xmlns:a16="http://schemas.microsoft.com/office/drawing/2014/main" id="{9932E310-63BE-4393-A3ED-D9A4930FD3EB}"/>
+                <a16:creationId xmlns:a16="http://schemas.microsoft.com/office/drawing/2014/main" id="{29DED8A1-498F-4118-AF08-C15238AD9BDB}"/>
               </a:ext>
             </a:extLst>
           </p:cNvPr>
@@ -5298,7 +5298,7 @@
           <p:cNvPr id="4" name="s3-footer">
             <a:extLst xmlns:a="http://schemas.openxmlformats.org/drawingml/2006/main">
               <a:ext uri="{FF2B5EF4-FFF2-40B4-BE49-F238E27FC236}">
-                <a16:creationId xmlns:a16="http://schemas.microsoft.com/office/drawing/2014/main" id="{6DF9B0D8-1CF7-415F-8CA7-8D456ABA9B26}"/>
+                <a16:creationId xmlns:a16="http://schemas.microsoft.com/office/drawing/2014/main" id="{58875850-D6F4-4254-9993-DD37B8BE0A58}"/>
               </a:ext>
             </a:extLst>
           </p:cNvPr>
@@ -5329,7 +5329,7 @@
           <p:cNvPr id="5" name="s3-identity">
             <a:extLst xmlns:a="http://schemas.openxmlformats.org/drawingml/2006/main">
               <a:ext uri="{FF2B5EF4-FFF2-40B4-BE49-F238E27FC236}">
-                <a16:creationId xmlns:a16="http://schemas.microsoft.com/office/drawing/2014/main" id="{414E99C2-D1AE-45D7-9CB8-633F780C5D74}"/>
+                <a16:creationId xmlns:a16="http://schemas.microsoft.com/office/drawing/2014/main" id="{C93EFD2B-6F43-46E9-9BEB-597576E2F20F}"/>
               </a:ext>
             </a:extLst>
           </p:cNvPr>
@@ -5387,7 +5387,7 @@
           <p:cNvPr id="6" name="core-no-0">
             <a:extLst xmlns:a="http://schemas.openxmlformats.org/drawingml/2006/main">
               <a:ext uri="{FF2B5EF4-FFF2-40B4-BE49-F238E27FC236}">
-                <a16:creationId xmlns:a16="http://schemas.microsoft.com/office/drawing/2014/main" id="{3B42EE71-84ED-4423-B0CB-B690ACA04719}"/>
+                <a16:creationId xmlns:a16="http://schemas.microsoft.com/office/drawing/2014/main" id="{CE2EBAC1-DE1C-4238-86EF-16E6D366ABE5}"/>
               </a:ext>
             </a:extLst>
           </p:cNvPr>
@@ -5445,7 +5445,7 @@
           <p:cNvPr id="7" name="core-label-0">
             <a:extLst xmlns:a="http://schemas.openxmlformats.org/drawingml/2006/main">
               <a:ext uri="{FF2B5EF4-FFF2-40B4-BE49-F238E27FC236}">
-                <a16:creationId xmlns:a16="http://schemas.microsoft.com/office/drawing/2014/main" id="{32E07BE9-29B3-4A08-96CB-44B6EDA458C9}"/>
+                <a16:creationId xmlns:a16="http://schemas.microsoft.com/office/drawing/2014/main" id="{2A58FD33-EA3B-45A0-BD9B-069013FEE7E5}"/>
               </a:ext>
             </a:extLst>
           </p:cNvPr>
@@ -5503,7 +5503,7 @@
           <p:cNvPr id="8" name="core-body-0">
             <a:extLst xmlns:a="http://schemas.openxmlformats.org/drawingml/2006/main">
               <a:ext uri="{FF2B5EF4-FFF2-40B4-BE49-F238E27FC236}">
-                <a16:creationId xmlns:a16="http://schemas.microsoft.com/office/drawing/2014/main" id="{E76520F0-6F1C-4E62-A814-803BF819048D}"/>
+                <a16:creationId xmlns:a16="http://schemas.microsoft.com/office/drawing/2014/main" id="{A3D1815F-C571-4E7C-A922-A04D8412338C}"/>
               </a:ext>
             </a:extLst>
           </p:cNvPr>
@@ -5567,7 +5567,7 @@
           <p:cNvPr id="9" name="core-no-1">
             <a:extLst xmlns:a="http://schemas.openxmlformats.org/drawingml/2006/main">
               <a:ext uri="{FF2B5EF4-FFF2-40B4-BE49-F238E27FC236}">
-                <a16:creationId xmlns:a16="http://schemas.microsoft.com/office/drawing/2014/main" id="{6E07461D-0123-40BE-8775-1E6367304014}"/>
+                <a16:creationId xmlns:a16="http://schemas.microsoft.com/office/drawing/2014/main" id="{51A0400B-BDC3-4E19-8FD9-4572C9EAAB14}"/>
               </a:ext>
             </a:extLst>
           </p:cNvPr>
@@ -5625,7 +5625,7 @@
           <p:cNvPr id="10" name="core-label-1">
             <a:extLst xmlns:a="http://schemas.openxmlformats.org/drawingml/2006/main">
               <a:ext uri="{FF2B5EF4-FFF2-40B4-BE49-F238E27FC236}">
-                <a16:creationId xmlns:a16="http://schemas.microsoft.com/office/drawing/2014/main" id="{AD416717-39B5-4348-98F5-C67EFA82FF03}"/>
+                <a16:creationId xmlns:a16="http://schemas.microsoft.com/office/drawing/2014/main" id="{42B98734-8A07-46C7-A0C2-758D4482B461}"/>
               </a:ext>
             </a:extLst>
           </p:cNvPr>
@@ -5683,7 +5683,7 @@
           <p:cNvPr id="11" name="core-body-1">
             <a:extLst xmlns:a="http://schemas.openxmlformats.org/drawingml/2006/main">
               <a:ext uri="{FF2B5EF4-FFF2-40B4-BE49-F238E27FC236}">
-                <a16:creationId xmlns:a16="http://schemas.microsoft.com/office/drawing/2014/main" id="{D611430C-D402-49D1-A9D2-790A1B2005E5}"/>
+                <a16:creationId xmlns:a16="http://schemas.microsoft.com/office/drawing/2014/main" id="{BC45B3A9-D8D8-4D56-ACCC-420A4755207F}"/>
               </a:ext>
             </a:extLst>
           </p:cNvPr>
@@ -5747,7 +5747,7 @@
           <p:cNvPr id="12" name="s3-takeaway-rule">
             <a:extLst xmlns:a="http://schemas.openxmlformats.org/drawingml/2006/main">
               <a:ext uri="{FF2B5EF4-FFF2-40B4-BE49-F238E27FC236}">
-                <a16:creationId xmlns:a16="http://schemas.microsoft.com/office/drawing/2014/main" id="{C7DE3231-E638-4E2D-AAEC-3BE8C8629B59}"/>
+                <a16:creationId xmlns:a16="http://schemas.microsoft.com/office/drawing/2014/main" id="{E64AE8BC-C890-4AAC-A41E-D5327489679F}"/>
               </a:ext>
             </a:extLst>
           </p:cNvPr>
@@ -5780,7 +5780,7 @@
           <p:cNvPr id="13" name="s3-takeaway">
             <a:extLst xmlns:a="http://schemas.openxmlformats.org/drawingml/2006/main">
               <a:ext uri="{FF2B5EF4-FFF2-40B4-BE49-F238E27FC236}">
-                <a16:creationId xmlns:a16="http://schemas.microsoft.com/office/drawing/2014/main" id="{375A9689-B79B-4A44-A8F8-B08DA8DD0ED7}"/>
+                <a16:creationId xmlns:a16="http://schemas.microsoft.com/office/drawing/2014/main" id="{910AE590-CA53-41E3-B94C-D61A970F03C7}"/>
               </a:ext>
             </a:extLst>
           </p:cNvPr>
@@ -5836,7 +5836,7 @@
     </p:spTree>
     <p:extLst>
       <p:ext uri="{BB962C8B-B14F-4D97-AF65-F5344CB8AC3E}">
-        <p14:creationId xmlns:p14="http://schemas.microsoft.com/office/powerpoint/2010/main" val="135809739"/>
+        <p14:creationId xmlns:p14="http://schemas.microsoft.com/office/powerpoint/2010/main" val="80872807"/>
       </p:ext>
     </p:extLst>
   </p:cSld>
@@ -5867,7 +5867,7 @@
           <p:cNvPr id="1" name="s4-rule">
             <a:extLst xmlns:a="http://schemas.openxmlformats.org/drawingml/2006/main">
               <a:ext uri="{FF2B5EF4-FFF2-40B4-BE49-F238E27FC236}">
-                <a16:creationId xmlns:a16="http://schemas.microsoft.com/office/drawing/2014/main" id="{C462D91C-9B6C-4E25-A10B-D2F689AA84E4}"/>
+                <a16:creationId xmlns:a16="http://schemas.microsoft.com/office/drawing/2014/main" id="{779B0CC7-DDC0-4296-B7B8-62279B3FD44C}"/>
               </a:ext>
             </a:extLst>
           </p:cNvPr>
@@ -5900,7 +5900,7 @@
           <p:cNvPr id="2" name="s4-eyebrow">
             <a:extLst xmlns:a="http://schemas.openxmlformats.org/drawingml/2006/main">
               <a:ext uri="{FF2B5EF4-FFF2-40B4-BE49-F238E27FC236}">
-                <a16:creationId xmlns:a16="http://schemas.microsoft.com/office/drawing/2014/main" id="{196DAF58-E981-49AA-9FA9-8E3B9867740A}"/>
+                <a16:creationId xmlns:a16="http://schemas.microsoft.com/office/drawing/2014/main" id="{0C2C00F7-D5A8-4D85-9794-44594640A2B5}"/>
               </a:ext>
             </a:extLst>
           </p:cNvPr>
@@ -5958,7 +5958,7 @@
           <p:cNvPr id="3" name="s4-title">
             <a:extLst xmlns:a="http://schemas.openxmlformats.org/drawingml/2006/main">
               <a:ext uri="{FF2B5EF4-FFF2-40B4-BE49-F238E27FC236}">
-                <a16:creationId xmlns:a16="http://schemas.microsoft.com/office/drawing/2014/main" id="{B9B7B6A0-451D-4F08-BEC7-6CEE71A5BA15}"/>
+                <a16:creationId xmlns:a16="http://schemas.microsoft.com/office/drawing/2014/main" id="{B8D4836F-0343-46A8-9558-4FEC885A3893}"/>
               </a:ext>
             </a:extLst>
           </p:cNvPr>
@@ -6016,7 +6016,7 @@
           <p:cNvPr id="4" name="s4-footer">
             <a:extLst xmlns:a="http://schemas.openxmlformats.org/drawingml/2006/main">
               <a:ext uri="{FF2B5EF4-FFF2-40B4-BE49-F238E27FC236}">
-                <a16:creationId xmlns:a16="http://schemas.microsoft.com/office/drawing/2014/main" id="{A62C6112-58BE-4566-9D64-DFBAED37FC2A}"/>
+                <a16:creationId xmlns:a16="http://schemas.microsoft.com/office/drawing/2014/main" id="{849C2999-C899-445C-8247-A7CE78E68E19}"/>
               </a:ext>
             </a:extLst>
           </p:cNvPr>
@@ -6047,7 +6047,7 @@
           <p:cNvPr id="5" name="s4-identity">
             <a:extLst xmlns:a="http://schemas.openxmlformats.org/drawingml/2006/main">
               <a:ext uri="{FF2B5EF4-FFF2-40B4-BE49-F238E27FC236}">
-                <a16:creationId xmlns:a16="http://schemas.microsoft.com/office/drawing/2014/main" id="{91168013-A22B-4536-BC92-2216ED8C93B9}"/>
+                <a16:creationId xmlns:a16="http://schemas.microsoft.com/office/drawing/2014/main" id="{294F0D25-3370-43E3-84A0-FBCEAAFD1B42}"/>
               </a:ext>
             </a:extLst>
           </p:cNvPr>
@@ -6105,7 +6105,7 @@
           <p:cNvPr id="6" name="core-no-0">
             <a:extLst xmlns:a="http://schemas.openxmlformats.org/drawingml/2006/main">
               <a:ext uri="{FF2B5EF4-FFF2-40B4-BE49-F238E27FC236}">
-                <a16:creationId xmlns:a16="http://schemas.microsoft.com/office/drawing/2014/main" id="{64B88FCC-9C6A-4FB2-8A53-D2005CE3D749}"/>
+                <a16:creationId xmlns:a16="http://schemas.microsoft.com/office/drawing/2014/main" id="{DF6A2C68-49CB-4480-AA1A-004EFBEAE9EC}"/>
               </a:ext>
             </a:extLst>
           </p:cNvPr>
@@ -6163,7 +6163,7 @@
           <p:cNvPr id="7" name="core-label-0">
             <a:extLst xmlns:a="http://schemas.openxmlformats.org/drawingml/2006/main">
               <a:ext uri="{FF2B5EF4-FFF2-40B4-BE49-F238E27FC236}">
-                <a16:creationId xmlns:a16="http://schemas.microsoft.com/office/drawing/2014/main" id="{49E67794-DF34-4D5C-9480-92C9D68A0176}"/>
+                <a16:creationId xmlns:a16="http://schemas.microsoft.com/office/drawing/2014/main" id="{117EC9A3-9092-4959-9E1A-F6E9E4166943}"/>
               </a:ext>
             </a:extLst>
           </p:cNvPr>
@@ -6221,7 +6221,7 @@
           <p:cNvPr id="8" name="core-body-0">
             <a:extLst xmlns:a="http://schemas.openxmlformats.org/drawingml/2006/main">
               <a:ext uri="{FF2B5EF4-FFF2-40B4-BE49-F238E27FC236}">
-                <a16:creationId xmlns:a16="http://schemas.microsoft.com/office/drawing/2014/main" id="{F5977CD5-52B1-4BFC-B9EE-D4504965D8C1}"/>
+                <a16:creationId xmlns:a16="http://schemas.microsoft.com/office/drawing/2014/main" id="{0EB4DD88-FA9F-4696-AE10-A1981EFD4540}"/>
               </a:ext>
             </a:extLst>
           </p:cNvPr>
@@ -6285,7 +6285,7 @@
           <p:cNvPr id="9" name="core-no-1">
             <a:extLst xmlns:a="http://schemas.openxmlformats.org/drawingml/2006/main">
               <a:ext uri="{FF2B5EF4-FFF2-40B4-BE49-F238E27FC236}">
-                <a16:creationId xmlns:a16="http://schemas.microsoft.com/office/drawing/2014/main" id="{BCB96CE7-992E-4BF4-88C1-CDCF5031AEA6}"/>
+                <a16:creationId xmlns:a16="http://schemas.microsoft.com/office/drawing/2014/main" id="{E43A921A-F3DF-4FBE-9D47-C0FDF523E2AC}"/>
               </a:ext>
             </a:extLst>
           </p:cNvPr>
@@ -6343,7 +6343,7 @@
           <p:cNvPr id="10" name="core-label-1">
             <a:extLst xmlns:a="http://schemas.openxmlformats.org/drawingml/2006/main">
               <a:ext uri="{FF2B5EF4-FFF2-40B4-BE49-F238E27FC236}">
-                <a16:creationId xmlns:a16="http://schemas.microsoft.com/office/drawing/2014/main" id="{D537C291-1F59-437F-8BF7-DAD61DF93BFD}"/>
+                <a16:creationId xmlns:a16="http://schemas.microsoft.com/office/drawing/2014/main" id="{779D17A7-1E51-43CC-BC04-A90C34CCA1B6}"/>
               </a:ext>
             </a:extLst>
           </p:cNvPr>
@@ -6401,7 +6401,7 @@
           <p:cNvPr id="11" name="core-body-1">
             <a:extLst xmlns:a="http://schemas.openxmlformats.org/drawingml/2006/main">
               <a:ext uri="{FF2B5EF4-FFF2-40B4-BE49-F238E27FC236}">
-                <a16:creationId xmlns:a16="http://schemas.microsoft.com/office/drawing/2014/main" id="{B73EBF40-D068-4AFF-A24A-FC63491C76C8}"/>
+                <a16:creationId xmlns:a16="http://schemas.microsoft.com/office/drawing/2014/main" id="{7C38D355-4118-4765-A75E-BD131EF4A482}"/>
               </a:ext>
             </a:extLst>
           </p:cNvPr>
@@ -6465,7 +6465,7 @@
           <p:cNvPr id="12" name="s4-takeaway-rule">
             <a:extLst xmlns:a="http://schemas.openxmlformats.org/drawingml/2006/main">
               <a:ext uri="{FF2B5EF4-FFF2-40B4-BE49-F238E27FC236}">
-                <a16:creationId xmlns:a16="http://schemas.microsoft.com/office/drawing/2014/main" id="{3F3DE70D-61A2-40FA-AE06-47C4C55FCC1E}"/>
+                <a16:creationId xmlns:a16="http://schemas.microsoft.com/office/drawing/2014/main" id="{D86AD014-7CF0-4026-86AE-433826330542}"/>
               </a:ext>
             </a:extLst>
           </p:cNvPr>
@@ -6498,7 +6498,7 @@
           <p:cNvPr id="13" name="s4-takeaway">
             <a:extLst xmlns:a="http://schemas.openxmlformats.org/drawingml/2006/main">
               <a:ext uri="{FF2B5EF4-FFF2-40B4-BE49-F238E27FC236}">
-                <a16:creationId xmlns:a16="http://schemas.microsoft.com/office/drawing/2014/main" id="{05FB5BEF-B2BB-49DE-ADCE-E58A2C0E323D}"/>
+                <a16:creationId xmlns:a16="http://schemas.microsoft.com/office/drawing/2014/main" id="{D882B2F8-5525-4081-83A5-098A2C40B676}"/>
               </a:ext>
             </a:extLst>
           </p:cNvPr>
@@ -6554,7 +6554,7 @@
     </p:spTree>
     <p:extLst>
       <p:ext uri="{BB962C8B-B14F-4D97-AF65-F5344CB8AC3E}">
-        <p14:creationId xmlns:p14="http://schemas.microsoft.com/office/powerpoint/2010/main" val="1780789441"/>
+        <p14:creationId xmlns:p14="http://schemas.microsoft.com/office/powerpoint/2010/main" val="2011108382"/>
       </p:ext>
     </p:extLst>
   </p:cSld>
@@ -6585,7 +6585,7 @@
           <p:cNvPr id="1" name="s5-rule">
             <a:extLst xmlns:a="http://schemas.openxmlformats.org/drawingml/2006/main">
               <a:ext uri="{FF2B5EF4-FFF2-40B4-BE49-F238E27FC236}">
-                <a16:creationId xmlns:a16="http://schemas.microsoft.com/office/drawing/2014/main" id="{15D64B20-EB03-4203-8BF5-4B1D9D8D291F}"/>
+                <a16:creationId xmlns:a16="http://schemas.microsoft.com/office/drawing/2014/main" id="{BE95AAA5-1FFF-4724-AF15-6D0B8FFAD769}"/>
               </a:ext>
             </a:extLst>
           </p:cNvPr>
@@ -6618,7 +6618,7 @@
           <p:cNvPr id="2" name="s5-eyebrow">
             <a:extLst xmlns:a="http://schemas.openxmlformats.org/drawingml/2006/main">
               <a:ext uri="{FF2B5EF4-FFF2-40B4-BE49-F238E27FC236}">
-                <a16:creationId xmlns:a16="http://schemas.microsoft.com/office/drawing/2014/main" id="{530A8B95-DA16-41C5-BF93-B903D605BE3E}"/>
+                <a16:creationId xmlns:a16="http://schemas.microsoft.com/office/drawing/2014/main" id="{128860CD-9F53-4590-B09C-024A7244CE4A}"/>
               </a:ext>
             </a:extLst>
           </p:cNvPr>
@@ -6676,7 +6676,7 @@
           <p:cNvPr id="3" name="s5-title">
             <a:extLst xmlns:a="http://schemas.openxmlformats.org/drawingml/2006/main">
               <a:ext uri="{FF2B5EF4-FFF2-40B4-BE49-F238E27FC236}">
-                <a16:creationId xmlns:a16="http://schemas.microsoft.com/office/drawing/2014/main" id="{E1CFC241-5179-40F0-B10E-CB080CA1FDF7}"/>
+                <a16:creationId xmlns:a16="http://schemas.microsoft.com/office/drawing/2014/main" id="{253C10F4-8ECE-40A5-9EBA-4C78A113D7D3}"/>
               </a:ext>
             </a:extLst>
           </p:cNvPr>
@@ -6734,7 +6734,7 @@
           <p:cNvPr id="4" name="s5-footer">
             <a:extLst xmlns:a="http://schemas.openxmlformats.org/drawingml/2006/main">
               <a:ext uri="{FF2B5EF4-FFF2-40B4-BE49-F238E27FC236}">
-                <a16:creationId xmlns:a16="http://schemas.microsoft.com/office/drawing/2014/main" id="{AB8C1097-6FB2-407D-A4A7-813C29EA0EC9}"/>
+                <a16:creationId xmlns:a16="http://schemas.microsoft.com/office/drawing/2014/main" id="{8399A3A7-04FE-4F6B-B153-B622156AFA42}"/>
               </a:ext>
             </a:extLst>
           </p:cNvPr>
@@ -6765,7 +6765,7 @@
           <p:cNvPr id="5" name="s5-identity">
             <a:extLst xmlns:a="http://schemas.openxmlformats.org/drawingml/2006/main">
               <a:ext uri="{FF2B5EF4-FFF2-40B4-BE49-F238E27FC236}">
-                <a16:creationId xmlns:a16="http://schemas.microsoft.com/office/drawing/2014/main" id="{236C9A6E-0322-45F8-ACB6-A9C4A201BC30}"/>
+                <a16:creationId xmlns:a16="http://schemas.microsoft.com/office/drawing/2014/main" id="{67806432-4209-4178-A4B6-599CEA980FA1}"/>
               </a:ext>
             </a:extLst>
           </p:cNvPr>
@@ -6823,7 +6823,7 @@
           <p:cNvPr id="6" name="core-no-0">
             <a:extLst xmlns:a="http://schemas.openxmlformats.org/drawingml/2006/main">
               <a:ext uri="{FF2B5EF4-FFF2-40B4-BE49-F238E27FC236}">
-                <a16:creationId xmlns:a16="http://schemas.microsoft.com/office/drawing/2014/main" id="{451FCD2F-FE43-4FE8-A9AF-4D34DD23D07C}"/>
+                <a16:creationId xmlns:a16="http://schemas.microsoft.com/office/drawing/2014/main" id="{9A4FCB2F-C052-4A6E-A9EF-BBD80F21555E}"/>
               </a:ext>
             </a:extLst>
           </p:cNvPr>
@@ -6881,7 +6881,7 @@
           <p:cNvPr id="7" name="core-label-0">
             <a:extLst xmlns:a="http://schemas.openxmlformats.org/drawingml/2006/main">
               <a:ext uri="{FF2B5EF4-FFF2-40B4-BE49-F238E27FC236}">
-                <a16:creationId xmlns:a16="http://schemas.microsoft.com/office/drawing/2014/main" id="{87230F52-1CF5-4965-9CD8-654F83ECFDEF}"/>
+                <a16:creationId xmlns:a16="http://schemas.microsoft.com/office/drawing/2014/main" id="{983CEC44-4151-49F8-A1C9-C63965E6A799}"/>
               </a:ext>
             </a:extLst>
           </p:cNvPr>
@@ -6939,7 +6939,7 @@
           <p:cNvPr id="8" name="core-body-0">
             <a:extLst xmlns:a="http://schemas.openxmlformats.org/drawingml/2006/main">
               <a:ext uri="{FF2B5EF4-FFF2-40B4-BE49-F238E27FC236}">
-                <a16:creationId xmlns:a16="http://schemas.microsoft.com/office/drawing/2014/main" id="{643372C9-B66B-4F7B-8B5C-DE3E6F8D3B61}"/>
+                <a16:creationId xmlns:a16="http://schemas.microsoft.com/office/drawing/2014/main" id="{2A64D0E0-3421-4801-AB62-B68C45C3BE19}"/>
               </a:ext>
             </a:extLst>
           </p:cNvPr>
@@ -7003,7 +7003,7 @@
           <p:cNvPr id="9" name="core-no-1">
             <a:extLst xmlns:a="http://schemas.openxmlformats.org/drawingml/2006/main">
               <a:ext uri="{FF2B5EF4-FFF2-40B4-BE49-F238E27FC236}">
-                <a16:creationId xmlns:a16="http://schemas.microsoft.com/office/drawing/2014/main" id="{62E90A0C-C10A-45C7-A3F8-940EA8AF7EF9}"/>
+                <a16:creationId xmlns:a16="http://schemas.microsoft.com/office/drawing/2014/main" id="{9ACCFCD4-355A-4FEE-8247-BF7F3E5125A9}"/>
               </a:ext>
             </a:extLst>
           </p:cNvPr>
@@ -7061,7 +7061,7 @@
           <p:cNvPr id="10" name="core-body-1">
             <a:extLst xmlns:a="http://schemas.openxmlformats.org/drawingml/2006/main">
               <a:ext uri="{FF2B5EF4-FFF2-40B4-BE49-F238E27FC236}">
-                <a16:creationId xmlns:a16="http://schemas.microsoft.com/office/drawing/2014/main" id="{E81E6E08-98E3-4517-A62F-685374FE0B5B}"/>
+                <a16:creationId xmlns:a16="http://schemas.microsoft.com/office/drawing/2014/main" id="{489C27F6-C993-4DA8-8C11-AB01604C8717}"/>
               </a:ext>
             </a:extLst>
           </p:cNvPr>
@@ -7125,7 +7125,7 @@
           <p:cNvPr id="11" name="s5-takeaway-rule">
             <a:extLst xmlns:a="http://schemas.openxmlformats.org/drawingml/2006/main">
               <a:ext uri="{FF2B5EF4-FFF2-40B4-BE49-F238E27FC236}">
-                <a16:creationId xmlns:a16="http://schemas.microsoft.com/office/drawing/2014/main" id="{FCD3830D-49DC-432F-9F61-9E3CE0ABA9A3}"/>
+                <a16:creationId xmlns:a16="http://schemas.microsoft.com/office/drawing/2014/main" id="{5690B3F0-2167-4F7B-9D2C-C9D4C0D79B79}"/>
               </a:ext>
             </a:extLst>
           </p:cNvPr>
@@ -7158,7 +7158,7 @@
           <p:cNvPr id="12" name="s5-takeaway">
             <a:extLst xmlns:a="http://schemas.openxmlformats.org/drawingml/2006/main">
               <a:ext uri="{FF2B5EF4-FFF2-40B4-BE49-F238E27FC236}">
-                <a16:creationId xmlns:a16="http://schemas.microsoft.com/office/drawing/2014/main" id="{231CF4D3-8244-4EC2-ABB5-898FBFAA5C33}"/>
+                <a16:creationId xmlns:a16="http://schemas.microsoft.com/office/drawing/2014/main" id="{784689CA-F645-45BF-9300-8E167806E7B9}"/>
               </a:ext>
             </a:extLst>
           </p:cNvPr>
@@ -7214,7 +7214,7 @@
     </p:spTree>
     <p:extLst>
       <p:ext uri="{BB962C8B-B14F-4D97-AF65-F5344CB8AC3E}">
-        <p14:creationId xmlns:p14="http://schemas.microsoft.com/office/powerpoint/2010/main" val="647607438"/>
+        <p14:creationId xmlns:p14="http://schemas.microsoft.com/office/powerpoint/2010/main" val="349076668"/>
       </p:ext>
     </p:extLst>
   </p:cSld>
@@ -7245,7 +7245,7 @@
           <p:cNvPr id="1" name="s6-rule">
             <a:extLst xmlns:a="http://schemas.openxmlformats.org/drawingml/2006/main">
               <a:ext uri="{FF2B5EF4-FFF2-40B4-BE49-F238E27FC236}">
-                <a16:creationId xmlns:a16="http://schemas.microsoft.com/office/drawing/2014/main" id="{B89C13FE-2C05-4F0A-908F-1071684F6B0B}"/>
+                <a16:creationId xmlns:a16="http://schemas.microsoft.com/office/drawing/2014/main" id="{19E78C40-B583-4A0B-AC30-9E8FD96D3052}"/>
               </a:ext>
             </a:extLst>
           </p:cNvPr>
@@ -7278,7 +7278,7 @@
           <p:cNvPr id="2" name="s6-eyebrow">
             <a:extLst xmlns:a="http://schemas.openxmlformats.org/drawingml/2006/main">
               <a:ext uri="{FF2B5EF4-FFF2-40B4-BE49-F238E27FC236}">
-                <a16:creationId xmlns:a16="http://schemas.microsoft.com/office/drawing/2014/main" id="{475CA701-E092-4B50-A8FA-F70E547D18C4}"/>
+                <a16:creationId xmlns:a16="http://schemas.microsoft.com/office/drawing/2014/main" id="{443CEB9F-DA28-4106-8D4B-08AE77A4A567}"/>
               </a:ext>
             </a:extLst>
           </p:cNvPr>
@@ -7336,7 +7336,7 @@
           <p:cNvPr id="3" name="s6-title">
             <a:extLst xmlns:a="http://schemas.openxmlformats.org/drawingml/2006/main">
               <a:ext uri="{FF2B5EF4-FFF2-40B4-BE49-F238E27FC236}">
-                <a16:creationId xmlns:a16="http://schemas.microsoft.com/office/drawing/2014/main" id="{FA3E1D25-85A5-48D5-BA77-8624806DE1EB}"/>
+                <a16:creationId xmlns:a16="http://schemas.microsoft.com/office/drawing/2014/main" id="{CFA9B5EA-C2DD-4E8A-8510-F9A823BD14F3}"/>
               </a:ext>
             </a:extLst>
           </p:cNvPr>
@@ -7394,7 +7394,7 @@
           <p:cNvPr id="4" name="s6-footer">
             <a:extLst xmlns:a="http://schemas.openxmlformats.org/drawingml/2006/main">
               <a:ext uri="{FF2B5EF4-FFF2-40B4-BE49-F238E27FC236}">
-                <a16:creationId xmlns:a16="http://schemas.microsoft.com/office/drawing/2014/main" id="{9C9CBA17-B83B-4307-ACAB-165E7FEE8841}"/>
+                <a16:creationId xmlns:a16="http://schemas.microsoft.com/office/drawing/2014/main" id="{EBFBF6D0-1C2C-4D18-B736-FA1982D66493}"/>
               </a:ext>
             </a:extLst>
           </p:cNvPr>
@@ -7425,7 +7425,7 @@
           <p:cNvPr id="5" name="s6-identity">
             <a:extLst xmlns:a="http://schemas.openxmlformats.org/drawingml/2006/main">
               <a:ext uri="{FF2B5EF4-FFF2-40B4-BE49-F238E27FC236}">
-                <a16:creationId xmlns:a16="http://schemas.microsoft.com/office/drawing/2014/main" id="{88309D43-5F52-4E81-8D4A-4DCC1CC0E6DB}"/>
+                <a16:creationId xmlns:a16="http://schemas.microsoft.com/office/drawing/2014/main" id="{84AD0B97-459A-4183-933E-ED6BA726FB47}"/>
               </a:ext>
             </a:extLst>
           </p:cNvPr>
@@ -7483,7 +7483,7 @@
           <p:cNvPr id="6" name="core-no-0">
             <a:extLst xmlns:a="http://schemas.openxmlformats.org/drawingml/2006/main">
               <a:ext uri="{FF2B5EF4-FFF2-40B4-BE49-F238E27FC236}">
-                <a16:creationId xmlns:a16="http://schemas.microsoft.com/office/drawing/2014/main" id="{56895A0A-E98E-44CA-904D-C8AF351F31D8}"/>
+                <a16:creationId xmlns:a16="http://schemas.microsoft.com/office/drawing/2014/main" id="{4366EDB2-4ED7-40C9-9253-24B3665E740F}"/>
               </a:ext>
             </a:extLst>
           </p:cNvPr>
@@ -7541,7 +7541,7 @@
           <p:cNvPr id="7" name="core-label-0">
             <a:extLst xmlns:a="http://schemas.openxmlformats.org/drawingml/2006/main">
               <a:ext uri="{FF2B5EF4-FFF2-40B4-BE49-F238E27FC236}">
-                <a16:creationId xmlns:a16="http://schemas.microsoft.com/office/drawing/2014/main" id="{65DA03DA-2E4E-423F-8876-0A6AFC51A564}"/>
+                <a16:creationId xmlns:a16="http://schemas.microsoft.com/office/drawing/2014/main" id="{55F08D6D-A52C-48ED-A355-E948CA0F48F6}"/>
               </a:ext>
             </a:extLst>
           </p:cNvPr>
@@ -7599,7 +7599,7 @@
           <p:cNvPr id="8" name="core-body-0">
             <a:extLst xmlns:a="http://schemas.openxmlformats.org/drawingml/2006/main">
               <a:ext uri="{FF2B5EF4-FFF2-40B4-BE49-F238E27FC236}">
-                <a16:creationId xmlns:a16="http://schemas.microsoft.com/office/drawing/2014/main" id="{FD5CAD14-78A0-49DF-ABA1-844750E804E0}"/>
+                <a16:creationId xmlns:a16="http://schemas.microsoft.com/office/drawing/2014/main" id="{4264A951-3150-48DF-B55D-318BDA9DBDE9}"/>
               </a:ext>
             </a:extLst>
           </p:cNvPr>
@@ -7663,7 +7663,7 @@
           <p:cNvPr id="9" name="core-no-1">
             <a:extLst xmlns:a="http://schemas.openxmlformats.org/drawingml/2006/main">
               <a:ext uri="{FF2B5EF4-FFF2-40B4-BE49-F238E27FC236}">
-                <a16:creationId xmlns:a16="http://schemas.microsoft.com/office/drawing/2014/main" id="{9F971B15-72B5-4440-B3FC-DA9E047283A5}"/>
+                <a16:creationId xmlns:a16="http://schemas.microsoft.com/office/drawing/2014/main" id="{DB27CEAC-011E-4E10-94C6-058136FEE2AC}"/>
               </a:ext>
             </a:extLst>
           </p:cNvPr>
@@ -7721,7 +7721,7 @@
           <p:cNvPr id="10" name="core-body-1">
             <a:extLst xmlns:a="http://schemas.openxmlformats.org/drawingml/2006/main">
               <a:ext uri="{FF2B5EF4-FFF2-40B4-BE49-F238E27FC236}">
-                <a16:creationId xmlns:a16="http://schemas.microsoft.com/office/drawing/2014/main" id="{7D86B024-BD18-478E-A692-1E091D3D8093}"/>
+                <a16:creationId xmlns:a16="http://schemas.microsoft.com/office/drawing/2014/main" id="{84F88597-ABB3-4547-9C87-CAF836F0955B}"/>
               </a:ext>
             </a:extLst>
           </p:cNvPr>
@@ -7785,7 +7785,7 @@
           <p:cNvPr id="11" name="core-no-2">
             <a:extLst xmlns:a="http://schemas.openxmlformats.org/drawingml/2006/main">
               <a:ext uri="{FF2B5EF4-FFF2-40B4-BE49-F238E27FC236}">
-                <a16:creationId xmlns:a16="http://schemas.microsoft.com/office/drawing/2014/main" id="{CDD040CD-B3BF-48E5-97EA-D609447A2E4B}"/>
+                <a16:creationId xmlns:a16="http://schemas.microsoft.com/office/drawing/2014/main" id="{F489D427-2763-486E-AE89-02D70F4953ED}"/>
               </a:ext>
             </a:extLst>
           </p:cNvPr>
@@ -7843,7 +7843,7 @@
           <p:cNvPr id="12" name="core-body-2">
             <a:extLst xmlns:a="http://schemas.openxmlformats.org/drawingml/2006/main">
               <a:ext uri="{FF2B5EF4-FFF2-40B4-BE49-F238E27FC236}">
-                <a16:creationId xmlns:a16="http://schemas.microsoft.com/office/drawing/2014/main" id="{4753B368-3E81-40ED-970B-8413F0B0C606}"/>
+                <a16:creationId xmlns:a16="http://schemas.microsoft.com/office/drawing/2014/main" id="{781995EF-2F3D-42B8-AA7D-56202E5BB254}"/>
               </a:ext>
             </a:extLst>
           </p:cNvPr>
@@ -7907,7 +7907,7 @@
           <p:cNvPr id="13" name="s6-takeaway-rule">
             <a:extLst xmlns:a="http://schemas.openxmlformats.org/drawingml/2006/main">
               <a:ext uri="{FF2B5EF4-FFF2-40B4-BE49-F238E27FC236}">
-                <a16:creationId xmlns:a16="http://schemas.microsoft.com/office/drawing/2014/main" id="{958D5798-6EAE-4E79-BFE4-9F24C4515EB9}"/>
+                <a16:creationId xmlns:a16="http://schemas.microsoft.com/office/drawing/2014/main" id="{B8F01640-0226-41F4-B025-2E69204ED8C1}"/>
               </a:ext>
             </a:extLst>
           </p:cNvPr>
@@ -7940,7 +7940,7 @@
           <p:cNvPr id="14" name="s6-takeaway">
             <a:extLst xmlns:a="http://schemas.openxmlformats.org/drawingml/2006/main">
               <a:ext uri="{FF2B5EF4-FFF2-40B4-BE49-F238E27FC236}">
-                <a16:creationId xmlns:a16="http://schemas.microsoft.com/office/drawing/2014/main" id="{2812C41E-BE96-4FB2-88A9-BCCF967E69EE}"/>
+                <a16:creationId xmlns:a16="http://schemas.microsoft.com/office/drawing/2014/main" id="{DC7DFACB-D63D-4808-A40F-83884131C437}"/>
               </a:ext>
             </a:extLst>
           </p:cNvPr>
@@ -7996,7 +7996,7 @@
     </p:spTree>
     <p:extLst>
       <p:ext uri="{BB962C8B-B14F-4D97-AF65-F5344CB8AC3E}">
-        <p14:creationId xmlns:p14="http://schemas.microsoft.com/office/powerpoint/2010/main" val="1214345831"/>
+        <p14:creationId xmlns:p14="http://schemas.microsoft.com/office/powerpoint/2010/main" val="964197686"/>
       </p:ext>
     </p:extLst>
   </p:cSld>
@@ -8027,7 +8027,7 @@
           <p:cNvPr id="1" name="s7-rule">
             <a:extLst xmlns:a="http://schemas.openxmlformats.org/drawingml/2006/main">
               <a:ext uri="{FF2B5EF4-FFF2-40B4-BE49-F238E27FC236}">
-                <a16:creationId xmlns:a16="http://schemas.microsoft.com/office/drawing/2014/main" id="{D7F76C75-6852-4EC2-8A6D-B2EC31BD2DCC}"/>
+                <a16:creationId xmlns:a16="http://schemas.microsoft.com/office/drawing/2014/main" id="{5144E4E2-1D56-4074-9E50-C455C8798A0B}"/>
               </a:ext>
             </a:extLst>
           </p:cNvPr>
@@ -8060,7 +8060,7 @@
           <p:cNvPr id="2" name="s7-eyebrow">
             <a:extLst xmlns:a="http://schemas.openxmlformats.org/drawingml/2006/main">
               <a:ext uri="{FF2B5EF4-FFF2-40B4-BE49-F238E27FC236}">
-                <a16:creationId xmlns:a16="http://schemas.microsoft.com/office/drawing/2014/main" id="{E4A2C3D5-C76C-4AE3-9692-1FF94CFEFD09}"/>
+                <a16:creationId xmlns:a16="http://schemas.microsoft.com/office/drawing/2014/main" id="{4BA73460-C130-4288-B3DB-58983B55A4D7}"/>
               </a:ext>
             </a:extLst>
           </p:cNvPr>
@@ -8118,7 +8118,7 @@
           <p:cNvPr id="3" name="s7-title">
             <a:extLst xmlns:a="http://schemas.openxmlformats.org/drawingml/2006/main">
               <a:ext uri="{FF2B5EF4-FFF2-40B4-BE49-F238E27FC236}">
-                <a16:creationId xmlns:a16="http://schemas.microsoft.com/office/drawing/2014/main" id="{2A9DED01-2C45-4E9D-A86C-DCF2AD505687}"/>
+                <a16:creationId xmlns:a16="http://schemas.microsoft.com/office/drawing/2014/main" id="{0D135EC8-2B80-4561-B548-9A8AD0D35DFF}"/>
               </a:ext>
             </a:extLst>
           </p:cNvPr>
@@ -8176,7 +8176,7 @@
           <p:cNvPr id="4" name="s7-footer">
             <a:extLst xmlns:a="http://schemas.openxmlformats.org/drawingml/2006/main">
               <a:ext uri="{FF2B5EF4-FFF2-40B4-BE49-F238E27FC236}">
-                <a16:creationId xmlns:a16="http://schemas.microsoft.com/office/drawing/2014/main" id="{E45CED33-ACD8-452C-8361-7524E61C5127}"/>
+                <a16:creationId xmlns:a16="http://schemas.microsoft.com/office/drawing/2014/main" id="{895B2CC0-FBD8-4A70-B817-41DF1E90BFF3}"/>
               </a:ext>
             </a:extLst>
           </p:cNvPr>
@@ -8207,7 +8207,7 @@
           <p:cNvPr id="5" name="s7-identity">
             <a:extLst xmlns:a="http://schemas.openxmlformats.org/drawingml/2006/main">
               <a:ext uri="{FF2B5EF4-FFF2-40B4-BE49-F238E27FC236}">
-                <a16:creationId xmlns:a16="http://schemas.microsoft.com/office/drawing/2014/main" id="{64ED8B03-8C16-4126-9AAA-060A23EBE256}"/>
+                <a16:creationId xmlns:a16="http://schemas.microsoft.com/office/drawing/2014/main" id="{5A58C81D-D57C-4F6E-8821-C84B195766EE}"/>
               </a:ext>
             </a:extLst>
           </p:cNvPr>
@@ -8265,7 +8265,7 @@
           <p:cNvPr id="6" name="core-no-0">
             <a:extLst xmlns:a="http://schemas.openxmlformats.org/drawingml/2006/main">
               <a:ext uri="{FF2B5EF4-FFF2-40B4-BE49-F238E27FC236}">
-                <a16:creationId xmlns:a16="http://schemas.microsoft.com/office/drawing/2014/main" id="{789B2881-9EFA-4C9F-B341-632AA5DD06F0}"/>
+                <a16:creationId xmlns:a16="http://schemas.microsoft.com/office/drawing/2014/main" id="{3377F3D3-B214-4C30-B4F0-5B9DFD45F917}"/>
               </a:ext>
             </a:extLst>
           </p:cNvPr>
@@ -8323,7 +8323,7 @@
           <p:cNvPr id="7" name="core-label-0">
             <a:extLst xmlns:a="http://schemas.openxmlformats.org/drawingml/2006/main">
               <a:ext uri="{FF2B5EF4-FFF2-40B4-BE49-F238E27FC236}">
-                <a16:creationId xmlns:a16="http://schemas.microsoft.com/office/drawing/2014/main" id="{15AAE112-2510-4D78-A288-7EFF5435B2F2}"/>
+                <a16:creationId xmlns:a16="http://schemas.microsoft.com/office/drawing/2014/main" id="{39825A1D-DE87-4DF1-A437-449656470193}"/>
               </a:ext>
             </a:extLst>
           </p:cNvPr>
@@ -8381,7 +8381,7 @@
           <p:cNvPr id="8" name="core-body-0">
             <a:extLst xmlns:a="http://schemas.openxmlformats.org/drawingml/2006/main">
               <a:ext uri="{FF2B5EF4-FFF2-40B4-BE49-F238E27FC236}">
-                <a16:creationId xmlns:a16="http://schemas.microsoft.com/office/drawing/2014/main" id="{4B5CE639-F446-42E5-A774-5A9BD8EADBD4}"/>
+                <a16:creationId xmlns:a16="http://schemas.microsoft.com/office/drawing/2014/main" id="{799D59B6-60DA-4DAF-ABCF-00DF1A5A2114}"/>
               </a:ext>
             </a:extLst>
           </p:cNvPr>
@@ -8445,7 +8445,7 @@
           <p:cNvPr id="9" name="core-no-1">
             <a:extLst xmlns:a="http://schemas.openxmlformats.org/drawingml/2006/main">
               <a:ext uri="{FF2B5EF4-FFF2-40B4-BE49-F238E27FC236}">
-                <a16:creationId xmlns:a16="http://schemas.microsoft.com/office/drawing/2014/main" id="{BE12B830-AF8F-4392-BB13-025411436CF0}"/>
+                <a16:creationId xmlns:a16="http://schemas.microsoft.com/office/drawing/2014/main" id="{CCA92710-B3D1-4F99-A6B2-3DE181CFD3DE}"/>
               </a:ext>
             </a:extLst>
           </p:cNvPr>
@@ -8503,7 +8503,7 @@
           <p:cNvPr id="10" name="core-body-1">
             <a:extLst xmlns:a="http://schemas.openxmlformats.org/drawingml/2006/main">
               <a:ext uri="{FF2B5EF4-FFF2-40B4-BE49-F238E27FC236}">
-                <a16:creationId xmlns:a16="http://schemas.microsoft.com/office/drawing/2014/main" id="{A6C44B35-9DE5-43E6-B67A-A41BB8378DD4}"/>
+                <a16:creationId xmlns:a16="http://schemas.microsoft.com/office/drawing/2014/main" id="{CAA9E5E1-D7DC-48E2-BE45-D7DC906DF13C}"/>
               </a:ext>
             </a:extLst>
           </p:cNvPr>
@@ -8567,7 +8567,7 @@
           <p:cNvPr id="11" name="s7-takeaway-rule">
             <a:extLst xmlns:a="http://schemas.openxmlformats.org/drawingml/2006/main">
               <a:ext uri="{FF2B5EF4-FFF2-40B4-BE49-F238E27FC236}">
-                <a16:creationId xmlns:a16="http://schemas.microsoft.com/office/drawing/2014/main" id="{F3A71635-1C50-46AF-9440-F1717CF340F7}"/>
+                <a16:creationId xmlns:a16="http://schemas.microsoft.com/office/drawing/2014/main" id="{9C732B8F-B1D1-4353-8463-8AEA08E68382}"/>
               </a:ext>
             </a:extLst>
           </p:cNvPr>
@@ -8600,7 +8600,7 @@
           <p:cNvPr id="12" name="s7-takeaway">
             <a:extLst xmlns:a="http://schemas.openxmlformats.org/drawingml/2006/main">
               <a:ext uri="{FF2B5EF4-FFF2-40B4-BE49-F238E27FC236}">
-                <a16:creationId xmlns:a16="http://schemas.microsoft.com/office/drawing/2014/main" id="{896A0C13-F1F3-4EEF-91C0-C33FA23D0569}"/>
+                <a16:creationId xmlns:a16="http://schemas.microsoft.com/office/drawing/2014/main" id="{77689C66-C543-43D0-A2FA-197CD672B8F4}"/>
               </a:ext>
             </a:extLst>
           </p:cNvPr>
@@ -8656,7 +8656,7 @@
     </p:spTree>
     <p:extLst>
       <p:ext uri="{BB962C8B-B14F-4D97-AF65-F5344CB8AC3E}">
-        <p14:creationId xmlns:p14="http://schemas.microsoft.com/office/powerpoint/2010/main" val="624585734"/>
+        <p14:creationId xmlns:p14="http://schemas.microsoft.com/office/powerpoint/2010/main" val="2048023601"/>
       </p:ext>
     </p:extLst>
   </p:cSld>
@@ -8687,7 +8687,7 @@
           <p:cNvPr id="1" name="s8-rule">
             <a:extLst xmlns:a="http://schemas.openxmlformats.org/drawingml/2006/main">
               <a:ext uri="{FF2B5EF4-FFF2-40B4-BE49-F238E27FC236}">
-                <a16:creationId xmlns:a16="http://schemas.microsoft.com/office/drawing/2014/main" id="{F0DC18B1-95A5-48BB-8C28-B36BAF3495EF}"/>
+                <a16:creationId xmlns:a16="http://schemas.microsoft.com/office/drawing/2014/main" id="{AC83D760-25F6-4026-80A5-CB312CAF6BCC}"/>
               </a:ext>
             </a:extLst>
           </p:cNvPr>
@@ -8720,7 +8720,7 @@
           <p:cNvPr id="2" name="s8-eyebrow">
             <a:extLst xmlns:a="http://schemas.openxmlformats.org/drawingml/2006/main">
               <a:ext uri="{FF2B5EF4-FFF2-40B4-BE49-F238E27FC236}">
-                <a16:creationId xmlns:a16="http://schemas.microsoft.com/office/drawing/2014/main" id="{4F26F1BC-05C5-4817-A4CF-0CA280E01AC6}"/>
+                <a16:creationId xmlns:a16="http://schemas.microsoft.com/office/drawing/2014/main" id="{9CC0C1C2-B089-432C-8DA0-61E7ACA03373}"/>
               </a:ext>
             </a:extLst>
           </p:cNvPr>
@@ -8778,7 +8778,7 @@
           <p:cNvPr id="3" name="s8-title">
             <a:extLst xmlns:a="http://schemas.openxmlformats.org/drawingml/2006/main">
               <a:ext uri="{FF2B5EF4-FFF2-40B4-BE49-F238E27FC236}">
-                <a16:creationId xmlns:a16="http://schemas.microsoft.com/office/drawing/2014/main" id="{90CB3C5E-15D8-4008-B064-8B6150451B37}"/>
+                <a16:creationId xmlns:a16="http://schemas.microsoft.com/office/drawing/2014/main" id="{5813C9DC-C7B8-402B-BF2E-7ACE0FEB095A}"/>
               </a:ext>
             </a:extLst>
           </p:cNvPr>
@@ -8836,7 +8836,7 @@
           <p:cNvPr id="4" name="s8-footer">
             <a:extLst xmlns:a="http://schemas.openxmlformats.org/drawingml/2006/main">
               <a:ext uri="{FF2B5EF4-FFF2-40B4-BE49-F238E27FC236}">
-                <a16:creationId xmlns:a16="http://schemas.microsoft.com/office/drawing/2014/main" id="{BB2441BB-7813-4CC9-B1F1-FB3E0FA8527F}"/>
+                <a16:creationId xmlns:a16="http://schemas.microsoft.com/office/drawing/2014/main" id="{8DC08FD6-BEF8-4407-9753-B3E6D246DAD9}"/>
               </a:ext>
             </a:extLst>
           </p:cNvPr>
@@ -8867,7 +8867,7 @@
           <p:cNvPr id="5" name="s8-identity">
             <a:extLst xmlns:a="http://schemas.openxmlformats.org/drawingml/2006/main">
               <a:ext uri="{FF2B5EF4-FFF2-40B4-BE49-F238E27FC236}">
-                <a16:creationId xmlns:a16="http://schemas.microsoft.com/office/drawing/2014/main" id="{A5D275D7-7E60-4A6B-86AC-061379C173DA}"/>
+                <a16:creationId xmlns:a16="http://schemas.microsoft.com/office/drawing/2014/main" id="{89248F82-1B7F-4F09-9943-277162A6F2EA}"/>
               </a:ext>
             </a:extLst>
           </p:cNvPr>
@@ -8925,7 +8925,7 @@
           <p:cNvPr id="6" name="core-no-0">
             <a:extLst xmlns:a="http://schemas.openxmlformats.org/drawingml/2006/main">
               <a:ext uri="{FF2B5EF4-FFF2-40B4-BE49-F238E27FC236}">
-                <a16:creationId xmlns:a16="http://schemas.microsoft.com/office/drawing/2014/main" id="{A9C54A98-6C2C-4D25-9889-16A7908AF740}"/>
+                <a16:creationId xmlns:a16="http://schemas.microsoft.com/office/drawing/2014/main" id="{B70ED49C-A26B-4C55-867F-84B83C3B917D}"/>
               </a:ext>
             </a:extLst>
           </p:cNvPr>
@@ -8983,7 +8983,7 @@
           <p:cNvPr id="7" name="core-label-0">
             <a:extLst xmlns:a="http://schemas.openxmlformats.org/drawingml/2006/main">
               <a:ext uri="{FF2B5EF4-FFF2-40B4-BE49-F238E27FC236}">
-                <a16:creationId xmlns:a16="http://schemas.microsoft.com/office/drawing/2014/main" id="{08A1F8EC-1E24-4F20-847D-FC5D739627DB}"/>
+                <a16:creationId xmlns:a16="http://schemas.microsoft.com/office/drawing/2014/main" id="{2CA61665-303E-4024-986E-B497AFE3E899}"/>
               </a:ext>
             </a:extLst>
           </p:cNvPr>
@@ -9041,7 +9041,7 @@
           <p:cNvPr id="8" name="core-body-0">
             <a:extLst xmlns:a="http://schemas.openxmlformats.org/drawingml/2006/main">
               <a:ext uri="{FF2B5EF4-FFF2-40B4-BE49-F238E27FC236}">
-                <a16:creationId xmlns:a16="http://schemas.microsoft.com/office/drawing/2014/main" id="{B832D841-9AC0-4222-8583-B665DD4BD2C3}"/>
+                <a16:creationId xmlns:a16="http://schemas.microsoft.com/office/drawing/2014/main" id="{03896D37-FE04-4118-947C-CFBE69BB2F74}"/>
               </a:ext>
             </a:extLst>
           </p:cNvPr>
@@ -9105,7 +9105,7 @@
           <p:cNvPr id="9" name="s8-takeaway-rule">
             <a:extLst xmlns:a="http://schemas.openxmlformats.org/drawingml/2006/main">
               <a:ext uri="{FF2B5EF4-FFF2-40B4-BE49-F238E27FC236}">
-                <a16:creationId xmlns:a16="http://schemas.microsoft.com/office/drawing/2014/main" id="{C4939889-B6E0-4ED5-8B45-7F00920FE2AC}"/>
+                <a16:creationId xmlns:a16="http://schemas.microsoft.com/office/drawing/2014/main" id="{727B8975-34F6-458E-981A-CE55186999EA}"/>
               </a:ext>
             </a:extLst>
           </p:cNvPr>
@@ -9138,7 +9138,7 @@
           <p:cNvPr id="10" name="s8-takeaway">
             <a:extLst xmlns:a="http://schemas.openxmlformats.org/drawingml/2006/main">
               <a:ext uri="{FF2B5EF4-FFF2-40B4-BE49-F238E27FC236}">
-                <a16:creationId xmlns:a16="http://schemas.microsoft.com/office/drawing/2014/main" id="{1E6D77B8-82A0-4C6F-8BC6-CA3D0C31374F}"/>
+                <a16:creationId xmlns:a16="http://schemas.microsoft.com/office/drawing/2014/main" id="{9040916B-12EE-473D-B8F7-9C5F99C441DA}"/>
               </a:ext>
             </a:extLst>
           </p:cNvPr>
@@ -9194,7 +9194,7 @@
     </p:spTree>
     <p:extLst>
       <p:ext uri="{BB962C8B-B14F-4D97-AF65-F5344CB8AC3E}">
-        <p14:creationId xmlns:p14="http://schemas.microsoft.com/office/powerpoint/2010/main" val="985131578"/>
+        <p14:creationId xmlns:p14="http://schemas.microsoft.com/office/powerpoint/2010/main" val="1173507332"/>
       </p:ext>
     </p:extLst>
   </p:cSld>
@@ -9225,7 +9225,7 @@
           <p:cNvPr id="1" name="s9-rule">
             <a:extLst xmlns:a="http://schemas.openxmlformats.org/drawingml/2006/main">
               <a:ext uri="{FF2B5EF4-FFF2-40B4-BE49-F238E27FC236}">
-                <a16:creationId xmlns:a16="http://schemas.microsoft.com/office/drawing/2014/main" id="{28B5472D-AD22-4583-A83D-D57B4B02A781}"/>
+                <a16:creationId xmlns:a16="http://schemas.microsoft.com/office/drawing/2014/main" id="{0FFAE208-BC19-4EAD-85C0-960331B51EF5}"/>
               </a:ext>
             </a:extLst>
           </p:cNvPr>
@@ -9258,7 +9258,7 @@
           <p:cNvPr id="2" name="s9-eyebrow">
             <a:extLst xmlns:a="http://schemas.openxmlformats.org/drawingml/2006/main">
               <a:ext uri="{FF2B5EF4-FFF2-40B4-BE49-F238E27FC236}">
-                <a16:creationId xmlns:a16="http://schemas.microsoft.com/office/drawing/2014/main" id="{C0314E7D-CFF5-4F13-A3F1-DF08F2F17474}"/>
+                <a16:creationId xmlns:a16="http://schemas.microsoft.com/office/drawing/2014/main" id="{7ADA3782-E439-4308-93D4-75D7C62C6E7E}"/>
               </a:ext>
             </a:extLst>
           </p:cNvPr>
@@ -9316,7 +9316,7 @@
           <p:cNvPr id="3" name="s9-title">
             <a:extLst xmlns:a="http://schemas.openxmlformats.org/drawingml/2006/main">
               <a:ext uri="{FF2B5EF4-FFF2-40B4-BE49-F238E27FC236}">
-                <a16:creationId xmlns:a16="http://schemas.microsoft.com/office/drawing/2014/main" id="{048CF735-6CC8-4461-9F9F-60436F4F5761}"/>
+                <a16:creationId xmlns:a16="http://schemas.microsoft.com/office/drawing/2014/main" id="{75559509-26A4-45E6-9776-17B894275B6A}"/>
               </a:ext>
             </a:extLst>
           </p:cNvPr>
@@ -9374,7 +9374,7 @@
           <p:cNvPr id="4" name="s9-footer">
             <a:extLst xmlns:a="http://schemas.openxmlformats.org/drawingml/2006/main">
               <a:ext uri="{FF2B5EF4-FFF2-40B4-BE49-F238E27FC236}">
-                <a16:creationId xmlns:a16="http://schemas.microsoft.com/office/drawing/2014/main" id="{E2829CF2-F4D1-489C-BC56-B2D60C1640DE}"/>
+                <a16:creationId xmlns:a16="http://schemas.microsoft.com/office/drawing/2014/main" id="{539BC7E4-A1C4-47A9-A1C2-096EF302FB7F}"/>
               </a:ext>
             </a:extLst>
           </p:cNvPr>
@@ -9405,7 +9405,7 @@
           <p:cNvPr id="5" name="s9-identity">
             <a:extLst xmlns:a="http://schemas.openxmlformats.org/drawingml/2006/main">
               <a:ext uri="{FF2B5EF4-FFF2-40B4-BE49-F238E27FC236}">
-                <a16:creationId xmlns:a16="http://schemas.microsoft.com/office/drawing/2014/main" id="{43172398-6A0C-4ED4-ACC5-AB68158D3C58}"/>
+                <a16:creationId xmlns:a16="http://schemas.microsoft.com/office/drawing/2014/main" id="{F00E26BB-718B-4A09-8583-881791C3C19B}"/>
               </a:ext>
             </a:extLst>
           </p:cNvPr>
@@ -9463,7 +9463,7 @@
           <p:cNvPr id="6" name="case-title">
             <a:extLst xmlns:a="http://schemas.openxmlformats.org/drawingml/2006/main">
               <a:ext uri="{FF2B5EF4-FFF2-40B4-BE49-F238E27FC236}">
-                <a16:creationId xmlns:a16="http://schemas.microsoft.com/office/drawing/2014/main" id="{F618FA31-126B-47A5-A9F8-E317E80AA482}"/>
+                <a16:creationId xmlns:a16="http://schemas.microsoft.com/office/drawing/2014/main" id="{E67E077B-559C-4980-9CFB-7EC8FA18AD6B}"/>
               </a:ext>
             </a:extLst>
           </p:cNvPr>
@@ -9527,7 +9527,7 @@
           <p:cNvPr id="7" name="case-row-0">
             <a:extLst xmlns:a="http://schemas.openxmlformats.org/drawingml/2006/main">
               <a:ext uri="{FF2B5EF4-FFF2-40B4-BE49-F238E27FC236}">
-                <a16:creationId xmlns:a16="http://schemas.microsoft.com/office/drawing/2014/main" id="{8783FDAC-3D5F-490C-890E-F38C601921DF}"/>
+                <a16:creationId xmlns:a16="http://schemas.microsoft.com/office/drawing/2014/main" id="{10B91FB3-08CB-4140-9C10-863C6820FE6B}"/>
               </a:ext>
             </a:extLst>
           </p:cNvPr>
@@ -9591,7 +9591,7 @@
           <p:cNvPr id="8" name="case-row-1">
             <a:extLst xmlns:a="http://schemas.openxmlformats.org/drawingml/2006/main">
               <a:ext uri="{FF2B5EF4-FFF2-40B4-BE49-F238E27FC236}">
-                <a16:creationId xmlns:a16="http://schemas.microsoft.com/office/drawing/2014/main" id="{6583D2AC-62BA-4D33-85B1-5E0E128D0081}"/>
+                <a16:creationId xmlns:a16="http://schemas.microsoft.com/office/drawing/2014/main" id="{03A96917-C46F-43DE-80F9-B0A19E6C5736}"/>
               </a:ext>
             </a:extLst>
           </p:cNvPr>
@@ -9655,7 +9655,7 @@
           <p:cNvPr id="9" name="s9-takeaway-rule">
             <a:extLst xmlns:a="http://schemas.openxmlformats.org/drawingml/2006/main">
               <a:ext uri="{FF2B5EF4-FFF2-40B4-BE49-F238E27FC236}">
-                <a16:creationId xmlns:a16="http://schemas.microsoft.com/office/drawing/2014/main" id="{A11DE090-9484-4DB8-855F-1F68CEC460DC}"/>
+                <a16:creationId xmlns:a16="http://schemas.microsoft.com/office/drawing/2014/main" id="{93207596-06C3-4137-B969-BD2765FD01B8}"/>
               </a:ext>
             </a:extLst>
           </p:cNvPr>
@@ -9688,7 +9688,7 @@
           <p:cNvPr id="10" name="s9-takeaway">
             <a:extLst xmlns:a="http://schemas.openxmlformats.org/drawingml/2006/main">
               <a:ext uri="{FF2B5EF4-FFF2-40B4-BE49-F238E27FC236}">
-                <a16:creationId xmlns:a16="http://schemas.microsoft.com/office/drawing/2014/main" id="{107F1D87-BA6A-40AD-B938-EF8CCB7FAA4D}"/>
+                <a16:creationId xmlns:a16="http://schemas.microsoft.com/office/drawing/2014/main" id="{391BD290-DE2C-4D7B-AB8D-EF44206C9A3B}"/>
               </a:ext>
             </a:extLst>
           </p:cNvPr>
@@ -9744,7 +9744,7 @@
     </p:spTree>
     <p:extLst>
       <p:ext uri="{BB962C8B-B14F-4D97-AF65-F5344CB8AC3E}">
-        <p14:creationId xmlns:p14="http://schemas.microsoft.com/office/powerpoint/2010/main" val="934195334"/>
+        <p14:creationId xmlns:p14="http://schemas.microsoft.com/office/powerpoint/2010/main" val="867603279"/>
       </p:ext>
     </p:extLst>
   </p:cSld>
